--- a/apresentacao_portal_gcac.pptx
+++ b/apresentacao_portal_gcac.pptx
@@ -4,6 +4,9 @@
   <p:sldMasterIdLst>
     <p:sldMasterId id="2147483648" r:id="rId1"/>
   </p:sldMasterIdLst>
+  <p:notesMasterIdLst>
+    <p:notesMasterId r:id="rId15"/>
+  </p:notesMasterIdLst>
   <p:sldIdLst>
     <p:sldId id="256" r:id="rId2"/>
     <p:sldId id="257" r:id="rId3"/>
@@ -19,10 +22,7 @@
     <p:sldId id="267" r:id="rId13"/>
     <p:sldId id="268" r:id="rId14"/>
   </p:sldIdLst>
-  <p:notesMasterIdLst>
-    <p:notesMasterId r:id="rId15"/>
-  </p:notesMasterIdLst>
-  <p:sldSz cx="9144000" cy="5143500"/>
+  <p:sldSz cx="9144000" cy="5143500" type="screen16x9"/>
   <p:notesSz cx="5143500" cy="9144000"/>
   <p:defaultTextStyle>
     <a:lvl1pPr marL="0" algn="l" defTabSz="914400" rtl="0" eaLnBrk="1" latinLnBrk="0" hangingPunct="1">
@@ -116,6 +116,11 @@
       </a:defRPr>
     </a:lvl9pPr>
   </p:defaultTextStyle>
+  <p:extLst>
+    <p:ext uri="{EFAFB233-063F-42B5-8137-9DF3F51BA10A}">
+      <p15:sldGuideLst xmlns:p15="http://schemas.microsoft.com/office/powerpoint/2012/main"/>
+    </p:ext>
+  </p:extLst>
 </p:presentation>
 </file>
 
@@ -141,234 +146,10 @@
           <a:chExt cx="0" cy="0"/>
         </a:xfrm>
       </p:grpSpPr>
-      <p:sp>
-        <p:nvSpPr>
-          <p:cNvPr id="2" name="Header Placeholder 1"/>
-          <p:cNvSpPr>
-            <a:spLocks noGrp="1"/>
-          </p:cNvSpPr>
-          <p:nvPr>
-            <p:ph type="hdr" sz="quarter"/>
-          </p:nvPr>
-        </p:nvSpPr>
-        <p:spPr>
-          <a:xfrm>
-            <a:off x="0" y="0"/>
-            <a:ext cx="2971800" cy="458788"/>
-          </a:xfrm>
-          <a:prstGeom prst="rect">
-            <a:avLst/>
-          </a:prstGeom>
-        </p:spPr>
-        <p:txBody>
-          <a:bodyPr vert="horz" lIns="91440" tIns="45720" rIns="91440" bIns="45720" rtlCol="0"/>
-          <a:lstStyle>
-            <a:lvl1pPr algn="l">
-              <a:defRPr sz="1200"/>
-            </a:lvl1pPr>
-          </a:lstStyle>
-          <a:p>
-            <a:endParaRPr lang="en-US"/>
-          </a:p>
-        </p:txBody>
-      </p:sp>
-      <p:sp>
-        <p:nvSpPr>
-          <p:cNvPr id="3" name="Date Placeholder 2"/>
-          <p:cNvSpPr>
-            <a:spLocks noGrp="1"/>
-          </p:cNvSpPr>
-          <p:nvPr>
-            <p:ph type="dt" idx="1"/>
-          </p:nvPr>
-        </p:nvSpPr>
-        <p:spPr>
-          <a:xfrm>
-            <a:off x="3884613" y="0"/>
-            <a:ext cx="2971800" cy="458788"/>
-          </a:xfrm>
-          <a:prstGeom prst="rect">
-            <a:avLst/>
-          </a:prstGeom>
-        </p:spPr>
-        <p:txBody>
-          <a:bodyPr vert="horz" lIns="91440" tIns="45720" rIns="91440" bIns="45720" rtlCol="0"/>
-          <a:lstStyle>
-            <a:lvl1pPr algn="r">
-              <a:defRPr sz="1200"/>
-            </a:lvl1pPr>
-          </a:lstStyle>
-          <a:p>
-            <a:fld id="{5282F153-3F37-0F45-9E97-73ACFA13230C}" type="datetimeFigureOut">
-              <a:rPr lang="en-US"/>
-              <a:t>7/23/19</a:t>
-            </a:fld>
-            <a:endParaRPr lang="en-US"/>
-          </a:p>
-        </p:txBody>
-      </p:sp>
-      <p:sp>
-        <p:nvSpPr>
-          <p:cNvPr id="4" name="Slide Image Placeholder 3"/>
-          <p:cNvSpPr>
-            <a:spLocks noGrp="1" noRot="1" noChangeAspect="1"/>
-          </p:cNvSpPr>
-          <p:nvPr>
-            <p:ph type="sldImg" idx="2"/>
-          </p:nvPr>
-        </p:nvSpPr>
-        <p:spPr>
-          <a:xfrm>
-            <a:off x="685800" y="1143000"/>
-            <a:ext cx="5486400" cy="3086100"/>
-          </a:xfrm>
-          <a:prstGeom prst="rect">
-            <a:avLst/>
-          </a:prstGeom>
-          <a:noFill/>
-          <a:ln w="12700">
-            <a:solidFill>
-              <a:prstClr val="black"/>
-            </a:solidFill>
-          </a:ln>
-        </p:spPr>
-        <p:txBody>
-          <a:bodyPr vert="horz" lIns="91440" tIns="45720" rIns="91440" bIns="45720" rtlCol="0" anchor="ctr"/>
-          <a:lstStyle/>
-          <a:p>
-            <a:endParaRPr lang="en-US"/>
-          </a:p>
-        </p:txBody>
-      </p:sp>
-      <p:sp>
-        <p:nvSpPr>
-          <p:cNvPr id="5" name="Notes Placeholder 4"/>
-          <p:cNvSpPr>
-            <a:spLocks noGrp="1"/>
-          </p:cNvSpPr>
-          <p:nvPr>
-            <p:ph type="body" sz="quarter" idx="3"/>
-          </p:nvPr>
-        </p:nvSpPr>
-        <p:spPr>
-          <a:xfrm>
-            <a:off x="685800" y="4400550"/>
-            <a:ext cx="5486400" cy="3600450"/>
-          </a:xfrm>
-          <a:prstGeom prst="rect">
-            <a:avLst/>
-          </a:prstGeom>
-        </p:spPr>
-        <p:txBody>
-          <a:bodyPr vert="horz" lIns="91440" tIns="45720" rIns="91440" bIns="45720" rtlCol="0"/>
-          <a:lstStyle/>
-          <a:p>
-            <a:pPr lvl="0"/>
-            <a:r>
-              <a:rPr lang="en-US"/>
-              <a:t>Click to edit Master text styles</a:t>
-            </a:r>
-          </a:p>
-          <a:p>
-            <a:pPr lvl="1"/>
-            <a:r>
-              <a:rPr lang="en-US"/>
-              <a:t>Second level</a:t>
-            </a:r>
-          </a:p>
-          <a:p>
-            <a:pPr lvl="2"/>
-            <a:r>
-              <a:rPr lang="en-US"/>
-              <a:t>Third level</a:t>
-            </a:r>
-          </a:p>
-          <a:p>
-            <a:pPr lvl="3"/>
-            <a:r>
-              <a:rPr lang="en-US"/>
-              <a:t>Fourth level</a:t>
-            </a:r>
-          </a:p>
-          <a:p>
-            <a:pPr lvl="4"/>
-            <a:r>
-              <a:rPr lang="en-US"/>
-              <a:t>Fifth level</a:t>
-            </a:r>
-          </a:p>
-        </p:txBody>
-      </p:sp>
-      <p:sp>
-        <p:nvSpPr>
-          <p:cNvPr id="6" name="Footer Placeholder 5"/>
-          <p:cNvSpPr>
-            <a:spLocks noGrp="1"/>
-          </p:cNvSpPr>
-          <p:nvPr>
-            <p:ph type="ftr" sz="quarter" idx="4"/>
-          </p:nvPr>
-        </p:nvSpPr>
-        <p:spPr>
-          <a:xfrm>
-            <a:off x="0" y="8685213"/>
-            <a:ext cx="2971800" cy="458787"/>
-          </a:xfrm>
-          <a:prstGeom prst="rect">
-            <a:avLst/>
-          </a:prstGeom>
-        </p:spPr>
-        <p:txBody>
-          <a:bodyPr vert="horz" lIns="91440" tIns="45720" rIns="91440" bIns="45720" rtlCol="0" anchor="b"/>
-          <a:lstStyle>
-            <a:lvl1pPr algn="l">
-              <a:defRPr sz="1200"/>
-            </a:lvl1pPr>
-          </a:lstStyle>
-          <a:p>
-            <a:endParaRPr lang="en-US"/>
-          </a:p>
-        </p:txBody>
-      </p:sp>
-      <p:sp>
-        <p:nvSpPr>
-          <p:cNvPr id="7" name="Slide Number Placeholder 6"/>
-          <p:cNvSpPr>
-            <a:spLocks noGrp="1"/>
-          </p:cNvSpPr>
-          <p:nvPr>
-            <p:ph type="sldNum" sz="quarter" idx="5"/>
-          </p:nvPr>
-        </p:nvSpPr>
-        <p:spPr>
-          <a:xfrm>
-            <a:off x="3884613" y="8685213"/>
-            <a:ext cx="2971800" cy="458787"/>
-          </a:xfrm>
-          <a:prstGeom prst="rect">
-            <a:avLst/>
-          </a:prstGeom>
-        </p:spPr>
-        <p:txBody>
-          <a:bodyPr vert="horz" lIns="91440" tIns="45720" rIns="91440" bIns="45720" rtlCol="0" anchor="b"/>
-          <a:lstStyle>
-            <a:lvl1pPr algn="r">
-              <a:defRPr sz="1200"/>
-            </a:lvl1pPr>
-          </a:lstStyle>
-          <a:p>
-            <a:fld id="{CE5E9CC1-C706-0F49-92D6-E571CC5EEA8F}" type="slidenum">
-              <a:rPr lang="en-US"/>
-              <a:t>‹#›</a:t>
-            </a:fld>
-            <a:endParaRPr lang="en-US"/>
-          </a:p>
-        </p:txBody>
-      </p:sp>
     </p:spTree>
     <p:extLst>
       <p:ext uri="{BB962C8B-B14F-4D97-AF65-F5344CB8AC3E}">
-        <p14:creationId xmlns:p14="http://schemas.microsoft.com/office/powerpoint/2010/main" val="1024086991"/>
+        <p14:creationId xmlns:p14="http://schemas.microsoft.com/office/powerpoint/2010/main" val="238286111"/>
       </p:ext>
     </p:extLst>
   </p:cSld>
@@ -512,10 +293,6 @@
           <a:bodyPr/>
           <a:lstStyle/>
           <a:p>
-            <a:r>
-              <a:rPr lang="en-US" dirty="0"/>
-              <a:t/>
-            </a:r>
             <a:endParaRPr lang="en-US" dirty="0"/>
           </a:p>
         </p:txBody>
@@ -600,10 +377,6 @@
           <a:bodyPr/>
           <a:lstStyle/>
           <a:p>
-            <a:r>
-              <a:rPr lang="en-US" dirty="0"/>
-              <a:t/>
-            </a:r>
             <a:endParaRPr lang="en-US" dirty="0"/>
           </a:p>
         </p:txBody>
@@ -688,10 +461,6 @@
           <a:bodyPr/>
           <a:lstStyle/>
           <a:p>
-            <a:r>
-              <a:rPr lang="en-US" dirty="0"/>
-              <a:t/>
-            </a:r>
             <a:endParaRPr lang="en-US" dirty="0"/>
           </a:p>
         </p:txBody>
@@ -776,10 +545,6 @@
           <a:bodyPr/>
           <a:lstStyle/>
           <a:p>
-            <a:r>
-              <a:rPr lang="en-US" dirty="0"/>
-              <a:t/>
-            </a:r>
             <a:endParaRPr lang="en-US" dirty="0"/>
           </a:p>
         </p:txBody>
@@ -864,10 +629,6 @@
           <a:bodyPr/>
           <a:lstStyle/>
           <a:p>
-            <a:r>
-              <a:rPr lang="en-US" dirty="0"/>
-              <a:t/>
-            </a:r>
             <a:endParaRPr lang="en-US" dirty="0"/>
           </a:p>
         </p:txBody>
@@ -952,10 +713,6 @@
           <a:bodyPr/>
           <a:lstStyle/>
           <a:p>
-            <a:r>
-              <a:rPr lang="en-US" dirty="0"/>
-              <a:t/>
-            </a:r>
             <a:endParaRPr lang="en-US" dirty="0"/>
           </a:p>
         </p:txBody>
@@ -1040,10 +797,6 @@
           <a:bodyPr/>
           <a:lstStyle/>
           <a:p>
-            <a:r>
-              <a:rPr lang="en-US" dirty="0"/>
-              <a:t/>
-            </a:r>
             <a:endParaRPr lang="en-US" dirty="0"/>
           </a:p>
         </p:txBody>
@@ -1128,10 +881,6 @@
           <a:bodyPr/>
           <a:lstStyle/>
           <a:p>
-            <a:r>
-              <a:rPr lang="en-US" dirty="0"/>
-              <a:t/>
-            </a:r>
             <a:endParaRPr lang="en-US" dirty="0"/>
           </a:p>
         </p:txBody>
@@ -1216,10 +965,6 @@
           <a:bodyPr/>
           <a:lstStyle/>
           <a:p>
-            <a:r>
-              <a:rPr lang="en-US" dirty="0"/>
-              <a:t/>
-            </a:r>
             <a:endParaRPr lang="en-US" dirty="0"/>
           </a:p>
         </p:txBody>
@@ -1304,10 +1049,6 @@
           <a:bodyPr/>
           <a:lstStyle/>
           <a:p>
-            <a:r>
-              <a:rPr lang="en-US" dirty="0"/>
-              <a:t/>
-            </a:r>
             <a:endParaRPr lang="en-US" dirty="0"/>
           </a:p>
         </p:txBody>
@@ -1392,10 +1133,6 @@
           <a:bodyPr/>
           <a:lstStyle/>
           <a:p>
-            <a:r>
-              <a:rPr lang="en-US" dirty="0"/>
-              <a:t/>
-            </a:r>
             <a:endParaRPr lang="en-US" dirty="0"/>
           </a:p>
         </p:txBody>
@@ -1480,10 +1217,6 @@
           <a:bodyPr/>
           <a:lstStyle/>
           <a:p>
-            <a:r>
-              <a:rPr lang="en-US" dirty="0"/>
-              <a:t/>
-            </a:r>
             <a:endParaRPr lang="en-US" dirty="0"/>
           </a:p>
         </p:txBody>
@@ -1568,10 +1301,6 @@
           <a:bodyPr/>
           <a:lstStyle/>
           <a:p>
-            <a:r>
-              <a:rPr lang="en-US" dirty="0"/>
-              <a:t/>
-            </a:r>
             <a:endParaRPr lang="en-US" dirty="0"/>
           </a:p>
         </p:txBody>
@@ -1645,6 +1374,11 @@
 <file path=ppt/slideMasters/slideMaster1.xml><?xml version="1.0" encoding="utf-8"?>
 <p:sldMaster xmlns:a="http://schemas.openxmlformats.org/drawingml/2006/main" xmlns:r="http://schemas.openxmlformats.org/officeDocument/2006/relationships" xmlns:p="http://schemas.openxmlformats.org/presentationml/2006/main">
   <p:cSld>
+    <p:bg>
+      <p:bgRef idx="1001">
+        <a:schemeClr val="bg1"/>
+      </p:bgRef>
+    </p:bg>
     <p:spTree>
       <p:nvGrpSpPr>
         <p:cNvPr id="1" name=""/>
@@ -1927,6 +1661,7 @@
         <a:solidFill>
           <a:srgbClr val="0B0F19"/>
         </a:solidFill>
+        <a:effectLst/>
       </p:bgPr>
     </p:bg>
     <p:spTree>
@@ -1945,56 +1680,6 @@
       </p:grpSpPr>
       <p:sp>
         <p:nvSpPr>
-          <p:cNvPr id="2" name="Shape 0"/>
-          <p:cNvSpPr/>
-          <p:nvPr/>
-        </p:nvSpPr>
-        <p:spPr>
-          <a:xfrm>
-            <a:off x="9144000" y="4114800"/>
-            <a:ext cx="5486400" cy="5486400"/>
-          </a:xfrm>
-          <a:prstGeom prst="ellipse">
-            <a:avLst/>
-          </a:prstGeom>
-          <a:solidFill>
-            <a:srgbClr val="0B0F19"/>
-          </a:solidFill>
-          <a:ln w="19050">
-            <a:solidFill>
-              <a:srgbClr val="2563EB"/>
-            </a:solidFill>
-            <a:prstDash val="solid"/>
-          </a:ln>
-        </p:spPr>
-      </p:sp>
-      <p:sp>
-        <p:nvSpPr>
-          <p:cNvPr id="3" name="Shape 1"/>
-          <p:cNvSpPr/>
-          <p:nvPr/>
-        </p:nvSpPr>
-        <p:spPr>
-          <a:xfrm>
-            <a:off x="9601200" y="4572000"/>
-            <a:ext cx="4572000" cy="4572000"/>
-          </a:xfrm>
-          <a:prstGeom prst="ellipse">
-            <a:avLst/>
-          </a:prstGeom>
-          <a:solidFill>
-            <a:srgbClr val="0B0F19"/>
-          </a:solidFill>
-          <a:ln w="6350">
-            <a:solidFill>
-              <a:srgbClr val="F59E0B"/>
-            </a:solidFill>
-            <a:prstDash val="solid"/>
-          </a:ln>
-        </p:spPr>
-      </p:sp>
-      <p:sp>
-        <p:nvSpPr>
           <p:cNvPr id="4" name="Shape 2"/>
           <p:cNvSpPr/>
           <p:nvPr/>
@@ -2054,7 +1739,7 @@
           <a:bodyPr wrap="square" rtlCol="0" anchor="ctr"/>
           <a:lstStyle/>
           <a:p>
-            <a:pPr indent="0" marL="0">
+            <a:pPr marL="0" indent="0">
               <a:buNone/>
             </a:pPr>
             <a:r>
@@ -2090,7 +1775,7 @@
           <a:bodyPr wrap="square" rtlCol="0" anchor="ctr"/>
           <a:lstStyle/>
           <a:p>
-            <a:pPr indent="0" marL="0">
+            <a:pPr marL="0" indent="0">
               <a:buNone/>
             </a:pPr>
             <a:r>
@@ -2126,7 +1811,7 @@
           <a:bodyPr wrap="square" rtlCol="0" anchor="ctr"/>
           <a:lstStyle/>
           <a:p>
-            <a:pPr indent="0" marL="0">
+            <a:pPr marL="0" indent="0">
               <a:buNone/>
             </a:pPr>
             <a:r>
@@ -2162,7 +1847,7 @@
           <a:bodyPr wrap="square" rtlCol="0" anchor="ctr"/>
           <a:lstStyle/>
           <a:p>
-            <a:pPr indent="0" marL="0">
+            <a:pPr marL="0" indent="0">
               <a:buNone/>
             </a:pPr>
             <a:r>
@@ -2198,7 +1883,7 @@
           <a:bodyPr wrap="square" rtlCol="0" anchor="ctr"/>
           <a:lstStyle/>
           <a:p>
-            <a:pPr indent="0" marL="0">
+            <a:pPr marL="0" indent="0">
               <a:buNone/>
             </a:pPr>
             <a:r>
@@ -2229,6 +1914,7 @@
         <a:solidFill>
           <a:srgbClr val="0B0F19"/>
         </a:solidFill>
+        <a:effectLst/>
       </p:bgPr>
     </p:bg>
     <p:spTree>
@@ -2266,7 +1952,7 @@
           <a:bodyPr wrap="square" rtlCol="0" anchor="ctr"/>
           <a:lstStyle/>
           <a:p>
-            <a:pPr indent="0" marL="0">
+            <a:pPr marL="0" indent="0">
               <a:buNone/>
             </a:pPr>
             <a:r>
@@ -2302,7 +1988,7 @@
           <a:bodyPr wrap="square" rtlCol="0" anchor="ctr"/>
           <a:lstStyle/>
           <a:p>
-            <a:pPr indent="0" marL="0">
+            <a:pPr marL="0" indent="0">
               <a:buNone/>
             </a:pPr>
             <a:r>
@@ -2319,13 +2005,141 @@
       </p:sp>
       <p:sp>
         <p:nvSpPr>
-          <p:cNvPr id="4" name="Shape 2"/>
-          <p:cNvSpPr/>
-          <p:nvPr/>
-        </p:nvSpPr>
-        <p:spPr>
-          <a:xfrm>
-            <a:off x="457200" y="1097280"/>
+          <p:cNvPr id="5" name="Text 3"/>
+          <p:cNvSpPr/>
+          <p:nvPr/>
+        </p:nvSpPr>
+        <p:spPr>
+          <a:xfrm>
+            <a:off x="457200" y="1463040"/>
+            <a:ext cx="5029200" cy="4389120"/>
+          </a:xfrm>
+          <a:prstGeom prst="rect">
+            <a:avLst/>
+          </a:prstGeom>
+          <a:noFill/>
+          <a:ln/>
+        </p:spPr>
+        <p:txBody>
+          <a:bodyPr wrap="square" rtlCol="0" anchor="t"/>
+          <a:lstStyle/>
+          <a:p>
+            <a:pPr marL="0" indent="0" algn="l">
+              <a:buNone/>
+            </a:pPr>
+            <a:r>
+              <a:rPr lang="en-US" sz="1300" b="1" dirty="0">
+                <a:solidFill>
+                  <a:srgbClr val="F59E0B"/>
+                </a:solidFill>
+              </a:rPr>
+              <a:t>• Conexão Direta B2C: </a:t>
+            </a:r>
+            <a:r>
+              <a:rPr lang="en-US" sz="1200" dirty="0">
+                <a:solidFill>
+                  <a:srgbClr val="CBD5E1"/>
+                </a:solidFill>
+              </a:rPr>
+              <a:t>Vínculo do despachante diretamente com a conta do atirador, reduzindo troca manual de fotos.
+</a:t>
+            </a:r>
+            <a:r>
+              <a:rPr lang="en-US" sz="1300" b="1" dirty="0">
+                <a:solidFill>
+                  <a:srgbClr val="F59E0B"/>
+                </a:solidFill>
+              </a:rPr>
+              <a:t>• Validação de CR: </a:t>
+            </a:r>
+            <a:r>
+              <a:rPr lang="en-US" sz="1200" dirty="0">
+                <a:solidFill>
+                  <a:srgbClr val="CBD5E1"/>
+                </a:solidFill>
+              </a:rPr>
+              <a:t>Monitoramento digital de CR Exército e IBAMA com marcadores de cor para status ativo, vencido ou vencendo.
+</a:t>
+            </a:r>
+            <a:r>
+              <a:rPr lang="en-US" sz="1300" b="1" dirty="0">
+                <a:solidFill>
+                  <a:srgbClr val="F59E0B"/>
+                </a:solidFill>
+              </a:rPr>
+              <a:t>• Armas e Documentos: </a:t>
+            </a:r>
+            <a:r>
+              <a:rPr lang="en-US" sz="1200" dirty="0">
+                <a:solidFill>
+                  <a:srgbClr val="CBD5E1"/>
+                </a:solidFill>
+              </a:rPr>
+              <a:t>Ficha completa com Série, Sigma, Calibre, Validade do CRAF e anexos de documentos e GTs.
+</a:t>
+            </a:r>
+            <a:endParaRPr lang="en-US" sz="1300" dirty="0"/>
+          </a:p>
+        </p:txBody>
+      </p:sp>
+      <p:sp>
+        <p:nvSpPr>
+          <p:cNvPr id="6" name="Shape 4"/>
+          <p:cNvSpPr/>
+          <p:nvPr/>
+        </p:nvSpPr>
+        <p:spPr>
+          <a:xfrm>
+            <a:off x="5852160" y="1554480"/>
+            <a:ext cx="5852160" cy="3474720"/>
+          </a:xfrm>
+          <a:prstGeom prst="rect">
+            <a:avLst/>
+          </a:prstGeom>
+          <a:solidFill>
+            <a:srgbClr val="141A28"/>
+          </a:solidFill>
+          <a:ln w="12700">
+            <a:solidFill>
+              <a:srgbClr val="1E293B"/>
+            </a:solidFill>
+            <a:prstDash val="solid"/>
+          </a:ln>
+        </p:spPr>
+      </p:sp>
+      <p:pic>
+        <p:nvPicPr>
+          <p:cNvPr id="7" name="Image 0" descr="C:\Users\Guilherme Gomes\.gemini\antigravity\brain\392f0286-5b76-4ec8-ac1d-7de16ea0eefa\media__1780322389774.png"/>
+          <p:cNvPicPr>
+            <a:picLocks noChangeAspect="1"/>
+          </p:cNvPicPr>
+          <p:nvPr/>
+        </p:nvPicPr>
+        <p:blipFill>
+          <a:blip r:embed="rId3"/>
+          <a:stretch>
+            <a:fillRect/>
+          </a:stretch>
+        </p:blipFill>
+        <p:spPr>
+          <a:xfrm>
+            <a:off x="5943600" y="1645920"/>
+            <a:ext cx="5669280" cy="3291840"/>
+          </a:xfrm>
+          <a:prstGeom prst="rect">
+            <a:avLst/>
+          </a:prstGeom>
+        </p:spPr>
+      </p:pic>
+      <p:sp>
+        <p:nvSpPr>
+          <p:cNvPr id="8" name="Shape 5"/>
+          <p:cNvSpPr/>
+          <p:nvPr/>
+        </p:nvSpPr>
+        <p:spPr>
+          <a:xfrm>
+            <a:off x="457200" y="6126480"/>
             <a:ext cx="11274552" cy="18288"/>
           </a:xfrm>
           <a:prstGeom prst="rect">
@@ -2344,14 +2158,14 @@
       </p:sp>
       <p:sp>
         <p:nvSpPr>
-          <p:cNvPr id="5" name="Text 3"/>
-          <p:cNvSpPr/>
-          <p:nvPr/>
-        </p:nvSpPr>
-        <p:spPr>
-          <a:xfrm>
-            <a:off x="457200" y="1463040"/>
-            <a:ext cx="5029200" cy="4389120"/>
+          <p:cNvPr id="9" name="Text 6"/>
+          <p:cNvSpPr/>
+          <p:nvPr/>
+        </p:nvSpPr>
+        <p:spPr>
+          <a:xfrm>
+            <a:off x="457200" y="6217920"/>
+            <a:ext cx="7315200" cy="274320"/>
           </a:xfrm>
           <a:prstGeom prst="rect">
             <a:avLst/>
@@ -2360,174 +2174,40 @@
           <a:ln/>
         </p:spPr>
         <p:txBody>
-          <a:bodyPr wrap="square" rtlCol="0" anchor="t"/>
-          <a:lstStyle/>
-          <a:p>
-            <a:pPr algn="l" indent="0" marL="0">
+          <a:bodyPr wrap="square" rtlCol="0" anchor="ctr"/>
+          <a:lstStyle/>
+          <a:p>
+            <a:pPr marL="0" indent="0">
               <a:buNone/>
             </a:pPr>
             <a:r>
-              <a:rPr lang="en-US" sz="1300" b="1" dirty="0">
-                <a:solidFill>
-                  <a:srgbClr val="F59E0B"/>
-                </a:solidFill>
-              </a:rPr>
-              <a:t>• </a:t>
-            </a:r>
-            <a:pPr algn="l" indent="0" marL="0">
-              <a:buNone/>
-            </a:pPr>
-            <a:r>
-              <a:rPr lang="en-US" sz="1300" b="1" dirty="0">
-                <a:solidFill>
-                  <a:srgbClr val="F59E0B"/>
-                </a:solidFill>
-              </a:rPr>
-              <a:t>Conexão Direta B2C: </a:t>
-            </a:r>
-            <a:pPr algn="l" indent="0" marL="0">
-              <a:buNone/>
-            </a:pPr>
-            <a:r>
-              <a:rPr lang="en-US" sz="1200" dirty="0">
-                <a:solidFill>
-                  <a:srgbClr val="CBD5E1"/>
-                </a:solidFill>
-              </a:rPr>
-              <a:t>Vínculo do despachante diretamente com a conta do atirador, reduzindo troca manual de fotos.
-</a:t>
-            </a:r>
-            <a:pPr algn="l" indent="0" marL="0">
-              <a:buNone/>
-            </a:pPr>
-            <a:r>
-              <a:rPr lang="en-US" sz="1300" b="1" dirty="0">
-                <a:solidFill>
-                  <a:srgbClr val="F59E0B"/>
-                </a:solidFill>
-              </a:rPr>
-              <a:t>• </a:t>
-            </a:r>
-            <a:pPr algn="l" indent="0" marL="0">
-              <a:buNone/>
-            </a:pPr>
-            <a:r>
-              <a:rPr lang="en-US" sz="1300" b="1" dirty="0">
-                <a:solidFill>
-                  <a:srgbClr val="F59E0B"/>
-                </a:solidFill>
-              </a:rPr>
-              <a:t>Validação de CR: </a:t>
-            </a:r>
-            <a:pPr algn="l" indent="0" marL="0">
-              <a:buNone/>
-            </a:pPr>
-            <a:r>
-              <a:rPr lang="en-US" sz="1200" dirty="0">
-                <a:solidFill>
-                  <a:srgbClr val="CBD5E1"/>
-                </a:solidFill>
-              </a:rPr>
-              <a:t>Monitoramento digital de CR Exército e IBAMA com marcadores de cor para status ativo, vencido ou vencendo.
-</a:t>
-            </a:r>
-            <a:pPr algn="l" indent="0" marL="0">
-              <a:buNone/>
-            </a:pPr>
-            <a:r>
-              <a:rPr lang="en-US" sz="1300" b="1" dirty="0">
-                <a:solidFill>
-                  <a:srgbClr val="F59E0B"/>
-                </a:solidFill>
-              </a:rPr>
-              <a:t>• </a:t>
-            </a:r>
-            <a:pPr algn="l" indent="0" marL="0">
-              <a:buNone/>
-            </a:pPr>
-            <a:r>
-              <a:rPr lang="en-US" sz="1300" b="1" dirty="0">
-                <a:solidFill>
-                  <a:srgbClr val="F59E0B"/>
-                </a:solidFill>
-              </a:rPr>
-              <a:t>Armas e Documentos: </a:t>
-            </a:r>
-            <a:pPr algn="l" indent="0" marL="0">
-              <a:buNone/>
-            </a:pPr>
-            <a:r>
-              <a:rPr lang="en-US" sz="1200" dirty="0">
-                <a:solidFill>
-                  <a:srgbClr val="CBD5E1"/>
-                </a:solidFill>
-              </a:rPr>
-              <a:t>Ficha completa com Série, Sigma, Calibre, Validade do CRAF e anexos de documentos e GTs.
-</a:t>
-            </a:r>
-            <a:endParaRPr lang="en-US" sz="1300" dirty="0"/>
-          </a:p>
-        </p:txBody>
-      </p:sp>
-      <p:sp>
-        <p:nvSpPr>
-          <p:cNvPr id="6" name="Shape 4"/>
-          <p:cNvSpPr/>
-          <p:nvPr/>
-        </p:nvSpPr>
-        <p:spPr>
-          <a:xfrm>
-            <a:off x="5852160" y="1554480"/>
-            <a:ext cx="5852160" cy="3474720"/>
-          </a:xfrm>
-          <a:prstGeom prst="rect">
-            <a:avLst/>
-          </a:prstGeom>
-          <a:solidFill>
-            <a:srgbClr val="141A28"/>
-          </a:solidFill>
-          <a:ln w="12700">
-            <a:solidFill>
-              <a:srgbClr val="1E293B"/>
-            </a:solidFill>
-            <a:prstDash val="solid"/>
-          </a:ln>
-        </p:spPr>
-      </p:sp>
-      <p:pic>
-        <p:nvPicPr>
-          <p:cNvPr id="7" name="Image 0" descr="C:\Users\Guilherme Gomes\.gemini\antigravity\brain\392f0286-5b76-4ec8-ac1d-7de16ea0eefa\media__1780322389774.png">    </p:cNvPr>
-          <p:cNvPicPr>
-            <a:picLocks noChangeAspect="1"/>
-          </p:cNvPicPr>
-          <p:nvPr/>
-        </p:nvPicPr>
-        <p:blipFill>
-          <a:blip r:embed="rId1"/>
-          <a:stretch>
-            <a:fillRect/>
-          </a:stretch>
-        </p:blipFill>
-        <p:spPr>
-          <a:xfrm>
-            <a:off x="5943600" y="1645920"/>
-            <a:ext cx="5669280" cy="3291840"/>
-          </a:xfrm>
-          <a:prstGeom prst="rect">
-            <a:avLst/>
-          </a:prstGeom>
-        </p:spPr>
-      </p:pic>
-      <p:sp>
-        <p:nvSpPr>
-          <p:cNvPr id="8" name="Shape 5"/>
-          <p:cNvSpPr/>
-          <p:nvPr/>
-        </p:nvSpPr>
-        <p:spPr>
-          <a:xfrm>
-            <a:off x="457200" y="6126480"/>
-            <a:ext cx="11274552" cy="18288"/>
+              <a:rPr lang="en-US" sz="900" dirty="0">
+                <a:solidFill>
+                  <a:srgbClr val="94A3B8"/>
+                </a:solidFill>
+              </a:rPr>
+              <a:t>Portal GCAC — Solução para Atiradores, Colecionadores, Caçadores e Despachantes</a:t>
+            </a:r>
+            <a:endParaRPr lang="en-US" sz="900" dirty="0"/>
+          </a:p>
+        </p:txBody>
+      </p:sp>
+      <p:sp>
+        <p:nvSpPr>
+          <p:cNvPr id="10" name="Shape 2">
+            <a:extLst>
+              <a:ext uri="{FF2B5EF4-FFF2-40B4-BE49-F238E27FC236}">
+                <a16:creationId xmlns:a16="http://schemas.microsoft.com/office/drawing/2014/main" id="{24D10CD9-6CE8-4635-A33D-A1E253EFC3CF}"/>
+              </a:ext>
+            </a:extLst>
+          </p:cNvPr>
+          <p:cNvSpPr/>
+          <p:nvPr/>
+        </p:nvSpPr>
+        <p:spPr>
+          <a:xfrm>
+            <a:off x="457200" y="1097280"/>
+            <a:ext cx="8563356" cy="68580"/>
           </a:xfrm>
           <a:prstGeom prst="rect">
             <a:avLst/>
@@ -2542,42 +2222,6 @@
             <a:prstDash val="solid"/>
           </a:ln>
         </p:spPr>
-      </p:sp>
-      <p:sp>
-        <p:nvSpPr>
-          <p:cNvPr id="9" name="Text 6"/>
-          <p:cNvSpPr/>
-          <p:nvPr/>
-        </p:nvSpPr>
-        <p:spPr>
-          <a:xfrm>
-            <a:off x="457200" y="6217920"/>
-            <a:ext cx="7315200" cy="274320"/>
-          </a:xfrm>
-          <a:prstGeom prst="rect">
-            <a:avLst/>
-          </a:prstGeom>
-          <a:noFill/>
-          <a:ln/>
-        </p:spPr>
-        <p:txBody>
-          <a:bodyPr wrap="square" rtlCol="0" anchor="ctr"/>
-          <a:lstStyle/>
-          <a:p>
-            <a:pPr indent="0" marL="0">
-              <a:buNone/>
-            </a:pPr>
-            <a:r>
-              <a:rPr lang="en-US" sz="900" dirty="0">
-                <a:solidFill>
-                  <a:srgbClr val="94A3B8"/>
-                </a:solidFill>
-              </a:rPr>
-              <a:t>Portal GCAC — Solução para Atiradores, Colecionadores, Caçadores e Despachantes</a:t>
-            </a:r>
-            <a:endParaRPr lang="en-US" sz="900" dirty="0"/>
-          </a:p>
-        </p:txBody>
       </p:sp>
     </p:spTree>
   </p:cSld>
@@ -2595,6 +2239,7 @@
         <a:solidFill>
           <a:srgbClr val="0B0F19"/>
         </a:solidFill>
+        <a:effectLst/>
       </p:bgPr>
     </p:bg>
     <p:spTree>
@@ -2632,7 +2277,7 @@
           <a:bodyPr wrap="square" rtlCol="0" anchor="ctr"/>
           <a:lstStyle/>
           <a:p>
-            <a:pPr indent="0" marL="0">
+            <a:pPr marL="0" indent="0">
               <a:buNone/>
             </a:pPr>
             <a:r>
@@ -2668,7 +2313,7 @@
           <a:bodyPr wrap="square" rtlCol="0" anchor="ctr"/>
           <a:lstStyle/>
           <a:p>
-            <a:pPr indent="0" marL="0">
+            <a:pPr marL="0" indent="0">
               <a:buNone/>
             </a:pPr>
             <a:r>
@@ -2685,13 +2330,141 @@
       </p:sp>
       <p:sp>
         <p:nvSpPr>
-          <p:cNvPr id="4" name="Shape 2"/>
-          <p:cNvSpPr/>
-          <p:nvPr/>
-        </p:nvSpPr>
-        <p:spPr>
-          <a:xfrm>
-            <a:off x="457200" y="1097280"/>
+          <p:cNvPr id="5" name="Text 3"/>
+          <p:cNvSpPr/>
+          <p:nvPr/>
+        </p:nvSpPr>
+        <p:spPr>
+          <a:xfrm>
+            <a:off x="457200" y="1463040"/>
+            <a:ext cx="5029200" cy="4389120"/>
+          </a:xfrm>
+          <a:prstGeom prst="rect">
+            <a:avLst/>
+          </a:prstGeom>
+          <a:noFill/>
+          <a:ln/>
+        </p:spPr>
+        <p:txBody>
+          <a:bodyPr wrap="square" rtlCol="0" anchor="t"/>
+          <a:lstStyle/>
+          <a:p>
+            <a:pPr marL="0" indent="0" algn="l">
+              <a:buNone/>
+            </a:pPr>
+            <a:r>
+              <a:rPr lang="en-US" sz="1300" b="1" dirty="0">
+                <a:solidFill>
+                  <a:srgbClr val="F59E0B"/>
+                </a:solidFill>
+              </a:rPr>
+              <a:t>• Fim do Scroll Lateral: </a:t>
+            </a:r>
+            <a:r>
+              <a:rPr lang="en-US" sz="1200" dirty="0">
+                <a:solidFill>
+                  <a:srgbClr val="CBD5E1"/>
+                </a:solidFill>
+              </a:rPr>
+              <a:t>Estrutura de dados totalmente visível na tela sem a necessidade de barra de rolagem horizontal.
+</a:t>
+            </a:r>
+            <a:r>
+              <a:rPr lang="en-US" sz="1300" b="1" dirty="0">
+                <a:solidFill>
+                  <a:srgbClr val="F59E0B"/>
+                </a:solidFill>
+              </a:rPr>
+              <a:t>• Espaçamento Inteligente: </a:t>
+            </a:r>
+            <a:r>
+              <a:rPr lang="en-US" sz="1200" dirty="0">
+                <a:solidFill>
+                  <a:srgbClr val="CBD5E1"/>
+                </a:solidFill>
+              </a:rPr>
+              <a:t>Design fluido utilizando wrappers flexíveis (max-w-6xl) para tabelas robustas no computador.
+</a:t>
+            </a:r>
+            <a:r>
+              <a:rPr lang="en-US" sz="1300" b="1" dirty="0">
+                <a:solidFill>
+                  <a:srgbClr val="F59E0B"/>
+                </a:solidFill>
+              </a:rPr>
+              <a:t>• Controle Persistente: </a:t>
+            </a:r>
+            <a:r>
+              <a:rPr lang="en-US" sz="1200" dirty="0">
+                <a:solidFill>
+                  <a:srgbClr val="CBD5E1"/>
+                </a:solidFill>
+              </a:rPr>
+              <a:t>Correção do loop de estado ao marcar/desmarcar checkboxes de permissões no portal B2B.
+</a:t>
+            </a:r>
+            <a:endParaRPr lang="en-US" sz="1300" dirty="0"/>
+          </a:p>
+        </p:txBody>
+      </p:sp>
+      <p:sp>
+        <p:nvSpPr>
+          <p:cNvPr id="6" name="Shape 4"/>
+          <p:cNvSpPr/>
+          <p:nvPr/>
+        </p:nvSpPr>
+        <p:spPr>
+          <a:xfrm>
+            <a:off x="5852160" y="1554480"/>
+            <a:ext cx="5852160" cy="3474720"/>
+          </a:xfrm>
+          <a:prstGeom prst="rect">
+            <a:avLst/>
+          </a:prstGeom>
+          <a:solidFill>
+            <a:srgbClr val="141A28"/>
+          </a:solidFill>
+          <a:ln w="12700">
+            <a:solidFill>
+              <a:srgbClr val="1E293B"/>
+            </a:solidFill>
+            <a:prstDash val="solid"/>
+          </a:ln>
+        </p:spPr>
+      </p:sp>
+      <p:pic>
+        <p:nvPicPr>
+          <p:cNvPr id="7" name="Image 0" descr="C:\Users\Guilherme Gomes\.gemini\antigravity\brain\392f0286-5b76-4ec8-ac1d-7de16ea0eefa\media__1780322517997.png"/>
+          <p:cNvPicPr>
+            <a:picLocks noChangeAspect="1"/>
+          </p:cNvPicPr>
+          <p:nvPr/>
+        </p:nvPicPr>
+        <p:blipFill>
+          <a:blip r:embed="rId3"/>
+          <a:stretch>
+            <a:fillRect/>
+          </a:stretch>
+        </p:blipFill>
+        <p:spPr>
+          <a:xfrm>
+            <a:off x="5943600" y="1645920"/>
+            <a:ext cx="5669280" cy="3291840"/>
+          </a:xfrm>
+          <a:prstGeom prst="rect">
+            <a:avLst/>
+          </a:prstGeom>
+        </p:spPr>
+      </p:pic>
+      <p:sp>
+        <p:nvSpPr>
+          <p:cNvPr id="8" name="Shape 5"/>
+          <p:cNvSpPr/>
+          <p:nvPr/>
+        </p:nvSpPr>
+        <p:spPr>
+          <a:xfrm>
+            <a:off x="457200" y="6126480"/>
             <a:ext cx="11274552" cy="18288"/>
           </a:xfrm>
           <a:prstGeom prst="rect">
@@ -2710,14 +2483,14 @@
       </p:sp>
       <p:sp>
         <p:nvSpPr>
-          <p:cNvPr id="5" name="Text 3"/>
-          <p:cNvSpPr/>
-          <p:nvPr/>
-        </p:nvSpPr>
-        <p:spPr>
-          <a:xfrm>
-            <a:off x="457200" y="1463040"/>
-            <a:ext cx="5029200" cy="4389120"/>
+          <p:cNvPr id="9" name="Text 6"/>
+          <p:cNvSpPr/>
+          <p:nvPr/>
+        </p:nvSpPr>
+        <p:spPr>
+          <a:xfrm>
+            <a:off x="457200" y="6217920"/>
+            <a:ext cx="7315200" cy="274320"/>
           </a:xfrm>
           <a:prstGeom prst="rect">
             <a:avLst/>
@@ -2726,174 +2499,40 @@
           <a:ln/>
         </p:spPr>
         <p:txBody>
-          <a:bodyPr wrap="square" rtlCol="0" anchor="t"/>
-          <a:lstStyle/>
-          <a:p>
-            <a:pPr algn="l" indent="0" marL="0">
+          <a:bodyPr wrap="square" rtlCol="0" anchor="ctr"/>
+          <a:lstStyle/>
+          <a:p>
+            <a:pPr marL="0" indent="0">
               <a:buNone/>
             </a:pPr>
             <a:r>
-              <a:rPr lang="en-US" sz="1300" b="1" dirty="0">
-                <a:solidFill>
-                  <a:srgbClr val="F59E0B"/>
-                </a:solidFill>
-              </a:rPr>
-              <a:t>• </a:t>
-            </a:r>
-            <a:pPr algn="l" indent="0" marL="0">
-              <a:buNone/>
-            </a:pPr>
-            <a:r>
-              <a:rPr lang="en-US" sz="1300" b="1" dirty="0">
-                <a:solidFill>
-                  <a:srgbClr val="F59E0B"/>
-                </a:solidFill>
-              </a:rPr>
-              <a:t>Fim do Scroll Lateral: </a:t>
-            </a:r>
-            <a:pPr algn="l" indent="0" marL="0">
-              <a:buNone/>
-            </a:pPr>
-            <a:r>
-              <a:rPr lang="en-US" sz="1200" dirty="0">
-                <a:solidFill>
-                  <a:srgbClr val="CBD5E1"/>
-                </a:solidFill>
-              </a:rPr>
-              <a:t>Estrutura de dados totalmente visível na tela sem a necessidade de barra de rolagem horizontal.
-</a:t>
-            </a:r>
-            <a:pPr algn="l" indent="0" marL="0">
-              <a:buNone/>
-            </a:pPr>
-            <a:r>
-              <a:rPr lang="en-US" sz="1300" b="1" dirty="0">
-                <a:solidFill>
-                  <a:srgbClr val="F59E0B"/>
-                </a:solidFill>
-              </a:rPr>
-              <a:t>• </a:t>
-            </a:r>
-            <a:pPr algn="l" indent="0" marL="0">
-              <a:buNone/>
-            </a:pPr>
-            <a:r>
-              <a:rPr lang="en-US" sz="1300" b="1" dirty="0">
-                <a:solidFill>
-                  <a:srgbClr val="F59E0B"/>
-                </a:solidFill>
-              </a:rPr>
-              <a:t>Espaçamento Inteligente: </a:t>
-            </a:r>
-            <a:pPr algn="l" indent="0" marL="0">
-              <a:buNone/>
-            </a:pPr>
-            <a:r>
-              <a:rPr lang="en-US" sz="1200" dirty="0">
-                <a:solidFill>
-                  <a:srgbClr val="CBD5E1"/>
-                </a:solidFill>
-              </a:rPr>
-              <a:t>Design fluido utilizando wrappers flexíveis (max-w-6xl) para tabelas robustas no computador.
-</a:t>
-            </a:r>
-            <a:pPr algn="l" indent="0" marL="0">
-              <a:buNone/>
-            </a:pPr>
-            <a:r>
-              <a:rPr lang="en-US" sz="1300" b="1" dirty="0">
-                <a:solidFill>
-                  <a:srgbClr val="F59E0B"/>
-                </a:solidFill>
-              </a:rPr>
-              <a:t>• </a:t>
-            </a:r>
-            <a:pPr algn="l" indent="0" marL="0">
-              <a:buNone/>
-            </a:pPr>
-            <a:r>
-              <a:rPr lang="en-US" sz="1300" b="1" dirty="0">
-                <a:solidFill>
-                  <a:srgbClr val="F59E0B"/>
-                </a:solidFill>
-              </a:rPr>
-              <a:t>Controle Persistente: </a:t>
-            </a:r>
-            <a:pPr algn="l" indent="0" marL="0">
-              <a:buNone/>
-            </a:pPr>
-            <a:r>
-              <a:rPr lang="en-US" sz="1200" dirty="0">
-                <a:solidFill>
-                  <a:srgbClr val="CBD5E1"/>
-                </a:solidFill>
-              </a:rPr>
-              <a:t>Correção do loop de estado ao marcar/desmarcar checkboxes de permissões no portal B2B.
-</a:t>
-            </a:r>
-            <a:endParaRPr lang="en-US" sz="1300" dirty="0"/>
-          </a:p>
-        </p:txBody>
-      </p:sp>
-      <p:sp>
-        <p:nvSpPr>
-          <p:cNvPr id="6" name="Shape 4"/>
-          <p:cNvSpPr/>
-          <p:nvPr/>
-        </p:nvSpPr>
-        <p:spPr>
-          <a:xfrm>
-            <a:off x="5852160" y="1554480"/>
-            <a:ext cx="5852160" cy="3474720"/>
-          </a:xfrm>
-          <a:prstGeom prst="rect">
-            <a:avLst/>
-          </a:prstGeom>
-          <a:solidFill>
-            <a:srgbClr val="141A28"/>
-          </a:solidFill>
-          <a:ln w="12700">
-            <a:solidFill>
-              <a:srgbClr val="1E293B"/>
-            </a:solidFill>
-            <a:prstDash val="solid"/>
-          </a:ln>
-        </p:spPr>
-      </p:sp>
-      <p:pic>
-        <p:nvPicPr>
-          <p:cNvPr id="7" name="Image 0" descr="C:\Users\Guilherme Gomes\.gemini\antigravity\brain\392f0286-5b76-4ec8-ac1d-7de16ea0eefa\media__1780322517997.png">    </p:cNvPr>
-          <p:cNvPicPr>
-            <a:picLocks noChangeAspect="1"/>
-          </p:cNvPicPr>
-          <p:nvPr/>
-        </p:nvPicPr>
-        <p:blipFill>
-          <a:blip r:embed="rId1"/>
-          <a:stretch>
-            <a:fillRect/>
-          </a:stretch>
-        </p:blipFill>
-        <p:spPr>
-          <a:xfrm>
-            <a:off x="5943600" y="1645920"/>
-            <a:ext cx="5669280" cy="3291840"/>
-          </a:xfrm>
-          <a:prstGeom prst="rect">
-            <a:avLst/>
-          </a:prstGeom>
-        </p:spPr>
-      </p:pic>
-      <p:sp>
-        <p:nvSpPr>
-          <p:cNvPr id="8" name="Shape 5"/>
-          <p:cNvSpPr/>
-          <p:nvPr/>
-        </p:nvSpPr>
-        <p:spPr>
-          <a:xfrm>
-            <a:off x="457200" y="6126480"/>
-            <a:ext cx="11274552" cy="18288"/>
+              <a:rPr lang="en-US" sz="900" dirty="0">
+                <a:solidFill>
+                  <a:srgbClr val="94A3B8"/>
+                </a:solidFill>
+              </a:rPr>
+              <a:t>Portal GCAC — Solução para Atiradores, Colecionadores, Caçadores e Despachantes</a:t>
+            </a:r>
+            <a:endParaRPr lang="en-US" sz="900" dirty="0"/>
+          </a:p>
+        </p:txBody>
+      </p:sp>
+      <p:sp>
+        <p:nvSpPr>
+          <p:cNvPr id="10" name="Shape 2">
+            <a:extLst>
+              <a:ext uri="{FF2B5EF4-FFF2-40B4-BE49-F238E27FC236}">
+                <a16:creationId xmlns:a16="http://schemas.microsoft.com/office/drawing/2014/main" id="{C5BF3A5C-3086-4119-A8D5-6D85AB56BD14}"/>
+              </a:ext>
+            </a:extLst>
+          </p:cNvPr>
+          <p:cNvSpPr/>
+          <p:nvPr/>
+        </p:nvSpPr>
+        <p:spPr>
+          <a:xfrm>
+            <a:off x="457200" y="1097280"/>
+            <a:ext cx="8563356" cy="68580"/>
           </a:xfrm>
           <a:prstGeom prst="rect">
             <a:avLst/>
@@ -2908,42 +2547,6 @@
             <a:prstDash val="solid"/>
           </a:ln>
         </p:spPr>
-      </p:sp>
-      <p:sp>
-        <p:nvSpPr>
-          <p:cNvPr id="9" name="Text 6"/>
-          <p:cNvSpPr/>
-          <p:nvPr/>
-        </p:nvSpPr>
-        <p:spPr>
-          <a:xfrm>
-            <a:off x="457200" y="6217920"/>
-            <a:ext cx="7315200" cy="274320"/>
-          </a:xfrm>
-          <a:prstGeom prst="rect">
-            <a:avLst/>
-          </a:prstGeom>
-          <a:noFill/>
-          <a:ln/>
-        </p:spPr>
-        <p:txBody>
-          <a:bodyPr wrap="square" rtlCol="0" anchor="ctr"/>
-          <a:lstStyle/>
-          <a:p>
-            <a:pPr indent="0" marL="0">
-              <a:buNone/>
-            </a:pPr>
-            <a:r>
-              <a:rPr lang="en-US" sz="900" dirty="0">
-                <a:solidFill>
-                  <a:srgbClr val="94A3B8"/>
-                </a:solidFill>
-              </a:rPr>
-              <a:t>Portal GCAC — Solução para Atiradores, Colecionadores, Caçadores e Despachantes</a:t>
-            </a:r>
-            <a:endParaRPr lang="en-US" sz="900" dirty="0"/>
-          </a:p>
-        </p:txBody>
       </p:sp>
     </p:spTree>
   </p:cSld>
@@ -2961,6 +2564,7 @@
         <a:solidFill>
           <a:srgbClr val="0B0F19"/>
         </a:solidFill>
+        <a:effectLst/>
       </p:bgPr>
     </p:bg>
     <p:spTree>
@@ -2998,7 +2602,7 @@
           <a:bodyPr wrap="square" rtlCol="0" anchor="ctr"/>
           <a:lstStyle/>
           <a:p>
-            <a:pPr indent="0" marL="0">
+            <a:pPr marL="0" indent="0">
               <a:buNone/>
             </a:pPr>
             <a:r>
@@ -3034,7 +2638,7 @@
           <a:bodyPr wrap="square" rtlCol="0" anchor="ctr"/>
           <a:lstStyle/>
           <a:p>
-            <a:pPr indent="0" marL="0">
+            <a:pPr marL="0" indent="0">
               <a:buNone/>
             </a:pPr>
             <a:r>
@@ -3051,13 +2655,141 @@
       </p:sp>
       <p:sp>
         <p:nvSpPr>
-          <p:cNvPr id="4" name="Shape 2"/>
-          <p:cNvSpPr/>
-          <p:nvPr/>
-        </p:nvSpPr>
-        <p:spPr>
-          <a:xfrm>
-            <a:off x="457200" y="1097280"/>
+          <p:cNvPr id="5" name="Text 3"/>
+          <p:cNvSpPr/>
+          <p:nvPr/>
+        </p:nvSpPr>
+        <p:spPr>
+          <a:xfrm>
+            <a:off x="457200" y="1463040"/>
+            <a:ext cx="5029200" cy="4389120"/>
+          </a:xfrm>
+          <a:prstGeom prst="rect">
+            <a:avLst/>
+          </a:prstGeom>
+          <a:noFill/>
+          <a:ln/>
+        </p:spPr>
+        <p:txBody>
+          <a:bodyPr wrap="square" rtlCol="0" anchor="t"/>
+          <a:lstStyle/>
+          <a:p>
+            <a:pPr marL="0" indent="0" algn="l">
+              <a:buNone/>
+            </a:pPr>
+            <a:r>
+              <a:rPr lang="en-US" sz="1300" b="1" dirty="0">
+                <a:solidFill>
+                  <a:srgbClr val="F59E0B"/>
+                </a:solidFill>
+              </a:rPr>
+              <a:t>• Suporte Offline: </a:t>
+            </a:r>
+            <a:r>
+              <a:rPr lang="en-US" sz="1200" dirty="0">
+                <a:solidFill>
+                  <a:srgbClr val="CBD5E1"/>
+                </a:solidFill>
+              </a:rPr>
+              <a:t>Operação contínua local no IndexedDB (Dexie.js) mesmo em caso de queda de internet.
+</a:t>
+            </a:r>
+            <a:r>
+              <a:rPr lang="en-US" sz="1300" b="1" dirty="0">
+                <a:solidFill>
+                  <a:srgbClr val="F59E0B"/>
+                </a:solidFill>
+              </a:rPr>
+              <a:t>• Fila de Sincronização: </a:t>
+            </a:r>
+            <a:r>
+              <a:rPr lang="en-US" sz="1200" dirty="0">
+                <a:solidFill>
+                  <a:srgbClr val="CBD5E1"/>
+                </a:solidFill>
+              </a:rPr>
+              <a:t>As alterações feitas locais são transmitidas ao Supabase assim que a internet retorna.
+</a:t>
+            </a:r>
+            <a:r>
+              <a:rPr lang="en-US" sz="1300" b="1" dirty="0">
+                <a:solidFill>
+                  <a:srgbClr val="F59E0B"/>
+                </a:solidFill>
+              </a:rPr>
+              <a:t>• Backup Google Drive: </a:t>
+            </a:r>
+            <a:r>
+              <a:rPr lang="en-US" sz="1200" dirty="0">
+                <a:solidFill>
+                  <a:srgbClr val="CBD5E1"/>
+                </a:solidFill>
+              </a:rPr>
+              <a:t>Integração direta com o Drive: cada O.S. finalizada salva arquivos em PDF e dados JSON na nuvem.
+</a:t>
+            </a:r>
+            <a:endParaRPr lang="en-US" sz="1300" dirty="0"/>
+          </a:p>
+        </p:txBody>
+      </p:sp>
+      <p:sp>
+        <p:nvSpPr>
+          <p:cNvPr id="6" name="Shape 4"/>
+          <p:cNvSpPr/>
+          <p:nvPr/>
+        </p:nvSpPr>
+        <p:spPr>
+          <a:xfrm>
+            <a:off x="5852160" y="1554480"/>
+            <a:ext cx="5852160" cy="3474720"/>
+          </a:xfrm>
+          <a:prstGeom prst="rect">
+            <a:avLst/>
+          </a:prstGeom>
+          <a:solidFill>
+            <a:srgbClr val="141A28"/>
+          </a:solidFill>
+          <a:ln w="12700">
+            <a:solidFill>
+              <a:srgbClr val="1E293B"/>
+            </a:solidFill>
+            <a:prstDash val="solid"/>
+          </a:ln>
+        </p:spPr>
+      </p:sp>
+      <p:pic>
+        <p:nvPicPr>
+          <p:cNvPr id="7" name="Image 0" descr="C:\Users\Guilherme Gomes\.gemini\antigravity\brain\392f0286-5b76-4ec8-ac1d-7de16ea0eefa\media__1780322240336.png"/>
+          <p:cNvPicPr>
+            <a:picLocks noChangeAspect="1"/>
+          </p:cNvPicPr>
+          <p:nvPr/>
+        </p:nvPicPr>
+        <p:blipFill>
+          <a:blip r:embed="rId3"/>
+          <a:stretch>
+            <a:fillRect/>
+          </a:stretch>
+        </p:blipFill>
+        <p:spPr>
+          <a:xfrm>
+            <a:off x="5943600" y="1645920"/>
+            <a:ext cx="5669280" cy="3291840"/>
+          </a:xfrm>
+          <a:prstGeom prst="rect">
+            <a:avLst/>
+          </a:prstGeom>
+        </p:spPr>
+      </p:pic>
+      <p:sp>
+        <p:nvSpPr>
+          <p:cNvPr id="8" name="Shape 5"/>
+          <p:cNvSpPr/>
+          <p:nvPr/>
+        </p:nvSpPr>
+        <p:spPr>
+          <a:xfrm>
+            <a:off x="457200" y="6126480"/>
             <a:ext cx="11274552" cy="18288"/>
           </a:xfrm>
           <a:prstGeom prst="rect">
@@ -3076,14 +2808,14 @@
       </p:sp>
       <p:sp>
         <p:nvSpPr>
-          <p:cNvPr id="5" name="Text 3"/>
-          <p:cNvSpPr/>
-          <p:nvPr/>
-        </p:nvSpPr>
-        <p:spPr>
-          <a:xfrm>
-            <a:off x="457200" y="1463040"/>
-            <a:ext cx="5029200" cy="4389120"/>
+          <p:cNvPr id="9" name="Text 6"/>
+          <p:cNvSpPr/>
+          <p:nvPr/>
+        </p:nvSpPr>
+        <p:spPr>
+          <a:xfrm>
+            <a:off x="457200" y="6217920"/>
+            <a:ext cx="7315200" cy="274320"/>
           </a:xfrm>
           <a:prstGeom prst="rect">
             <a:avLst/>
@@ -3092,174 +2824,40 @@
           <a:ln/>
         </p:spPr>
         <p:txBody>
-          <a:bodyPr wrap="square" rtlCol="0" anchor="t"/>
-          <a:lstStyle/>
-          <a:p>
-            <a:pPr algn="l" indent="0" marL="0">
+          <a:bodyPr wrap="square" rtlCol="0" anchor="ctr"/>
+          <a:lstStyle/>
+          <a:p>
+            <a:pPr marL="0" indent="0">
               <a:buNone/>
             </a:pPr>
             <a:r>
-              <a:rPr lang="en-US" sz="1300" b="1" dirty="0">
-                <a:solidFill>
-                  <a:srgbClr val="F59E0B"/>
-                </a:solidFill>
-              </a:rPr>
-              <a:t>• </a:t>
-            </a:r>
-            <a:pPr algn="l" indent="0" marL="0">
-              <a:buNone/>
-            </a:pPr>
-            <a:r>
-              <a:rPr lang="en-US" sz="1300" b="1" dirty="0">
-                <a:solidFill>
-                  <a:srgbClr val="F59E0B"/>
-                </a:solidFill>
-              </a:rPr>
-              <a:t>Suporte Offline: </a:t>
-            </a:r>
-            <a:pPr algn="l" indent="0" marL="0">
-              <a:buNone/>
-            </a:pPr>
-            <a:r>
-              <a:rPr lang="en-US" sz="1200" dirty="0">
-                <a:solidFill>
-                  <a:srgbClr val="CBD5E1"/>
-                </a:solidFill>
-              </a:rPr>
-              <a:t>Operação contínua local no IndexedDB (Dexie.js) mesmo em caso de queda de internet.
-</a:t>
-            </a:r>
-            <a:pPr algn="l" indent="0" marL="0">
-              <a:buNone/>
-            </a:pPr>
-            <a:r>
-              <a:rPr lang="en-US" sz="1300" b="1" dirty="0">
-                <a:solidFill>
-                  <a:srgbClr val="F59E0B"/>
-                </a:solidFill>
-              </a:rPr>
-              <a:t>• </a:t>
-            </a:r>
-            <a:pPr algn="l" indent="0" marL="0">
-              <a:buNone/>
-            </a:pPr>
-            <a:r>
-              <a:rPr lang="en-US" sz="1300" b="1" dirty="0">
-                <a:solidFill>
-                  <a:srgbClr val="F59E0B"/>
-                </a:solidFill>
-              </a:rPr>
-              <a:t>Fila de Sincronização: </a:t>
-            </a:r>
-            <a:pPr algn="l" indent="0" marL="0">
-              <a:buNone/>
-            </a:pPr>
-            <a:r>
-              <a:rPr lang="en-US" sz="1200" dirty="0">
-                <a:solidFill>
-                  <a:srgbClr val="CBD5E1"/>
-                </a:solidFill>
-              </a:rPr>
-              <a:t>As alterações feitas locais são transmitidas ao Supabase assim que a internet retorna.
-</a:t>
-            </a:r>
-            <a:pPr algn="l" indent="0" marL="0">
-              <a:buNone/>
-            </a:pPr>
-            <a:r>
-              <a:rPr lang="en-US" sz="1300" b="1" dirty="0">
-                <a:solidFill>
-                  <a:srgbClr val="F59E0B"/>
-                </a:solidFill>
-              </a:rPr>
-              <a:t>• </a:t>
-            </a:r>
-            <a:pPr algn="l" indent="0" marL="0">
-              <a:buNone/>
-            </a:pPr>
-            <a:r>
-              <a:rPr lang="en-US" sz="1300" b="1" dirty="0">
-                <a:solidFill>
-                  <a:srgbClr val="F59E0B"/>
-                </a:solidFill>
-              </a:rPr>
-              <a:t>Backup Google Drive: </a:t>
-            </a:r>
-            <a:pPr algn="l" indent="0" marL="0">
-              <a:buNone/>
-            </a:pPr>
-            <a:r>
-              <a:rPr lang="en-US" sz="1200" dirty="0">
-                <a:solidFill>
-                  <a:srgbClr val="CBD5E1"/>
-                </a:solidFill>
-              </a:rPr>
-              <a:t>Integração direta com o Drive: cada O.S. finalizada salva arquivos em PDF e dados JSON na nuvem.
-</a:t>
-            </a:r>
-            <a:endParaRPr lang="en-US" sz="1300" dirty="0"/>
-          </a:p>
-        </p:txBody>
-      </p:sp>
-      <p:sp>
-        <p:nvSpPr>
-          <p:cNvPr id="6" name="Shape 4"/>
-          <p:cNvSpPr/>
-          <p:nvPr/>
-        </p:nvSpPr>
-        <p:spPr>
-          <a:xfrm>
-            <a:off x="5852160" y="1554480"/>
-            <a:ext cx="5852160" cy="3474720"/>
-          </a:xfrm>
-          <a:prstGeom prst="rect">
-            <a:avLst/>
-          </a:prstGeom>
-          <a:solidFill>
-            <a:srgbClr val="141A28"/>
-          </a:solidFill>
-          <a:ln w="12700">
-            <a:solidFill>
-              <a:srgbClr val="1E293B"/>
-            </a:solidFill>
-            <a:prstDash val="solid"/>
-          </a:ln>
-        </p:spPr>
-      </p:sp>
-      <p:pic>
-        <p:nvPicPr>
-          <p:cNvPr id="7" name="Image 0" descr="C:\Users\Guilherme Gomes\.gemini\antigravity\brain\392f0286-5b76-4ec8-ac1d-7de16ea0eefa\media__1780322240336.png">    </p:cNvPr>
-          <p:cNvPicPr>
-            <a:picLocks noChangeAspect="1"/>
-          </p:cNvPicPr>
-          <p:nvPr/>
-        </p:nvPicPr>
-        <p:blipFill>
-          <a:blip r:embed="rId1"/>
-          <a:stretch>
-            <a:fillRect/>
-          </a:stretch>
-        </p:blipFill>
-        <p:spPr>
-          <a:xfrm>
-            <a:off x="5943600" y="1645920"/>
-            <a:ext cx="5669280" cy="3291840"/>
-          </a:xfrm>
-          <a:prstGeom prst="rect">
-            <a:avLst/>
-          </a:prstGeom>
-        </p:spPr>
-      </p:pic>
-      <p:sp>
-        <p:nvSpPr>
-          <p:cNvPr id="8" name="Shape 5"/>
-          <p:cNvSpPr/>
-          <p:nvPr/>
-        </p:nvSpPr>
-        <p:spPr>
-          <a:xfrm>
-            <a:off x="457200" y="6126480"/>
-            <a:ext cx="11274552" cy="18288"/>
+              <a:rPr lang="en-US" sz="900" dirty="0">
+                <a:solidFill>
+                  <a:srgbClr val="94A3B8"/>
+                </a:solidFill>
+              </a:rPr>
+              <a:t>Portal GCAC — Solução para Atiradores, Colecionadores, Caçadores e Despachantes</a:t>
+            </a:r>
+            <a:endParaRPr lang="en-US" sz="900" dirty="0"/>
+          </a:p>
+        </p:txBody>
+      </p:sp>
+      <p:sp>
+        <p:nvSpPr>
+          <p:cNvPr id="10" name="Shape 2">
+            <a:extLst>
+              <a:ext uri="{FF2B5EF4-FFF2-40B4-BE49-F238E27FC236}">
+                <a16:creationId xmlns:a16="http://schemas.microsoft.com/office/drawing/2014/main" id="{4BB4A7B2-335F-45A4-A937-56E1F95DCF20}"/>
+              </a:ext>
+            </a:extLst>
+          </p:cNvPr>
+          <p:cNvSpPr/>
+          <p:nvPr/>
+        </p:nvSpPr>
+        <p:spPr>
+          <a:xfrm>
+            <a:off x="457200" y="1097280"/>
+            <a:ext cx="8563356" cy="68580"/>
           </a:xfrm>
           <a:prstGeom prst="rect">
             <a:avLst/>
@@ -3274,42 +2872,6 @@
             <a:prstDash val="solid"/>
           </a:ln>
         </p:spPr>
-      </p:sp>
-      <p:sp>
-        <p:nvSpPr>
-          <p:cNvPr id="9" name="Text 6"/>
-          <p:cNvSpPr/>
-          <p:nvPr/>
-        </p:nvSpPr>
-        <p:spPr>
-          <a:xfrm>
-            <a:off x="457200" y="6217920"/>
-            <a:ext cx="7315200" cy="274320"/>
-          </a:xfrm>
-          <a:prstGeom prst="rect">
-            <a:avLst/>
-          </a:prstGeom>
-          <a:noFill/>
-          <a:ln/>
-        </p:spPr>
-        <p:txBody>
-          <a:bodyPr wrap="square" rtlCol="0" anchor="ctr"/>
-          <a:lstStyle/>
-          <a:p>
-            <a:pPr indent="0" marL="0">
-              <a:buNone/>
-            </a:pPr>
-            <a:r>
-              <a:rPr lang="en-US" sz="900" dirty="0">
-                <a:solidFill>
-                  <a:srgbClr val="94A3B8"/>
-                </a:solidFill>
-              </a:rPr>
-              <a:t>Portal GCAC — Solução para Atiradores, Colecionadores, Caçadores e Despachantes</a:t>
-            </a:r>
-            <a:endParaRPr lang="en-US" sz="900" dirty="0"/>
-          </a:p>
-        </p:txBody>
       </p:sp>
     </p:spTree>
   </p:cSld>
@@ -3327,6 +2889,7 @@
         <a:solidFill>
           <a:srgbClr val="0B0F19"/>
         </a:solidFill>
+        <a:effectLst/>
       </p:bgPr>
     </p:bg>
     <p:spTree>
@@ -3364,7 +2927,7 @@
           <a:bodyPr wrap="square" rtlCol="0" anchor="ctr"/>
           <a:lstStyle/>
           <a:p>
-            <a:pPr indent="0" marL="0">
+            <a:pPr marL="0" indent="0">
               <a:buNone/>
             </a:pPr>
             <a:r>
@@ -3400,7 +2963,7 @@
           <a:bodyPr wrap="square" rtlCol="0" anchor="ctr"/>
           <a:lstStyle/>
           <a:p>
-            <a:pPr indent="0" marL="0">
+            <a:pPr marL="0" indent="0">
               <a:buNone/>
             </a:pPr>
             <a:r>
@@ -3417,13 +2980,668 @@
       </p:sp>
       <p:sp>
         <p:nvSpPr>
-          <p:cNvPr id="4" name="Shape 2"/>
-          <p:cNvSpPr/>
-          <p:nvPr/>
-        </p:nvSpPr>
-        <p:spPr>
-          <a:xfrm>
-            <a:off x="457200" y="1097280"/>
+          <p:cNvPr id="5" name="Shape 3"/>
+          <p:cNvSpPr/>
+          <p:nvPr/>
+        </p:nvSpPr>
+        <p:spPr>
+          <a:xfrm>
+            <a:off x="457200" y="1463040"/>
+            <a:ext cx="3383280" cy="4389120"/>
+          </a:xfrm>
+          <a:prstGeom prst="rect">
+            <a:avLst/>
+          </a:prstGeom>
+          <a:solidFill>
+            <a:srgbClr val="141A28"/>
+          </a:solidFill>
+          <a:ln w="12700">
+            <a:solidFill>
+              <a:srgbClr val="1E293B"/>
+            </a:solidFill>
+            <a:prstDash val="solid"/>
+          </a:ln>
+        </p:spPr>
+      </p:sp>
+      <p:sp>
+        <p:nvSpPr>
+          <p:cNvPr id="6" name="Text 4"/>
+          <p:cNvSpPr/>
+          <p:nvPr/>
+        </p:nvSpPr>
+        <p:spPr>
+          <a:xfrm>
+            <a:off x="640080" y="1645920"/>
+            <a:ext cx="3017520" cy="274320"/>
+          </a:xfrm>
+          <a:prstGeom prst="rect">
+            <a:avLst/>
+          </a:prstGeom>
+          <a:noFill/>
+          <a:ln/>
+        </p:spPr>
+        <p:txBody>
+          <a:bodyPr wrap="square" rtlCol="0" anchor="ctr"/>
+          <a:lstStyle/>
+          <a:p>
+            <a:pPr marL="0" indent="0">
+              <a:buNone/>
+            </a:pPr>
+            <a:r>
+              <a:rPr lang="en-US" sz="1500" b="1" dirty="0">
+                <a:solidFill>
+                  <a:srgbClr val="F8FAFC"/>
+                </a:solidFill>
+              </a:rPr>
+              <a:t>Plano .22LR</a:t>
+            </a:r>
+            <a:endParaRPr lang="en-US" sz="1500" dirty="0"/>
+          </a:p>
+        </p:txBody>
+      </p:sp>
+      <p:sp>
+        <p:nvSpPr>
+          <p:cNvPr id="7" name="Text 5"/>
+          <p:cNvSpPr/>
+          <p:nvPr/>
+        </p:nvSpPr>
+        <p:spPr>
+          <a:xfrm>
+            <a:off x="640080" y="1920240"/>
+            <a:ext cx="3017520" cy="182880"/>
+          </a:xfrm>
+          <a:prstGeom prst="rect">
+            <a:avLst/>
+          </a:prstGeom>
+          <a:noFill/>
+          <a:ln/>
+        </p:spPr>
+        <p:txBody>
+          <a:bodyPr wrap="square" rtlCol="0" anchor="ctr"/>
+          <a:lstStyle/>
+          <a:p>
+            <a:pPr marL="0" indent="0">
+              <a:buNone/>
+            </a:pPr>
+            <a:r>
+              <a:rPr lang="en-US" sz="850" b="1" dirty="0">
+                <a:solidFill>
+                  <a:srgbClr val="94A3B8"/>
+                </a:solidFill>
+              </a:rPr>
+              <a:t>ESSENCIAL INDIVIDUAL</a:t>
+            </a:r>
+            <a:endParaRPr lang="en-US" sz="850" dirty="0"/>
+          </a:p>
+        </p:txBody>
+      </p:sp>
+      <p:sp>
+        <p:nvSpPr>
+          <p:cNvPr id="8" name="Text 6"/>
+          <p:cNvSpPr/>
+          <p:nvPr/>
+        </p:nvSpPr>
+        <p:spPr>
+          <a:xfrm>
+            <a:off x="640080" y="2286000"/>
+            <a:ext cx="3017520" cy="365760"/>
+          </a:xfrm>
+          <a:prstGeom prst="rect">
+            <a:avLst/>
+          </a:prstGeom>
+          <a:noFill/>
+          <a:ln/>
+        </p:spPr>
+        <p:txBody>
+          <a:bodyPr wrap="square" rtlCol="0" anchor="ctr"/>
+          <a:lstStyle/>
+          <a:p>
+            <a:pPr marL="0" indent="0">
+              <a:buNone/>
+            </a:pPr>
+            <a:r>
+              <a:rPr lang="en-US" sz="2000" b="1" dirty="0">
+                <a:solidFill>
+                  <a:srgbClr val="F59E0B"/>
+                </a:solidFill>
+              </a:rPr>
+              <a:t>R$ 149 /mês</a:t>
+            </a:r>
+            <a:endParaRPr lang="en-US" sz="2000" dirty="0"/>
+          </a:p>
+        </p:txBody>
+      </p:sp>
+      <p:sp>
+        <p:nvSpPr>
+          <p:cNvPr id="9" name="Text 7"/>
+          <p:cNvSpPr/>
+          <p:nvPr/>
+        </p:nvSpPr>
+        <p:spPr>
+          <a:xfrm>
+            <a:off x="640080" y="2926080"/>
+            <a:ext cx="3017520" cy="2743200"/>
+          </a:xfrm>
+          <a:prstGeom prst="rect">
+            <a:avLst/>
+          </a:prstGeom>
+          <a:noFill/>
+          <a:ln/>
+        </p:spPr>
+        <p:txBody>
+          <a:bodyPr wrap="square" rtlCol="0" anchor="t"/>
+          <a:lstStyle/>
+          <a:p>
+            <a:pPr marL="0" indent="0" algn="l">
+              <a:buNone/>
+            </a:pPr>
+            <a:r>
+              <a:rPr lang="en-US" sz="1100" b="1" dirty="0">
+                <a:solidFill>
+                  <a:srgbClr val="F59E0B"/>
+                </a:solidFill>
+              </a:rPr>
+              <a:t>• Staff: </a:t>
+            </a:r>
+            <a:r>
+              <a:rPr lang="en-US" sz="1050" dirty="0">
+                <a:solidFill>
+                  <a:srgbClr val="CBD5E1"/>
+                </a:solidFill>
+              </a:rPr>
+              <a:t>Apenas 1 usuário de staff (operador principal).
+</a:t>
+            </a:r>
+            <a:r>
+              <a:rPr lang="en-US" sz="1100" b="1" dirty="0">
+                <a:solidFill>
+                  <a:srgbClr val="F59E0B"/>
+                </a:solidFill>
+              </a:rPr>
+              <a:t>• O.S. &amp; Recibos: </a:t>
+            </a:r>
+            <a:r>
+              <a:rPr lang="en-US" sz="1050" dirty="0">
+                <a:solidFill>
+                  <a:srgbClr val="CBD5E1"/>
+                </a:solidFill>
+              </a:rPr>
+              <a:t>Emissão de Ordens de Serviço, recibos, orçamentos e backups no Drive.</a:t>
+            </a:r>
+            <a:endParaRPr lang="en-US" sz="1100" dirty="0"/>
+          </a:p>
+        </p:txBody>
+      </p:sp>
+      <p:sp>
+        <p:nvSpPr>
+          <p:cNvPr id="10" name="Shape 8"/>
+          <p:cNvSpPr/>
+          <p:nvPr/>
+        </p:nvSpPr>
+        <p:spPr>
+          <a:xfrm>
+            <a:off x="4398264" y="1463040"/>
+            <a:ext cx="3383280" cy="4389120"/>
+          </a:xfrm>
+          <a:prstGeom prst="rect">
+            <a:avLst/>
+          </a:prstGeom>
+          <a:solidFill>
+            <a:srgbClr val="182236"/>
+          </a:solidFill>
+          <a:ln w="15240">
+            <a:solidFill>
+              <a:srgbClr val="2563EB"/>
+            </a:solidFill>
+            <a:prstDash val="solid"/>
+          </a:ln>
+        </p:spPr>
+      </p:sp>
+      <p:sp>
+        <p:nvSpPr>
+          <p:cNvPr id="11" name="Shape 9"/>
+          <p:cNvSpPr/>
+          <p:nvPr/>
+        </p:nvSpPr>
+        <p:spPr>
+          <a:xfrm>
+            <a:off x="4398264" y="1463040"/>
+            <a:ext cx="3383280" cy="228600"/>
+          </a:xfrm>
+          <a:prstGeom prst="rect">
+            <a:avLst/>
+          </a:prstGeom>
+          <a:solidFill>
+            <a:srgbClr val="2563EB"/>
+          </a:solidFill>
+          <a:ln/>
+        </p:spPr>
+      </p:sp>
+      <p:sp>
+        <p:nvSpPr>
+          <p:cNvPr id="12" name="Text 10"/>
+          <p:cNvSpPr/>
+          <p:nvPr/>
+        </p:nvSpPr>
+        <p:spPr>
+          <a:xfrm>
+            <a:off x="4398264" y="1481328"/>
+            <a:ext cx="3383280" cy="182880"/>
+          </a:xfrm>
+          <a:prstGeom prst="rect">
+            <a:avLst/>
+          </a:prstGeom>
+          <a:noFill/>
+          <a:ln/>
+        </p:spPr>
+        <p:txBody>
+          <a:bodyPr wrap="square" rtlCol="0" anchor="ctr"/>
+          <a:lstStyle/>
+          <a:p>
+            <a:pPr marL="0" indent="0" algn="ctr">
+              <a:buNone/>
+            </a:pPr>
+            <a:r>
+              <a:rPr lang="en-US" sz="800" b="1" dirty="0">
+                <a:solidFill>
+                  <a:srgbClr val="F8FAFC"/>
+                </a:solidFill>
+              </a:rPr>
+              <a:t>RECOMENDADO / MAIS VENDIDO</a:t>
+            </a:r>
+            <a:endParaRPr lang="en-US" sz="800" dirty="0"/>
+          </a:p>
+        </p:txBody>
+      </p:sp>
+      <p:sp>
+        <p:nvSpPr>
+          <p:cNvPr id="13" name="Text 11"/>
+          <p:cNvSpPr/>
+          <p:nvPr/>
+        </p:nvSpPr>
+        <p:spPr>
+          <a:xfrm>
+            <a:off x="4581144" y="1783080"/>
+            <a:ext cx="3017520" cy="274320"/>
+          </a:xfrm>
+          <a:prstGeom prst="rect">
+            <a:avLst/>
+          </a:prstGeom>
+          <a:noFill/>
+          <a:ln/>
+        </p:spPr>
+        <p:txBody>
+          <a:bodyPr wrap="square" rtlCol="0" anchor="ctr"/>
+          <a:lstStyle/>
+          <a:p>
+            <a:pPr marL="0" indent="0">
+              <a:buNone/>
+            </a:pPr>
+            <a:r>
+              <a:rPr lang="en-US" sz="1500" b="1" dirty="0">
+                <a:solidFill>
+                  <a:srgbClr val="F8FAFC"/>
+                </a:solidFill>
+              </a:rPr>
+              <a:t>Plano .357mag</a:t>
+            </a:r>
+            <a:endParaRPr lang="en-US" sz="1500" dirty="0"/>
+          </a:p>
+        </p:txBody>
+      </p:sp>
+      <p:sp>
+        <p:nvSpPr>
+          <p:cNvPr id="14" name="Text 12"/>
+          <p:cNvSpPr/>
+          <p:nvPr/>
+        </p:nvSpPr>
+        <p:spPr>
+          <a:xfrm>
+            <a:off x="4581144" y="2057400"/>
+            <a:ext cx="3017520" cy="182880"/>
+          </a:xfrm>
+          <a:prstGeom prst="rect">
+            <a:avLst/>
+          </a:prstGeom>
+          <a:noFill/>
+          <a:ln/>
+        </p:spPr>
+        <p:txBody>
+          <a:bodyPr wrap="square" rtlCol="0" anchor="ctr"/>
+          <a:lstStyle/>
+          <a:p>
+            <a:pPr marL="0" indent="0">
+              <a:buNone/>
+            </a:pPr>
+            <a:r>
+              <a:rPr lang="en-US" sz="850" b="1" dirty="0">
+                <a:solidFill>
+                  <a:srgbClr val="94A3B8"/>
+                </a:solidFill>
+              </a:rPr>
+              <a:t>PROFISSIONAL E CRESCIMENTO</a:t>
+            </a:r>
+            <a:endParaRPr lang="en-US" sz="850" dirty="0"/>
+          </a:p>
+        </p:txBody>
+      </p:sp>
+      <p:sp>
+        <p:nvSpPr>
+          <p:cNvPr id="15" name="Text 13"/>
+          <p:cNvSpPr/>
+          <p:nvPr/>
+        </p:nvSpPr>
+        <p:spPr>
+          <a:xfrm>
+            <a:off x="4581144" y="2423160"/>
+            <a:ext cx="3017520" cy="365760"/>
+          </a:xfrm>
+          <a:prstGeom prst="rect">
+            <a:avLst/>
+          </a:prstGeom>
+          <a:noFill/>
+          <a:ln/>
+        </p:spPr>
+        <p:txBody>
+          <a:bodyPr wrap="square" rtlCol="0" anchor="ctr"/>
+          <a:lstStyle/>
+          <a:p>
+            <a:pPr marL="0" indent="0">
+              <a:buNone/>
+            </a:pPr>
+            <a:r>
+              <a:rPr lang="en-US" sz="2000" b="1" dirty="0">
+                <a:solidFill>
+                  <a:srgbClr val="F59E0B"/>
+                </a:solidFill>
+              </a:rPr>
+              <a:t>R$ 299 /mês</a:t>
+            </a:r>
+            <a:endParaRPr lang="en-US" sz="2000" dirty="0"/>
+          </a:p>
+        </p:txBody>
+      </p:sp>
+      <p:sp>
+        <p:nvSpPr>
+          <p:cNvPr id="16" name="Text 14"/>
+          <p:cNvSpPr/>
+          <p:nvPr/>
+        </p:nvSpPr>
+        <p:spPr>
+          <a:xfrm>
+            <a:off x="4581144" y="3063240"/>
+            <a:ext cx="3017520" cy="2651760"/>
+          </a:xfrm>
+          <a:prstGeom prst="rect">
+            <a:avLst/>
+          </a:prstGeom>
+          <a:noFill/>
+          <a:ln/>
+        </p:spPr>
+        <p:txBody>
+          <a:bodyPr wrap="square" rtlCol="0" anchor="t"/>
+          <a:lstStyle/>
+          <a:p>
+            <a:pPr marL="0" indent="0" algn="l">
+              <a:buNone/>
+            </a:pPr>
+            <a:r>
+              <a:rPr lang="en-US" sz="1100" b="1" dirty="0">
+                <a:solidFill>
+                  <a:srgbClr val="F59E0B"/>
+                </a:solidFill>
+              </a:rPr>
+              <a:t>• Staff: </a:t>
+            </a:r>
+            <a:r>
+              <a:rPr lang="en-US" sz="1050" dirty="0">
+                <a:solidFill>
+                  <a:srgbClr val="CBD5E1"/>
+                </a:solidFill>
+              </a:rPr>
+              <a:t>Até 4 usuários de staff.
+</a:t>
+            </a:r>
+            <a:r>
+              <a:rPr lang="en-US" sz="1100" b="1" dirty="0">
+                <a:solidFill>
+                  <a:srgbClr val="F59E0B"/>
+                </a:solidFill>
+              </a:rPr>
+              <a:t>• Clientes: </a:t>
+            </a:r>
+            <a:r>
+              <a:rPr lang="en-US" sz="1050" dirty="0">
+                <a:solidFill>
+                  <a:srgbClr val="CBD5E1"/>
+                </a:solidFill>
+              </a:rPr>
+              <a:t>Até 20 clientes CAC vinculados diretamente.
+</a:t>
+            </a:r>
+            <a:r>
+              <a:rPr lang="en-US" sz="1100" b="1" dirty="0">
+                <a:solidFill>
+                  <a:srgbClr val="F59E0B"/>
+                </a:solidFill>
+              </a:rPr>
+              <a:t>• Agenda: </a:t>
+            </a:r>
+            <a:r>
+              <a:rPr lang="en-US" sz="1050" dirty="0">
+                <a:solidFill>
+                  <a:srgbClr val="CBD5E1"/>
+                </a:solidFill>
+              </a:rPr>
+              <a:t>Controle de agendamentos e lembretes com suporte VIP prioritário.</a:t>
+            </a:r>
+            <a:endParaRPr lang="en-US" sz="1100" dirty="0"/>
+          </a:p>
+        </p:txBody>
+      </p:sp>
+      <p:sp>
+        <p:nvSpPr>
+          <p:cNvPr id="17" name="Shape 15"/>
+          <p:cNvSpPr/>
+          <p:nvPr/>
+        </p:nvSpPr>
+        <p:spPr>
+          <a:xfrm>
+            <a:off x="8348472" y="1463040"/>
+            <a:ext cx="3383280" cy="4389120"/>
+          </a:xfrm>
+          <a:prstGeom prst="rect">
+            <a:avLst/>
+          </a:prstGeom>
+          <a:solidFill>
+            <a:srgbClr val="141A28"/>
+          </a:solidFill>
+          <a:ln w="12700">
+            <a:solidFill>
+              <a:srgbClr val="1E293B"/>
+            </a:solidFill>
+            <a:prstDash val="solid"/>
+          </a:ln>
+        </p:spPr>
+      </p:sp>
+      <p:sp>
+        <p:nvSpPr>
+          <p:cNvPr id="18" name="Text 16"/>
+          <p:cNvSpPr/>
+          <p:nvPr/>
+        </p:nvSpPr>
+        <p:spPr>
+          <a:xfrm>
+            <a:off x="8531352" y="1645920"/>
+            <a:ext cx="3017520" cy="274320"/>
+          </a:xfrm>
+          <a:prstGeom prst="rect">
+            <a:avLst/>
+          </a:prstGeom>
+          <a:noFill/>
+          <a:ln/>
+        </p:spPr>
+        <p:txBody>
+          <a:bodyPr wrap="square" rtlCol="0" anchor="ctr"/>
+          <a:lstStyle/>
+          <a:p>
+            <a:pPr marL="0" indent="0">
+              <a:buNone/>
+            </a:pPr>
+            <a:r>
+              <a:rPr lang="en-US" sz="1500" b="1" dirty="0">
+                <a:solidFill>
+                  <a:srgbClr val="F8FAFC"/>
+                </a:solidFill>
+              </a:rPr>
+              <a:t>Plano .308win</a:t>
+            </a:r>
+            <a:endParaRPr lang="en-US" sz="1500" dirty="0"/>
+          </a:p>
+        </p:txBody>
+      </p:sp>
+      <p:sp>
+        <p:nvSpPr>
+          <p:cNvPr id="19" name="Text 17"/>
+          <p:cNvSpPr/>
+          <p:nvPr/>
+        </p:nvSpPr>
+        <p:spPr>
+          <a:xfrm>
+            <a:off x="8531352" y="1920240"/>
+            <a:ext cx="3017520" cy="182880"/>
+          </a:xfrm>
+          <a:prstGeom prst="rect">
+            <a:avLst/>
+          </a:prstGeom>
+          <a:noFill/>
+          <a:ln/>
+        </p:spPr>
+        <p:txBody>
+          <a:bodyPr wrap="square" rtlCol="0" anchor="ctr"/>
+          <a:lstStyle/>
+          <a:p>
+            <a:pPr marL="0" indent="0">
+              <a:buNone/>
+            </a:pPr>
+            <a:r>
+              <a:rPr lang="en-US" sz="850" b="1" dirty="0">
+                <a:solidFill>
+                  <a:srgbClr val="94A3B8"/>
+                </a:solidFill>
+              </a:rPr>
+              <a:t>CORPORATIVO E ILIMITADO</a:t>
+            </a:r>
+            <a:endParaRPr lang="en-US" sz="850" dirty="0"/>
+          </a:p>
+        </p:txBody>
+      </p:sp>
+      <p:sp>
+        <p:nvSpPr>
+          <p:cNvPr id="20" name="Text 18"/>
+          <p:cNvSpPr/>
+          <p:nvPr/>
+        </p:nvSpPr>
+        <p:spPr>
+          <a:xfrm>
+            <a:off x="8531352" y="2286000"/>
+            <a:ext cx="3017520" cy="365760"/>
+          </a:xfrm>
+          <a:prstGeom prst="rect">
+            <a:avLst/>
+          </a:prstGeom>
+          <a:noFill/>
+          <a:ln/>
+        </p:spPr>
+        <p:txBody>
+          <a:bodyPr wrap="square" rtlCol="0" anchor="ctr"/>
+          <a:lstStyle/>
+          <a:p>
+            <a:pPr marL="0" indent="0">
+              <a:buNone/>
+            </a:pPr>
+            <a:r>
+              <a:rPr lang="en-US" sz="2000" b="1" dirty="0">
+                <a:solidFill>
+                  <a:srgbClr val="F59E0B"/>
+                </a:solidFill>
+              </a:rPr>
+              <a:t>R$ 599 /mês</a:t>
+            </a:r>
+            <a:endParaRPr lang="en-US" sz="2000" dirty="0"/>
+          </a:p>
+        </p:txBody>
+      </p:sp>
+      <p:sp>
+        <p:nvSpPr>
+          <p:cNvPr id="21" name="Text 19"/>
+          <p:cNvSpPr/>
+          <p:nvPr/>
+        </p:nvSpPr>
+        <p:spPr>
+          <a:xfrm>
+            <a:off x="8531352" y="2926080"/>
+            <a:ext cx="3017520" cy="2743200"/>
+          </a:xfrm>
+          <a:prstGeom prst="rect">
+            <a:avLst/>
+          </a:prstGeom>
+          <a:noFill/>
+          <a:ln/>
+        </p:spPr>
+        <p:txBody>
+          <a:bodyPr wrap="square" rtlCol="0" anchor="t"/>
+          <a:lstStyle/>
+          <a:p>
+            <a:pPr marL="0" indent="0" algn="l">
+              <a:buNone/>
+            </a:pPr>
+            <a:r>
+              <a:rPr lang="en-US" sz="1100" b="1" dirty="0">
+                <a:solidFill>
+                  <a:srgbClr val="F59E0B"/>
+                </a:solidFill>
+              </a:rPr>
+              <a:t>• Ilimitado: </a:t>
+            </a:r>
+            <a:r>
+              <a:rPr lang="en-US" sz="1050" dirty="0">
+                <a:solidFill>
+                  <a:srgbClr val="CBD5E1"/>
+                </a:solidFill>
+              </a:rPr>
+              <a:t>Staff e vínculos de clientes ilimitados na plataforma.
+</a:t>
+            </a:r>
+            <a:r>
+              <a:rPr lang="en-US" sz="1100" b="1" dirty="0">
+                <a:solidFill>
+                  <a:srgbClr val="F59E0B"/>
+                </a:solidFill>
+              </a:rPr>
+              <a:t>• White Label: </a:t>
+            </a:r>
+            <a:r>
+              <a:rPr lang="en-US" sz="1050" dirty="0">
+                <a:solidFill>
+                  <a:srgbClr val="CBD5E1"/>
+                </a:solidFill>
+              </a:rPr>
+              <a:t>Logotipo da própria empresa no portal e suporte premium dedicado.</a:t>
+            </a:r>
+            <a:endParaRPr lang="en-US" sz="1100" dirty="0"/>
+          </a:p>
+        </p:txBody>
+      </p:sp>
+      <p:sp>
+        <p:nvSpPr>
+          <p:cNvPr id="22" name="Shape 20"/>
+          <p:cNvSpPr/>
+          <p:nvPr/>
+        </p:nvSpPr>
+        <p:spPr>
+          <a:xfrm>
+            <a:off x="457200" y="6126480"/>
             <a:ext cx="11274552" cy="18288"/>
           </a:xfrm>
           <a:prstGeom prst="rect">
@@ -3442,39 +3660,14 @@
       </p:sp>
       <p:sp>
         <p:nvSpPr>
-          <p:cNvPr id="5" name="Shape 3"/>
-          <p:cNvSpPr/>
-          <p:nvPr/>
-        </p:nvSpPr>
-        <p:spPr>
-          <a:xfrm>
-            <a:off x="457200" y="1463040"/>
-            <a:ext cx="3383280" cy="4389120"/>
-          </a:xfrm>
-          <a:prstGeom prst="rect">
-            <a:avLst/>
-          </a:prstGeom>
-          <a:solidFill>
-            <a:srgbClr val="141A28"/>
-          </a:solidFill>
-          <a:ln w="12700">
-            <a:solidFill>
-              <a:srgbClr val="1E293B"/>
-            </a:solidFill>
-            <a:prstDash val="solid"/>
-          </a:ln>
-        </p:spPr>
-      </p:sp>
-      <p:sp>
-        <p:nvSpPr>
-          <p:cNvPr id="6" name="Text 4"/>
-          <p:cNvSpPr/>
-          <p:nvPr/>
-        </p:nvSpPr>
-        <p:spPr>
-          <a:xfrm>
-            <a:off x="640080" y="1645920"/>
-            <a:ext cx="3017520" cy="274320"/>
+          <p:cNvPr id="23" name="Text 21"/>
+          <p:cNvSpPr/>
+          <p:nvPr/>
+        </p:nvSpPr>
+        <p:spPr>
+          <a:xfrm>
+            <a:off x="457200" y="6217920"/>
+            <a:ext cx="7315200" cy="274320"/>
           </a:xfrm>
           <a:prstGeom prst="rect">
             <a:avLst/>
@@ -3486,658 +3679,37 @@
           <a:bodyPr wrap="square" rtlCol="0" anchor="ctr"/>
           <a:lstStyle/>
           <a:p>
-            <a:pPr indent="0" marL="0">
+            <a:pPr marL="0" indent="0">
               <a:buNone/>
             </a:pPr>
             <a:r>
-              <a:rPr lang="en-US" sz="1500" b="1" dirty="0">
-                <a:solidFill>
-                  <a:srgbClr val="F8FAFC"/>
-                </a:solidFill>
-              </a:rPr>
-              <a:t>Plano .22LR</a:t>
-            </a:r>
-            <a:endParaRPr lang="en-US" sz="1500" dirty="0"/>
-          </a:p>
-        </p:txBody>
-      </p:sp>
-      <p:sp>
-        <p:nvSpPr>
-          <p:cNvPr id="7" name="Text 5"/>
-          <p:cNvSpPr/>
-          <p:nvPr/>
-        </p:nvSpPr>
-        <p:spPr>
-          <a:xfrm>
-            <a:off x="640080" y="1920240"/>
-            <a:ext cx="3017520" cy="182880"/>
-          </a:xfrm>
-          <a:prstGeom prst="rect">
-            <a:avLst/>
-          </a:prstGeom>
-          <a:noFill/>
-          <a:ln/>
-        </p:spPr>
-        <p:txBody>
-          <a:bodyPr wrap="square" rtlCol="0" anchor="ctr"/>
-          <a:lstStyle/>
-          <a:p>
-            <a:pPr indent="0" marL="0">
-              <a:buNone/>
-            </a:pPr>
-            <a:r>
-              <a:rPr lang="en-US" sz="850" b="1" dirty="0">
+              <a:rPr lang="en-US" sz="900" dirty="0">
                 <a:solidFill>
                   <a:srgbClr val="94A3B8"/>
                 </a:solidFill>
               </a:rPr>
-              <a:t>ESSENCIAL INDIVIDUAL</a:t>
-            </a:r>
-            <a:endParaRPr lang="en-US" sz="850" dirty="0"/>
-          </a:p>
-        </p:txBody>
-      </p:sp>
-      <p:sp>
-        <p:nvSpPr>
-          <p:cNvPr id="8" name="Text 6"/>
-          <p:cNvSpPr/>
-          <p:nvPr/>
-        </p:nvSpPr>
-        <p:spPr>
-          <a:xfrm>
-            <a:off x="640080" y="2286000"/>
-            <a:ext cx="3017520" cy="365760"/>
-          </a:xfrm>
-          <a:prstGeom prst="rect">
-            <a:avLst/>
-          </a:prstGeom>
-          <a:noFill/>
-          <a:ln/>
-        </p:spPr>
-        <p:txBody>
-          <a:bodyPr wrap="square" rtlCol="0" anchor="ctr"/>
-          <a:lstStyle/>
-          <a:p>
-            <a:pPr indent="0" marL="0">
-              <a:buNone/>
-            </a:pPr>
-            <a:r>
-              <a:rPr lang="en-US" sz="2000" b="1" dirty="0">
-                <a:solidFill>
-                  <a:srgbClr val="F59E0B"/>
-                </a:solidFill>
-              </a:rPr>
-              <a:t>R$ 149 /mês</a:t>
-            </a:r>
-            <a:endParaRPr lang="en-US" sz="2000" dirty="0"/>
-          </a:p>
-        </p:txBody>
-      </p:sp>
-      <p:sp>
-        <p:nvSpPr>
-          <p:cNvPr id="9" name="Text 7"/>
-          <p:cNvSpPr/>
-          <p:nvPr/>
-        </p:nvSpPr>
-        <p:spPr>
-          <a:xfrm>
-            <a:off x="640080" y="2926080"/>
-            <a:ext cx="3017520" cy="2743200"/>
-          </a:xfrm>
-          <a:prstGeom prst="rect">
-            <a:avLst/>
-          </a:prstGeom>
-          <a:noFill/>
-          <a:ln/>
-        </p:spPr>
-        <p:txBody>
-          <a:bodyPr wrap="square" rtlCol="0" anchor="t"/>
-          <a:lstStyle/>
-          <a:p>
-            <a:pPr algn="l" indent="0" marL="0">
-              <a:buNone/>
-            </a:pPr>
-            <a:r>
-              <a:rPr lang="en-US" sz="1100" b="1" dirty="0">
-                <a:solidFill>
-                  <a:srgbClr val="F59E0B"/>
-                </a:solidFill>
-              </a:rPr>
-              <a:t>• Staff: </a:t>
-            </a:r>
-            <a:pPr algn="l" indent="0" marL="0">
-              <a:buNone/>
-            </a:pPr>
-            <a:r>
-              <a:rPr lang="en-US" sz="1050" dirty="0">
-                <a:solidFill>
-                  <a:srgbClr val="CBD5E1"/>
-                </a:solidFill>
-              </a:rPr>
-              <a:t>Apenas 1 usuário de staff (operador principal).
-</a:t>
-            </a:r>
-            <a:pPr algn="l" indent="0" marL="0">
-              <a:buNone/>
-            </a:pPr>
-            <a:r>
-              <a:rPr lang="en-US" sz="1100" b="1" dirty="0">
-                <a:solidFill>
-                  <a:srgbClr val="F59E0B"/>
-                </a:solidFill>
-              </a:rPr>
-              <a:t>• O.S. &amp; Recibos: </a:t>
-            </a:r>
-            <a:pPr algn="l" indent="0" marL="0">
-              <a:buNone/>
-            </a:pPr>
-            <a:r>
-              <a:rPr lang="en-US" sz="1050" dirty="0">
-                <a:solidFill>
-                  <a:srgbClr val="CBD5E1"/>
-                </a:solidFill>
-              </a:rPr>
-              <a:t>Emissão de Ordens de Serviço, recibos, orçamentos e backups no Drive.</a:t>
-            </a:r>
-            <a:endParaRPr lang="en-US" sz="1100" dirty="0"/>
-          </a:p>
-        </p:txBody>
-      </p:sp>
-      <p:sp>
-        <p:nvSpPr>
-          <p:cNvPr id="10" name="Shape 8"/>
-          <p:cNvSpPr/>
-          <p:nvPr/>
-        </p:nvSpPr>
-        <p:spPr>
-          <a:xfrm>
-            <a:off x="4398264" y="1463040"/>
-            <a:ext cx="3383280" cy="4389120"/>
-          </a:xfrm>
-          <a:prstGeom prst="rect">
-            <a:avLst/>
-          </a:prstGeom>
-          <a:solidFill>
-            <a:srgbClr val="182236"/>
-          </a:solidFill>
-          <a:ln w="15240">
-            <a:solidFill>
-              <a:srgbClr val="2563EB"/>
-            </a:solidFill>
-            <a:prstDash val="solid"/>
-          </a:ln>
-        </p:spPr>
-      </p:sp>
-      <p:sp>
-        <p:nvSpPr>
-          <p:cNvPr id="11" name="Shape 9"/>
-          <p:cNvSpPr/>
-          <p:nvPr/>
-        </p:nvSpPr>
-        <p:spPr>
-          <a:xfrm>
-            <a:off x="4398264" y="1463040"/>
-            <a:ext cx="3383280" cy="228600"/>
-          </a:xfrm>
-          <a:prstGeom prst="rect">
-            <a:avLst/>
-          </a:prstGeom>
-          <a:solidFill>
-            <a:srgbClr val="2563EB"/>
-          </a:solidFill>
-          <a:ln/>
-        </p:spPr>
-      </p:sp>
-      <p:sp>
-        <p:nvSpPr>
-          <p:cNvPr id="12" name="Text 10"/>
-          <p:cNvSpPr/>
-          <p:nvPr/>
-        </p:nvSpPr>
-        <p:spPr>
-          <a:xfrm>
-            <a:off x="4398264" y="1481328"/>
-            <a:ext cx="3383280" cy="182880"/>
-          </a:xfrm>
-          <a:prstGeom prst="rect">
-            <a:avLst/>
-          </a:prstGeom>
-          <a:noFill/>
-          <a:ln/>
-        </p:spPr>
-        <p:txBody>
-          <a:bodyPr wrap="square" rtlCol="0" anchor="ctr"/>
-          <a:lstStyle/>
-          <a:p>
-            <a:pPr algn="ctr" indent="0" marL="0">
-              <a:buNone/>
-            </a:pPr>
-            <a:r>
-              <a:rPr lang="en-US" sz="800" b="1" dirty="0">
-                <a:solidFill>
-                  <a:srgbClr val="F8FAFC"/>
-                </a:solidFill>
-              </a:rPr>
-              <a:t>RECOMENDADO / MAIS VENDIDO</a:t>
-            </a:r>
-            <a:endParaRPr lang="en-US" sz="800" dirty="0"/>
-          </a:p>
-        </p:txBody>
-      </p:sp>
-      <p:sp>
-        <p:nvSpPr>
-          <p:cNvPr id="13" name="Text 11"/>
-          <p:cNvSpPr/>
-          <p:nvPr/>
-        </p:nvSpPr>
-        <p:spPr>
-          <a:xfrm>
-            <a:off x="4581144" y="1783080"/>
-            <a:ext cx="3017520" cy="274320"/>
-          </a:xfrm>
-          <a:prstGeom prst="rect">
-            <a:avLst/>
-          </a:prstGeom>
-          <a:noFill/>
-          <a:ln/>
-        </p:spPr>
-        <p:txBody>
-          <a:bodyPr wrap="square" rtlCol="0" anchor="ctr"/>
-          <a:lstStyle/>
-          <a:p>
-            <a:pPr indent="0" marL="0">
-              <a:buNone/>
-            </a:pPr>
-            <a:r>
-              <a:rPr lang="en-US" sz="1500" b="1" dirty="0">
-                <a:solidFill>
-                  <a:srgbClr val="F8FAFC"/>
-                </a:solidFill>
-              </a:rPr>
-              <a:t>Plano .357mag</a:t>
-            </a:r>
-            <a:endParaRPr lang="en-US" sz="1500" dirty="0"/>
-          </a:p>
-        </p:txBody>
-      </p:sp>
-      <p:sp>
-        <p:nvSpPr>
-          <p:cNvPr id="14" name="Text 12"/>
-          <p:cNvSpPr/>
-          <p:nvPr/>
-        </p:nvSpPr>
-        <p:spPr>
-          <a:xfrm>
-            <a:off x="4581144" y="2057400"/>
-            <a:ext cx="3017520" cy="182880"/>
-          </a:xfrm>
-          <a:prstGeom prst="rect">
-            <a:avLst/>
-          </a:prstGeom>
-          <a:noFill/>
-          <a:ln/>
-        </p:spPr>
-        <p:txBody>
-          <a:bodyPr wrap="square" rtlCol="0" anchor="ctr"/>
-          <a:lstStyle/>
-          <a:p>
-            <a:pPr indent="0" marL="0">
-              <a:buNone/>
-            </a:pPr>
-            <a:r>
-              <a:rPr lang="en-US" sz="850" b="1" dirty="0">
-                <a:solidFill>
-                  <a:srgbClr val="94A3B8"/>
-                </a:solidFill>
-              </a:rPr>
-              <a:t>PROFISSIONAL E CRESCIMENTO</a:t>
-            </a:r>
-            <a:endParaRPr lang="en-US" sz="850" dirty="0"/>
-          </a:p>
-        </p:txBody>
-      </p:sp>
-      <p:sp>
-        <p:nvSpPr>
-          <p:cNvPr id="15" name="Text 13"/>
-          <p:cNvSpPr/>
-          <p:nvPr/>
-        </p:nvSpPr>
-        <p:spPr>
-          <a:xfrm>
-            <a:off x="4581144" y="2423160"/>
-            <a:ext cx="3017520" cy="365760"/>
-          </a:xfrm>
-          <a:prstGeom prst="rect">
-            <a:avLst/>
-          </a:prstGeom>
-          <a:noFill/>
-          <a:ln/>
-        </p:spPr>
-        <p:txBody>
-          <a:bodyPr wrap="square" rtlCol="0" anchor="ctr"/>
-          <a:lstStyle/>
-          <a:p>
-            <a:pPr indent="0" marL="0">
-              <a:buNone/>
-            </a:pPr>
-            <a:r>
-              <a:rPr lang="en-US" sz="2000" b="1" dirty="0">
-                <a:solidFill>
-                  <a:srgbClr val="F59E0B"/>
-                </a:solidFill>
-              </a:rPr>
-              <a:t>R$ 299 /mês</a:t>
-            </a:r>
-            <a:endParaRPr lang="en-US" sz="2000" dirty="0"/>
-          </a:p>
-        </p:txBody>
-      </p:sp>
-      <p:sp>
-        <p:nvSpPr>
-          <p:cNvPr id="16" name="Text 14"/>
-          <p:cNvSpPr/>
-          <p:nvPr/>
-        </p:nvSpPr>
-        <p:spPr>
-          <a:xfrm>
-            <a:off x="4581144" y="3063240"/>
-            <a:ext cx="3017520" cy="2651760"/>
-          </a:xfrm>
-          <a:prstGeom prst="rect">
-            <a:avLst/>
-          </a:prstGeom>
-          <a:noFill/>
-          <a:ln/>
-        </p:spPr>
-        <p:txBody>
-          <a:bodyPr wrap="square" rtlCol="0" anchor="t"/>
-          <a:lstStyle/>
-          <a:p>
-            <a:pPr algn="l" indent="0" marL="0">
-              <a:buNone/>
-            </a:pPr>
-            <a:r>
-              <a:rPr lang="en-US" sz="1100" b="1" dirty="0">
-                <a:solidFill>
-                  <a:srgbClr val="F59E0B"/>
-                </a:solidFill>
-              </a:rPr>
-              <a:t>• Staff: </a:t>
-            </a:r>
-            <a:pPr algn="l" indent="0" marL="0">
-              <a:buNone/>
-            </a:pPr>
-            <a:r>
-              <a:rPr lang="en-US" sz="1050" dirty="0">
-                <a:solidFill>
-                  <a:srgbClr val="CBD5E1"/>
-                </a:solidFill>
-              </a:rPr>
-              <a:t>Até 4 usuários de staff.
-</a:t>
-            </a:r>
-            <a:pPr algn="l" indent="0" marL="0">
-              <a:buNone/>
-            </a:pPr>
-            <a:r>
-              <a:rPr lang="en-US" sz="1100" b="1" dirty="0">
-                <a:solidFill>
-                  <a:srgbClr val="F59E0B"/>
-                </a:solidFill>
-              </a:rPr>
-              <a:t>• Clientes: </a:t>
-            </a:r>
-            <a:pPr algn="l" indent="0" marL="0">
-              <a:buNone/>
-            </a:pPr>
-            <a:r>
-              <a:rPr lang="en-US" sz="1050" dirty="0">
-                <a:solidFill>
-                  <a:srgbClr val="CBD5E1"/>
-                </a:solidFill>
-              </a:rPr>
-              <a:t>Até 20 clientes CAC vinculados diretamente.
-</a:t>
-            </a:r>
-            <a:pPr algn="l" indent="0" marL="0">
-              <a:buNone/>
-            </a:pPr>
-            <a:r>
-              <a:rPr lang="en-US" sz="1100" b="1" dirty="0">
-                <a:solidFill>
-                  <a:srgbClr val="F59E0B"/>
-                </a:solidFill>
-              </a:rPr>
-              <a:t>• Agenda: </a:t>
-            </a:r>
-            <a:pPr algn="l" indent="0" marL="0">
-              <a:buNone/>
-            </a:pPr>
-            <a:r>
-              <a:rPr lang="en-US" sz="1050" dirty="0">
-                <a:solidFill>
-                  <a:srgbClr val="CBD5E1"/>
-                </a:solidFill>
-              </a:rPr>
-              <a:t>Controle de agendamentos e lembretes com suporte VIP prioritário.</a:t>
-            </a:r>
-            <a:endParaRPr lang="en-US" sz="1100" dirty="0"/>
-          </a:p>
-        </p:txBody>
-      </p:sp>
-      <p:sp>
-        <p:nvSpPr>
-          <p:cNvPr id="17" name="Shape 15"/>
-          <p:cNvSpPr/>
-          <p:nvPr/>
-        </p:nvSpPr>
-        <p:spPr>
-          <a:xfrm>
-            <a:off x="8348472" y="1463040"/>
-            <a:ext cx="3383280" cy="4389120"/>
-          </a:xfrm>
-          <a:prstGeom prst="rect">
-            <a:avLst/>
-          </a:prstGeom>
-          <a:solidFill>
-            <a:srgbClr val="141A28"/>
-          </a:solidFill>
-          <a:ln w="12700">
-            <a:solidFill>
-              <a:srgbClr val="1E293B"/>
-            </a:solidFill>
-            <a:prstDash val="solid"/>
-          </a:ln>
-        </p:spPr>
-      </p:sp>
-      <p:sp>
-        <p:nvSpPr>
-          <p:cNvPr id="18" name="Text 16"/>
-          <p:cNvSpPr/>
-          <p:nvPr/>
-        </p:nvSpPr>
-        <p:spPr>
-          <a:xfrm>
-            <a:off x="8531352" y="1645920"/>
-            <a:ext cx="3017520" cy="274320"/>
-          </a:xfrm>
-          <a:prstGeom prst="rect">
-            <a:avLst/>
-          </a:prstGeom>
-          <a:noFill/>
-          <a:ln/>
-        </p:spPr>
-        <p:txBody>
-          <a:bodyPr wrap="square" rtlCol="0" anchor="ctr"/>
-          <a:lstStyle/>
-          <a:p>
-            <a:pPr indent="0" marL="0">
-              <a:buNone/>
-            </a:pPr>
-            <a:r>
-              <a:rPr lang="en-US" sz="1500" b="1" dirty="0">
-                <a:solidFill>
-                  <a:srgbClr val="F8FAFC"/>
-                </a:solidFill>
-              </a:rPr>
-              <a:t>Plano .308win</a:t>
-            </a:r>
-            <a:endParaRPr lang="en-US" sz="1500" dirty="0"/>
-          </a:p>
-        </p:txBody>
-      </p:sp>
-      <p:sp>
-        <p:nvSpPr>
-          <p:cNvPr id="19" name="Text 17"/>
-          <p:cNvSpPr/>
-          <p:nvPr/>
-        </p:nvSpPr>
-        <p:spPr>
-          <a:xfrm>
-            <a:off x="8531352" y="1920240"/>
-            <a:ext cx="3017520" cy="182880"/>
-          </a:xfrm>
-          <a:prstGeom prst="rect">
-            <a:avLst/>
-          </a:prstGeom>
-          <a:noFill/>
-          <a:ln/>
-        </p:spPr>
-        <p:txBody>
-          <a:bodyPr wrap="square" rtlCol="0" anchor="ctr"/>
-          <a:lstStyle/>
-          <a:p>
-            <a:pPr indent="0" marL="0">
-              <a:buNone/>
-            </a:pPr>
-            <a:r>
-              <a:rPr lang="en-US" sz="850" b="1" dirty="0">
-                <a:solidFill>
-                  <a:srgbClr val="94A3B8"/>
-                </a:solidFill>
-              </a:rPr>
-              <a:t>CORPORATIVO E ILIMITADO</a:t>
-            </a:r>
-            <a:endParaRPr lang="en-US" sz="850" dirty="0"/>
-          </a:p>
-        </p:txBody>
-      </p:sp>
-      <p:sp>
-        <p:nvSpPr>
-          <p:cNvPr id="20" name="Text 18"/>
-          <p:cNvSpPr/>
-          <p:nvPr/>
-        </p:nvSpPr>
-        <p:spPr>
-          <a:xfrm>
-            <a:off x="8531352" y="2286000"/>
-            <a:ext cx="3017520" cy="365760"/>
-          </a:xfrm>
-          <a:prstGeom prst="rect">
-            <a:avLst/>
-          </a:prstGeom>
-          <a:noFill/>
-          <a:ln/>
-        </p:spPr>
-        <p:txBody>
-          <a:bodyPr wrap="square" rtlCol="0" anchor="ctr"/>
-          <a:lstStyle/>
-          <a:p>
-            <a:pPr indent="0" marL="0">
-              <a:buNone/>
-            </a:pPr>
-            <a:r>
-              <a:rPr lang="en-US" sz="2000" b="1" dirty="0">
-                <a:solidFill>
-                  <a:srgbClr val="F59E0B"/>
-                </a:solidFill>
-              </a:rPr>
-              <a:t>R$ 599 /mês</a:t>
-            </a:r>
-            <a:endParaRPr lang="en-US" sz="2000" dirty="0"/>
-          </a:p>
-        </p:txBody>
-      </p:sp>
-      <p:sp>
-        <p:nvSpPr>
-          <p:cNvPr id="21" name="Text 19"/>
-          <p:cNvSpPr/>
-          <p:nvPr/>
-        </p:nvSpPr>
-        <p:spPr>
-          <a:xfrm>
-            <a:off x="8531352" y="2926080"/>
-            <a:ext cx="3017520" cy="2743200"/>
-          </a:xfrm>
-          <a:prstGeom prst="rect">
-            <a:avLst/>
-          </a:prstGeom>
-          <a:noFill/>
-          <a:ln/>
-        </p:spPr>
-        <p:txBody>
-          <a:bodyPr wrap="square" rtlCol="0" anchor="t"/>
-          <a:lstStyle/>
-          <a:p>
-            <a:pPr algn="l" indent="0" marL="0">
-              <a:buNone/>
-            </a:pPr>
-            <a:r>
-              <a:rPr lang="en-US" sz="1100" b="1" dirty="0">
-                <a:solidFill>
-                  <a:srgbClr val="F59E0B"/>
-                </a:solidFill>
-              </a:rPr>
-              <a:t>• Ilimitado: </a:t>
-            </a:r>
-            <a:pPr algn="l" indent="0" marL="0">
-              <a:buNone/>
-            </a:pPr>
-            <a:r>
-              <a:rPr lang="en-US" sz="1050" dirty="0">
-                <a:solidFill>
-                  <a:srgbClr val="CBD5E1"/>
-                </a:solidFill>
-              </a:rPr>
-              <a:t>Staff e vínculos de clientes ilimitados na plataforma.
-</a:t>
-            </a:r>
-            <a:pPr algn="l" indent="0" marL="0">
-              <a:buNone/>
-            </a:pPr>
-            <a:r>
-              <a:rPr lang="en-US" sz="1100" b="1" dirty="0">
-                <a:solidFill>
-                  <a:srgbClr val="F59E0B"/>
-                </a:solidFill>
-              </a:rPr>
-              <a:t>• White Label: </a:t>
-            </a:r>
-            <a:pPr algn="l" indent="0" marL="0">
-              <a:buNone/>
-            </a:pPr>
-            <a:r>
-              <a:rPr lang="en-US" sz="1050" dirty="0">
-                <a:solidFill>
-                  <a:srgbClr val="CBD5E1"/>
-                </a:solidFill>
-              </a:rPr>
-              <a:t>Logotipo da própria empresa no portal e suporte premium dedicado.</a:t>
-            </a:r>
-            <a:endParaRPr lang="en-US" sz="1100" dirty="0"/>
-          </a:p>
-        </p:txBody>
-      </p:sp>
-      <p:sp>
-        <p:nvSpPr>
-          <p:cNvPr id="22" name="Shape 20"/>
-          <p:cNvSpPr/>
-          <p:nvPr/>
-        </p:nvSpPr>
-        <p:spPr>
-          <a:xfrm>
-            <a:off x="457200" y="6126480"/>
-            <a:ext cx="11274552" cy="18288"/>
+              <a:t>Portal GCAC — Solução para Atiradores, Colecionadores, Caçadores e Despachantes</a:t>
+            </a:r>
+            <a:endParaRPr lang="en-US" sz="900" dirty="0"/>
+          </a:p>
+        </p:txBody>
+      </p:sp>
+      <p:sp>
+        <p:nvSpPr>
+          <p:cNvPr id="24" name="Shape 2">
+            <a:extLst>
+              <a:ext uri="{FF2B5EF4-FFF2-40B4-BE49-F238E27FC236}">
+                <a16:creationId xmlns:a16="http://schemas.microsoft.com/office/drawing/2014/main" id="{F354CBDB-2FE4-43A9-9590-891E115A5C04}"/>
+              </a:ext>
+            </a:extLst>
+          </p:cNvPr>
+          <p:cNvSpPr/>
+          <p:nvPr/>
+        </p:nvSpPr>
+        <p:spPr>
+          <a:xfrm>
+            <a:off x="457200" y="1097280"/>
+            <a:ext cx="8563356" cy="68580"/>
           </a:xfrm>
           <a:prstGeom prst="rect">
             <a:avLst/>
@@ -4152,42 +3724,6 @@
             <a:prstDash val="solid"/>
           </a:ln>
         </p:spPr>
-      </p:sp>
-      <p:sp>
-        <p:nvSpPr>
-          <p:cNvPr id="23" name="Text 21"/>
-          <p:cNvSpPr/>
-          <p:nvPr/>
-        </p:nvSpPr>
-        <p:spPr>
-          <a:xfrm>
-            <a:off x="457200" y="6217920"/>
-            <a:ext cx="7315200" cy="274320"/>
-          </a:xfrm>
-          <a:prstGeom prst="rect">
-            <a:avLst/>
-          </a:prstGeom>
-          <a:noFill/>
-          <a:ln/>
-        </p:spPr>
-        <p:txBody>
-          <a:bodyPr wrap="square" rtlCol="0" anchor="ctr"/>
-          <a:lstStyle/>
-          <a:p>
-            <a:pPr indent="0" marL="0">
-              <a:buNone/>
-            </a:pPr>
-            <a:r>
-              <a:rPr lang="en-US" sz="900" dirty="0">
-                <a:solidFill>
-                  <a:srgbClr val="94A3B8"/>
-                </a:solidFill>
-              </a:rPr>
-              <a:t>Portal GCAC — Solução para Atiradores, Colecionadores, Caçadores e Despachantes</a:t>
-            </a:r>
-            <a:endParaRPr lang="en-US" sz="900" dirty="0"/>
-          </a:p>
-        </p:txBody>
       </p:sp>
     </p:spTree>
   </p:cSld>
@@ -4205,6 +3741,7 @@
         <a:solidFill>
           <a:srgbClr val="0B0F19"/>
         </a:solidFill>
+        <a:effectLst/>
       </p:bgPr>
     </p:bg>
     <p:spTree>
@@ -4242,7 +3779,7 @@
           <a:bodyPr wrap="square" rtlCol="0" anchor="ctr"/>
           <a:lstStyle/>
           <a:p>
-            <a:pPr indent="0" marL="0">
+            <a:pPr marL="0" indent="0">
               <a:buNone/>
             </a:pPr>
             <a:r>
@@ -4266,7 +3803,7 @@
         <p:spPr>
           <a:xfrm>
             <a:off x="457200" y="548640"/>
-            <a:ext cx="11274552" cy="548640"/>
+            <a:ext cx="8686800" cy="548640"/>
           </a:xfrm>
           <a:prstGeom prst="rect">
             <a:avLst/>
@@ -4278,7 +3815,7 @@
           <a:bodyPr wrap="square" rtlCol="0" anchor="ctr"/>
           <a:lstStyle/>
           <a:p>
-            <a:pPr indent="0" marL="0">
+            <a:pPr marL="0" indent="0">
               <a:buNone/>
             </a:pPr>
             <a:r>
@@ -4300,9 +3837,9 @@
           <p:nvPr/>
         </p:nvSpPr>
         <p:spPr>
-          <a:xfrm>
-            <a:off x="457200" y="1097280"/>
-            <a:ext cx="11274552" cy="18288"/>
+          <a:xfrm flipV="1">
+            <a:off x="124822" y="1081316"/>
+            <a:ext cx="8438607" cy="45719"/>
           </a:xfrm>
           <a:prstGeom prst="rect">
             <a:avLst/>
@@ -4326,8 +3863,8 @@
         </p:nvSpPr>
         <p:spPr>
           <a:xfrm>
-            <a:off x="457200" y="1463040"/>
-            <a:ext cx="5394960" cy="4389120"/>
+            <a:off x="124822" y="1267097"/>
+            <a:ext cx="3910149" cy="3589020"/>
           </a:xfrm>
           <a:prstGeom prst="rect">
             <a:avLst/>
@@ -4351,7 +3888,7 @@
         </p:nvSpPr>
         <p:spPr>
           <a:xfrm>
-            <a:off x="731520" y="1645920"/>
+            <a:off x="262711" y="1455783"/>
             <a:ext cx="4846320" cy="365760"/>
           </a:xfrm>
           <a:prstGeom prst="rect">
@@ -4364,7 +3901,7 @@
           <a:bodyPr wrap="square" rtlCol="0" anchor="ctr"/>
           <a:lstStyle/>
           <a:p>
-            <a:pPr indent="0" marL="0">
+            <a:pPr marL="0" indent="0">
               <a:buNone/>
             </a:pPr>
             <a:r>
@@ -4387,8 +3924,8 @@
         </p:nvSpPr>
         <p:spPr>
           <a:xfrm>
-            <a:off x="731520" y="2103120"/>
-            <a:ext cx="4846320" cy="3566160"/>
+            <a:off x="182880" y="1931670"/>
+            <a:ext cx="3794034" cy="3566160"/>
           </a:xfrm>
           <a:prstGeom prst="rect">
             <a:avLst/>
@@ -4400,7 +3937,7 @@
           <a:bodyPr wrap="square" rtlCol="0" anchor="t"/>
           <a:lstStyle/>
           <a:p>
-            <a:pPr algn="l" indent="0" marL="0">
+            <a:pPr marL="0" indent="0" algn="l">
               <a:buNone/>
             </a:pPr>
             <a:r>
@@ -4409,22 +3946,8 @@
                   <a:srgbClr val="EF4444"/>
                 </a:solidFill>
               </a:rPr>
-              <a:t>• </a:t>
-            </a:r>
-            <a:pPr algn="l" indent="0" marL="0">
-              <a:buNone/>
-            </a:pPr>
-            <a:r>
-              <a:rPr lang="en-US" sz="1200" b="1" dirty="0">
-                <a:solidFill>
-                  <a:srgbClr val="EF4444"/>
-                </a:solidFill>
-              </a:rPr>
-              <a:t>Burocracia Manual: </a:t>
-            </a:r>
-            <a:pPr algn="l" indent="0" marL="0">
-              <a:buNone/>
-            </a:pPr>
+              <a:t>• Burocracia Manual: </a:t>
+            </a:r>
             <a:r>
               <a:rPr lang="en-US" sz="1150" dirty="0">
                 <a:solidFill>
@@ -4434,31 +3957,14 @@
               <a:t>Processo lento de digitação e redigitação de informações cadastrais e de acervos.
 </a:t>
             </a:r>
-            <a:pPr algn="l" indent="0" marL="0">
-              <a:buNone/>
-            </a:pPr>
             <a:r>
               <a:rPr lang="en-US" sz="1200" b="1" dirty="0">
                 <a:solidFill>
                   <a:srgbClr val="EF4444"/>
                 </a:solidFill>
               </a:rPr>
-              <a:t>• </a:t>
-            </a:r>
-            <a:pPr algn="l" indent="0" marL="0">
-              <a:buNone/>
-            </a:pPr>
-            <a:r>
-              <a:rPr lang="en-US" sz="1200" b="1" dirty="0">
-                <a:solidFill>
-                  <a:srgbClr val="EF4444"/>
-                </a:solidFill>
-              </a:rPr>
-              <a:t>WhatsApp Caótico: </a:t>
-            </a:r>
-            <a:pPr algn="l" indent="0" marL="0">
-              <a:buNone/>
-            </a:pPr>
+              <a:t>• WhatsApp Caótico: </a:t>
+            </a:r>
             <a:r>
               <a:rPr lang="en-US" sz="1150" dirty="0">
                 <a:solidFill>
@@ -4468,31 +3974,14 @@
               <a:t>Troca manual de fotos de documentos, PDFs e comprovantes que se perdem no histórico.
 </a:t>
             </a:r>
-            <a:pPr algn="l" indent="0" marL="0">
-              <a:buNone/>
-            </a:pPr>
             <a:r>
               <a:rPr lang="en-US" sz="1200" b="1" dirty="0">
                 <a:solidFill>
                   <a:srgbClr val="EF4444"/>
                 </a:solidFill>
               </a:rPr>
-              <a:t>• </a:t>
-            </a:r>
-            <a:pPr algn="l" indent="0" marL="0">
-              <a:buNone/>
-            </a:pPr>
-            <a:r>
-              <a:rPr lang="en-US" sz="1200" b="1" dirty="0">
-                <a:solidFill>
-                  <a:srgbClr val="EF4444"/>
-                </a:solidFill>
-              </a:rPr>
-              <a:t>Perda de Prazos: </a:t>
-            </a:r>
-            <a:pPr algn="l" indent="0" marL="0">
-              <a:buNone/>
-            </a:pPr>
+              <a:t>• Perda de Prazos: </a:t>
+            </a:r>
             <a:r>
               <a:rPr lang="en-US" sz="1150" dirty="0">
                 <a:solidFill>
@@ -4514,8 +4003,8 @@
         </p:nvSpPr>
         <p:spPr>
           <a:xfrm>
-            <a:off x="6336792" y="1463040"/>
-            <a:ext cx="5394960" cy="4389120"/>
+            <a:off x="4172860" y="1267097"/>
+            <a:ext cx="4390569" cy="3602083"/>
           </a:xfrm>
           <a:prstGeom prst="rect">
             <a:avLst/>
@@ -4539,7 +4028,7 @@
         </p:nvSpPr>
         <p:spPr>
           <a:xfrm>
-            <a:off x="6611112" y="1645920"/>
+            <a:off x="4767798" y="1414381"/>
             <a:ext cx="4846320" cy="365760"/>
           </a:xfrm>
           <a:prstGeom prst="rect">
@@ -4552,7 +4041,7 @@
           <a:bodyPr wrap="square" rtlCol="0" anchor="ctr"/>
           <a:lstStyle/>
           <a:p>
-            <a:pPr indent="0" marL="0">
+            <a:pPr marL="0" indent="0">
               <a:buNone/>
             </a:pPr>
             <a:r>
@@ -4575,8 +4064,8 @@
         </p:nvSpPr>
         <p:spPr>
           <a:xfrm>
-            <a:off x="6611112" y="2103120"/>
-            <a:ext cx="4846320" cy="3566160"/>
+            <a:off x="4187952" y="1931670"/>
+            <a:ext cx="4172277" cy="2937510"/>
           </a:xfrm>
           <a:prstGeom prst="rect">
             <a:avLst/>
@@ -4588,7 +4077,7 @@
           <a:bodyPr wrap="square" rtlCol="0" anchor="t"/>
           <a:lstStyle/>
           <a:p>
-            <a:pPr algn="l" indent="0" marL="0">
+            <a:pPr marL="0" indent="0" algn="l">
               <a:buNone/>
             </a:pPr>
             <a:r>
@@ -4597,22 +4086,8 @@
                   <a:srgbClr val="22C55E"/>
                 </a:solidFill>
               </a:rPr>
-              <a:t>• </a:t>
-            </a:r>
-            <a:pPr algn="l" indent="0" marL="0">
-              <a:buNone/>
-            </a:pPr>
-            <a:r>
-              <a:rPr lang="en-US" sz="1200" b="1" dirty="0">
-                <a:solidFill>
-                  <a:srgbClr val="22C55E"/>
-                </a:solidFill>
-              </a:rPr>
-              <a:t>Ficha Automática: </a:t>
-            </a:r>
-            <a:pPr algn="l" indent="0" marL="0">
-              <a:buNone/>
-            </a:pPr>
+              <a:t>• Ficha Automática: </a:t>
+            </a:r>
             <a:r>
               <a:rPr lang="en-US" sz="1150" dirty="0">
                 <a:solidFill>
@@ -4622,31 +4097,14 @@
               <a:t>O próprio cliente (B2C) acessa e edita seu cadastro, eliminando digitação manual.
 </a:t>
             </a:r>
-            <a:pPr algn="l" indent="0" marL="0">
-              <a:buNone/>
-            </a:pPr>
             <a:r>
               <a:rPr lang="en-US" sz="1200" b="1" dirty="0">
                 <a:solidFill>
                   <a:srgbClr val="22C55E"/>
                 </a:solidFill>
               </a:rPr>
-              <a:t>• </a:t>
-            </a:r>
-            <a:pPr algn="l" indent="0" marL="0">
-              <a:buNone/>
-            </a:pPr>
-            <a:r>
-              <a:rPr lang="en-US" sz="1200" b="1" dirty="0">
-                <a:solidFill>
-                  <a:srgbClr val="22C55E"/>
-                </a:solidFill>
-              </a:rPr>
-              <a:t>Acervo Digital: </a:t>
-            </a:r>
-            <a:pPr algn="l" indent="0" marL="0">
-              <a:buNone/>
-            </a:pPr>
+              <a:t>• Acervo Digital: </a:t>
+            </a:r>
             <a:r>
               <a:rPr lang="en-US" sz="1150" dirty="0">
                 <a:solidFill>
@@ -4656,31 +4114,14 @@
               <a:t>Documentação centralizada de armas, CR, CRAF, GT e IBAMA com arquivos anexos.
 </a:t>
             </a:r>
-            <a:pPr algn="l" indent="0" marL="0">
-              <a:buNone/>
-            </a:pPr>
             <a:r>
               <a:rPr lang="en-US" sz="1200" b="1" dirty="0">
                 <a:solidFill>
                   <a:srgbClr val="22C55E"/>
                 </a:solidFill>
               </a:rPr>
-              <a:t>• </a:t>
-            </a:r>
-            <a:pPr algn="l" indent="0" marL="0">
-              <a:buNone/>
-            </a:pPr>
-            <a:r>
-              <a:rPr lang="en-US" sz="1200" b="1" dirty="0">
-                <a:solidFill>
-                  <a:srgbClr val="22C55E"/>
-                </a:solidFill>
-              </a:rPr>
-              <a:t>Alertas Inteligentes: </a:t>
-            </a:r>
-            <a:pPr algn="l" indent="0" marL="0">
-              <a:buNone/>
-            </a:pPr>
+              <a:t>• Alertas Inteligentes: </a:t>
+            </a:r>
             <a:r>
               <a:rPr lang="en-US" sz="1150" dirty="0">
                 <a:solidFill>
@@ -4740,7 +4181,7 @@
           <a:bodyPr wrap="square" rtlCol="0" anchor="ctr"/>
           <a:lstStyle/>
           <a:p>
-            <a:pPr indent="0" marL="0">
+            <a:pPr marL="0" indent="0">
               <a:buNone/>
             </a:pPr>
             <a:r>
@@ -4771,6 +4212,7 @@
         <a:solidFill>
           <a:srgbClr val="0B0F19"/>
         </a:solidFill>
+        <a:effectLst/>
       </p:bgPr>
     </p:bg>
     <p:spTree>
@@ -4808,7 +4250,7 @@
           <a:bodyPr wrap="square" rtlCol="0" anchor="ctr"/>
           <a:lstStyle/>
           <a:p>
-            <a:pPr indent="0" marL="0">
+            <a:pPr marL="0" indent="0">
               <a:buNone/>
             </a:pPr>
             <a:r>
@@ -4844,7 +4286,7 @@
           <a:bodyPr wrap="square" rtlCol="0" anchor="ctr"/>
           <a:lstStyle/>
           <a:p>
-            <a:pPr indent="0" marL="0">
+            <a:pPr marL="0" indent="0">
               <a:buNone/>
             </a:pPr>
             <a:r>
@@ -4905,7 +4347,7 @@
           <a:bodyPr wrap="square" rtlCol="0" anchor="t"/>
           <a:lstStyle/>
           <a:p>
-            <a:pPr algn="l" indent="0" marL="0">
+            <a:pPr marL="0" indent="0" algn="l">
               <a:buNone/>
             </a:pPr>
             <a:r>
@@ -4914,22 +4356,8 @@
                   <a:srgbClr val="F59E0B"/>
                 </a:solidFill>
               </a:rPr>
-              <a:t>• </a:t>
-            </a:r>
-            <a:pPr algn="l" indent="0" marL="0">
-              <a:buNone/>
-            </a:pPr>
-            <a:r>
-              <a:rPr lang="en-US" sz="1300" b="1" dirty="0">
-                <a:solidFill>
-                  <a:srgbClr val="F59E0B"/>
-                </a:solidFill>
-              </a:rPr>
-              <a:t>Métricas Dinâmicas: </a:t>
-            </a:r>
-            <a:pPr algn="l" indent="0" marL="0">
-              <a:buNone/>
-            </a:pPr>
+              <a:t>• Métricas Dinâmicas: </a:t>
+            </a:r>
             <a:r>
               <a:rPr lang="en-US" sz="1200" dirty="0">
                 <a:solidFill>
@@ -4939,31 +4367,14 @@
               <a:t>Acompanhamento do total de Ordens de Serviço (OS) ativas, concluídas no mês e faturamento consolidado.
 </a:t>
             </a:r>
-            <a:pPr algn="l" indent="0" marL="0">
-              <a:buNone/>
-            </a:pPr>
             <a:r>
               <a:rPr lang="en-US" sz="1300" b="1" dirty="0">
                 <a:solidFill>
                   <a:srgbClr val="F59E0B"/>
                 </a:solidFill>
               </a:rPr>
-              <a:t>• </a:t>
-            </a:r>
-            <a:pPr algn="l" indent="0" marL="0">
-              <a:buNone/>
-            </a:pPr>
-            <a:r>
-              <a:rPr lang="en-US" sz="1300" b="1" dirty="0">
-                <a:solidFill>
-                  <a:srgbClr val="F59E0B"/>
-                </a:solidFill>
-              </a:rPr>
-              <a:t>Atenção Diária: </a:t>
-            </a:r>
-            <a:pPr algn="l" indent="0" marL="0">
-              <a:buNone/>
-            </a:pPr>
+              <a:t>• Atenção Diária: </a:t>
+            </a:r>
             <a:r>
               <a:rPr lang="en-US" sz="1200" dirty="0">
                 <a:solidFill>
@@ -4973,31 +4384,14 @@
               <a:t>Fluxo de tarefas rápidas e lembretes integrados para o despachante gerenciar o dia a dia da equipe.
 </a:t>
             </a:r>
-            <a:pPr algn="l" indent="0" marL="0">
-              <a:buNone/>
-            </a:pPr>
             <a:r>
               <a:rPr lang="en-US" sz="1300" b="1" dirty="0">
                 <a:solidFill>
                   <a:srgbClr val="F59E0B"/>
                 </a:solidFill>
               </a:rPr>
-              <a:t>• </a:t>
-            </a:r>
-            <a:pPr algn="l" indent="0" marL="0">
-              <a:buNone/>
-            </a:pPr>
-            <a:r>
-              <a:rPr lang="en-US" sz="1300" b="1" dirty="0">
-                <a:solidFill>
-                  <a:srgbClr val="F59E0B"/>
-                </a:solidFill>
-              </a:rPr>
-              <a:t>Monitoramento Ativo: </a:t>
-            </a:r>
-            <a:pPr algn="l" indent="0" marL="0">
-              <a:buNone/>
-            </a:pPr>
+              <a:t>• Monitoramento Ativo: </a:t>
+            </a:r>
             <a:r>
               <a:rPr lang="en-US" sz="1200" dirty="0">
                 <a:solidFill>
@@ -5038,14 +4432,14 @@
       </p:sp>
       <p:pic>
         <p:nvPicPr>
-          <p:cNvPr id="7" name="Image 0" descr="C:\Users\Guilherme Gomes\.gemini\antigravity\brain\392f0286-5b76-4ec8-ac1d-7de16ea0eefa\media__1780319559934.png">    </p:cNvPr>
+          <p:cNvPr id="7" name="Image 0" descr="C:\Users\Guilherme Gomes\.gemini\antigravity\brain\392f0286-5b76-4ec8-ac1d-7de16ea0eefa\media__1780319559934.png"/>
           <p:cNvPicPr>
             <a:picLocks noChangeAspect="1"/>
           </p:cNvPicPr>
           <p:nvPr/>
         </p:nvPicPr>
         <p:blipFill>
-          <a:blip r:embed="rId1"/>
+          <a:blip r:embed="rId3"/>
           <a:stretch>
             <a:fillRect/>
           </a:stretch>
@@ -5106,7 +4500,7 @@
           <a:bodyPr wrap="square" rtlCol="0" anchor="ctr"/>
           <a:lstStyle/>
           <a:p>
-            <a:pPr indent="0" marL="0">
+            <a:pPr marL="0" indent="0">
               <a:buNone/>
             </a:pPr>
             <a:r>
@@ -5137,6 +4531,7 @@
         <a:solidFill>
           <a:srgbClr val="0B0F19"/>
         </a:solidFill>
+        <a:effectLst/>
       </p:bgPr>
     </p:bg>
     <p:spTree>
@@ -5174,7 +4569,7 @@
           <a:bodyPr wrap="square" rtlCol="0" anchor="ctr"/>
           <a:lstStyle/>
           <a:p>
-            <a:pPr indent="0" marL="0">
+            <a:pPr marL="0" indent="0">
               <a:buNone/>
             </a:pPr>
             <a:r>
@@ -5210,7 +4605,7 @@
           <a:bodyPr wrap="square" rtlCol="0" anchor="ctr"/>
           <a:lstStyle/>
           <a:p>
-            <a:pPr indent="0" marL="0">
+            <a:pPr marL="0" indent="0">
               <a:buNone/>
             </a:pPr>
             <a:r>
@@ -5271,7 +4666,7 @@
           <a:bodyPr wrap="square" rtlCol="0" anchor="t"/>
           <a:lstStyle/>
           <a:p>
-            <a:pPr algn="l" indent="0" marL="0">
+            <a:pPr marL="0" indent="0" algn="l">
               <a:buNone/>
             </a:pPr>
             <a:r>
@@ -5280,22 +4675,8 @@
                   <a:srgbClr val="F59E0B"/>
                 </a:solidFill>
               </a:rPr>
-              <a:t>• </a:t>
-            </a:r>
-            <a:pPr algn="l" indent="0" marL="0">
-              <a:buNone/>
-            </a:pPr>
-            <a:r>
-              <a:rPr lang="en-US" sz="1300" b="1" dirty="0">
-                <a:solidFill>
-                  <a:srgbClr val="F59E0B"/>
-                </a:solidFill>
-              </a:rPr>
-              <a:t>Painel Corporativo: </a:t>
-            </a:r>
-            <a:pPr algn="l" indent="0" marL="0">
-              <a:buNone/>
-            </a:pPr>
+              <a:t>• Painel Corporativo: </a:t>
+            </a:r>
             <a:r>
               <a:rPr lang="en-US" sz="1200" dirty="0">
                 <a:solidFill>
@@ -5305,31 +4686,14 @@
               <a:t>Grade completa de empresas e despachantes licenciados utilizando o portal.
 </a:t>
             </a:r>
-            <a:pPr algn="l" indent="0" marL="0">
-              <a:buNone/>
-            </a:pPr>
             <a:r>
               <a:rPr lang="en-US" sz="1300" b="1" dirty="0">
                 <a:solidFill>
                   <a:srgbClr val="F59E0B"/>
                 </a:solidFill>
               </a:rPr>
-              <a:t>• </a:t>
-            </a:r>
-            <a:pPr algn="l" indent="0" marL="0">
-              <a:buNone/>
-            </a:pPr>
-            <a:r>
-              <a:rPr lang="en-US" sz="1300" b="1" dirty="0">
-                <a:solidFill>
-                  <a:srgbClr val="F59E0B"/>
-                </a:solidFill>
-              </a:rPr>
-              <a:t>Informações Unificadas: </a:t>
-            </a:r>
-            <a:pPr algn="l" indent="0" marL="0">
-              <a:buNone/>
-            </a:pPr>
+              <a:t>• Informações Unificadas: </a:t>
+            </a:r>
             <a:r>
               <a:rPr lang="en-US" sz="1200" dirty="0">
                 <a:solidFill>
@@ -5339,31 +4703,14 @@
               <a:t>CNPJ/CPF, e-mail de contato do responsável, telefone e número total de colaboradores.
 </a:t>
             </a:r>
-            <a:pPr algn="l" indent="0" marL="0">
-              <a:buNone/>
-            </a:pPr>
             <a:r>
               <a:rPr lang="en-US" sz="1300" b="1" dirty="0">
                 <a:solidFill>
                   <a:srgbClr val="F59E0B"/>
                 </a:solidFill>
               </a:rPr>
-              <a:t>• </a:t>
-            </a:r>
-            <a:pPr algn="l" indent="0" marL="0">
-              <a:buNone/>
-            </a:pPr>
-            <a:r>
-              <a:rPr lang="en-US" sz="1300" b="1" dirty="0">
-                <a:solidFill>
-                  <a:srgbClr val="F59E0B"/>
-                </a:solidFill>
-              </a:rPr>
-              <a:t>Foco em Performance: </a:t>
-            </a:r>
-            <a:pPr algn="l" indent="0" marL="0">
-              <a:buNone/>
-            </a:pPr>
+              <a:t>• Foco em Performance: </a:t>
+            </a:r>
             <a:r>
               <a:rPr lang="en-US" sz="1200" dirty="0">
                 <a:solidFill>
@@ -5404,14 +4751,14 @@
       </p:sp>
       <p:pic>
         <p:nvPicPr>
-          <p:cNvPr id="7" name="Image 0" descr="C:\Users\Guilherme Gomes\.gemini\antigravity\brain\392f0286-5b76-4ec8-ac1d-7de16ea0eefa\media__1780322622791.png">    </p:cNvPr>
+          <p:cNvPr id="7" name="Image 0" descr="C:\Users\Guilherme Gomes\.gemini\antigravity\brain\392f0286-5b76-4ec8-ac1d-7de16ea0eefa\media__1780322622791.png"/>
           <p:cNvPicPr>
             <a:picLocks noChangeAspect="1"/>
           </p:cNvPicPr>
           <p:nvPr/>
         </p:nvPicPr>
         <p:blipFill>
-          <a:blip r:embed="rId1"/>
+          <a:blip r:embed="rId3"/>
           <a:stretch>
             <a:fillRect/>
           </a:stretch>
@@ -5472,7 +4819,7 @@
           <a:bodyPr wrap="square" rtlCol="0" anchor="ctr"/>
           <a:lstStyle/>
           <a:p>
-            <a:pPr indent="0" marL="0">
+            <a:pPr marL="0" indent="0">
               <a:buNone/>
             </a:pPr>
             <a:r>
@@ -5503,6 +4850,7 @@
         <a:solidFill>
           <a:srgbClr val="0B0F19"/>
         </a:solidFill>
+        <a:effectLst/>
       </p:bgPr>
     </p:bg>
     <p:spTree>
@@ -5540,7 +4888,7 @@
           <a:bodyPr wrap="square" rtlCol="0" anchor="ctr"/>
           <a:lstStyle/>
           <a:p>
-            <a:pPr indent="0" marL="0">
+            <a:pPr marL="0" indent="0">
               <a:buNone/>
             </a:pPr>
             <a:r>
@@ -5576,7 +4924,7 @@
           <a:bodyPr wrap="square" rtlCol="0" anchor="ctr"/>
           <a:lstStyle/>
           <a:p>
-            <a:pPr indent="0" marL="0">
+            <a:pPr marL="0" indent="0">
               <a:buNone/>
             </a:pPr>
             <a:r>
@@ -5600,7 +4948,7 @@
         <p:spPr>
           <a:xfrm>
             <a:off x="457200" y="1097280"/>
-            <a:ext cx="11274552" cy="18288"/>
+            <a:ext cx="8563356" cy="68580"/>
           </a:xfrm>
           <a:prstGeom prst="rect">
             <a:avLst/>
@@ -5625,7 +4973,7 @@
         <p:spPr>
           <a:xfrm>
             <a:off x="457200" y="1463040"/>
-            <a:ext cx="5029200" cy="4389120"/>
+            <a:ext cx="2834641" cy="4389120"/>
           </a:xfrm>
           <a:prstGeom prst="rect">
             <a:avLst/>
@@ -5637,7 +4985,7 @@
           <a:bodyPr wrap="square" rtlCol="0" anchor="t"/>
           <a:lstStyle/>
           <a:p>
-            <a:pPr algn="l" indent="0" marL="0">
+            <a:pPr marL="0" indent="0" algn="l">
               <a:buNone/>
             </a:pPr>
             <a:r>
@@ -5646,22 +4994,8 @@
                   <a:srgbClr val="F59E0B"/>
                 </a:solidFill>
               </a:rPr>
-              <a:t>• </a:t>
-            </a:r>
-            <a:pPr algn="l" indent="0" marL="0">
-              <a:buNone/>
-            </a:pPr>
-            <a:r>
-              <a:rPr lang="en-US" sz="1300" b="1" dirty="0">
-                <a:solidFill>
-                  <a:srgbClr val="F59E0B"/>
-                </a:solidFill>
-              </a:rPr>
-              <a:t>Métricas Financeiras (MRR): </a:t>
-            </a:r>
-            <a:pPr algn="l" indent="0" marL="0">
-              <a:buNone/>
-            </a:pPr>
+              <a:t>• Métricas Financeiras (MRR): </a:t>
+            </a:r>
             <a:r>
               <a:rPr lang="en-US" sz="1200" dirty="0">
                 <a:solidFill>
@@ -5671,31 +5005,14 @@
               <a:t>Acompanhamento do Faturamento Mensal Recorrente com base nas assinaturas ativas.
 </a:t>
             </a:r>
-            <a:pPr algn="l" indent="0" marL="0">
-              <a:buNone/>
-            </a:pPr>
             <a:r>
               <a:rPr lang="en-US" sz="1300" b="1" dirty="0">
                 <a:solidFill>
                   <a:srgbClr val="F59E0B"/>
                 </a:solidFill>
               </a:rPr>
-              <a:t>• </a:t>
-            </a:r>
-            <a:pPr algn="l" indent="0" marL="0">
-              <a:buNone/>
-            </a:pPr>
-            <a:r>
-              <a:rPr lang="en-US" sz="1300" b="1" dirty="0">
-                <a:solidFill>
-                  <a:srgbClr val="F59E0B"/>
-                </a:solidFill>
-              </a:rPr>
-              <a:t>Calibres de Assinatura: </a:t>
-            </a:r>
-            <a:pPr algn="l" indent="0" marL="0">
-              <a:buNone/>
-            </a:pPr>
+              <a:t>• Calibres de Assinatura: </a:t>
+            </a:r>
             <a:r>
               <a:rPr lang="en-US" sz="1200" dirty="0">
                 <a:solidFill>
@@ -5705,31 +5022,14 @@
               <a:t>Planos de contratação comercial baseados em calibres (.22LR, .357mag e .308win) com limites.
 </a:t>
             </a:r>
-            <a:pPr algn="l" indent="0" marL="0">
-              <a:buNone/>
-            </a:pPr>
             <a:r>
               <a:rPr lang="en-US" sz="1300" b="1" dirty="0">
                 <a:solidFill>
                   <a:srgbClr val="F59E0B"/>
                 </a:solidFill>
               </a:rPr>
-              <a:t>• </a:t>
-            </a:r>
-            <a:pPr algn="l" indent="0" marL="0">
-              <a:buNone/>
-            </a:pPr>
-            <a:r>
-              <a:rPr lang="en-US" sz="1300" b="1" dirty="0">
-                <a:solidFill>
-                  <a:srgbClr val="F59E0B"/>
-                </a:solidFill>
-              </a:rPr>
-              <a:t>Exceções Comerciais: </a:t>
-            </a:r>
-            <a:pPr algn="l" indent="0" marL="0">
-              <a:buNone/>
-            </a:pPr>
+              <a:t>• Exceções Comerciais: </a:t>
+            </a:r>
             <a:r>
               <a:rPr lang="en-US" sz="1200" dirty="0">
                 <a:solidFill>
@@ -5751,7 +5051,7 @@
         </p:nvSpPr>
         <p:spPr>
           <a:xfrm>
-            <a:off x="5852160" y="1554480"/>
+            <a:off x="3168396" y="1394460"/>
             <a:ext cx="5852160" cy="3474720"/>
           </a:xfrm>
           <a:prstGeom prst="rect">
@@ -5768,30 +5068,6 @@
           </a:ln>
         </p:spPr>
       </p:sp>
-      <p:pic>
-        <p:nvPicPr>
-          <p:cNvPr id="7" name="Image 0" descr="C:\Users\Guilherme Gomes\.gemini\antigravity\brain\392f0286-5b76-4ec8-ac1d-7de16ea0eefa\media__1780331945976.png">    </p:cNvPr>
-          <p:cNvPicPr>
-            <a:picLocks noChangeAspect="1"/>
-          </p:cNvPicPr>
-          <p:nvPr/>
-        </p:nvPicPr>
-        <p:blipFill>
-          <a:blip r:embed="rId1"/>
-          <a:stretch>
-            <a:fillRect/>
-          </a:stretch>
-        </p:blipFill>
-        <p:spPr>
-          <a:xfrm>
-            <a:off x="5943600" y="1645920"/>
-            <a:ext cx="5669280" cy="3291840"/>
-          </a:xfrm>
-          <a:prstGeom prst="rect">
-            <a:avLst/>
-          </a:prstGeom>
-        </p:spPr>
-      </p:pic>
       <p:sp>
         <p:nvSpPr>
           <p:cNvPr id="8" name="Shape 5"/>
@@ -5838,7 +5114,7 @@
           <a:bodyPr wrap="square" rtlCol="0" anchor="ctr"/>
           <a:lstStyle/>
           <a:p>
-            <a:pPr indent="0" marL="0">
+            <a:pPr marL="0" indent="0">
               <a:buNone/>
             </a:pPr>
             <a:r>
@@ -5869,6 +5145,7 @@
         <a:solidFill>
           <a:srgbClr val="0B0F19"/>
         </a:solidFill>
+        <a:effectLst/>
       </p:bgPr>
     </p:bg>
     <p:spTree>
@@ -5906,7 +5183,7 @@
           <a:bodyPr wrap="square" rtlCol="0" anchor="ctr"/>
           <a:lstStyle/>
           <a:p>
-            <a:pPr indent="0" marL="0">
+            <a:pPr marL="0" indent="0">
               <a:buNone/>
             </a:pPr>
             <a:r>
@@ -5942,7 +5219,7 @@
           <a:bodyPr wrap="square" rtlCol="0" anchor="ctr"/>
           <a:lstStyle/>
           <a:p>
-            <a:pPr indent="0" marL="0">
+            <a:pPr marL="0" indent="0">
               <a:buNone/>
             </a:pPr>
             <a:r>
@@ -5959,13 +5236,141 @@
       </p:sp>
       <p:sp>
         <p:nvSpPr>
-          <p:cNvPr id="4" name="Shape 2"/>
-          <p:cNvSpPr/>
-          <p:nvPr/>
-        </p:nvSpPr>
-        <p:spPr>
-          <a:xfrm>
-            <a:off x="457200" y="1097280"/>
+          <p:cNvPr id="5" name="Text 3"/>
+          <p:cNvSpPr/>
+          <p:nvPr/>
+        </p:nvSpPr>
+        <p:spPr>
+          <a:xfrm>
+            <a:off x="457200" y="1463040"/>
+            <a:ext cx="5029200" cy="4389120"/>
+          </a:xfrm>
+          <a:prstGeom prst="rect">
+            <a:avLst/>
+          </a:prstGeom>
+          <a:noFill/>
+          <a:ln/>
+        </p:spPr>
+        <p:txBody>
+          <a:bodyPr wrap="square" rtlCol="0" anchor="t"/>
+          <a:lstStyle/>
+          <a:p>
+            <a:pPr marL="0" indent="0" algn="l">
+              <a:buNone/>
+            </a:pPr>
+            <a:r>
+              <a:rPr lang="en-US" sz="1300" b="1" dirty="0">
+                <a:solidFill>
+                  <a:srgbClr val="F59E0B"/>
+                </a:solidFill>
+              </a:rPr>
+              <a:t>• Avanço de Vencimento: </a:t>
+            </a:r>
+            <a:r>
+              <a:rPr lang="en-US" sz="1200" dirty="0">
+                <a:solidFill>
+                  <a:srgbClr val="CBD5E1"/>
+                </a:solidFill>
+              </a:rPr>
+              <a:t>Baixa de faturas com cálculo automático do próximo vencimento (+1, +6 ou +12 meses).
+</a:t>
+            </a:r>
+            <a:r>
+              <a:rPr lang="en-US" sz="1300" b="1" dirty="0">
+                <a:solidFill>
+                  <a:srgbClr val="F59E0B"/>
+                </a:solidFill>
+              </a:rPr>
+              <a:t>• Cálculo Inteligente: </a:t>
+            </a:r>
+            <a:r>
+              <a:rPr lang="en-US" sz="1200" dirty="0">
+                <a:solidFill>
+                  <a:srgbClr val="CBD5E1"/>
+                </a:solidFill>
+              </a:rPr>
+              <a:t>Se expirado, calcula a partir de hoje; se em dia, soma a partir da data de vencimento futura.
+</a:t>
+            </a:r>
+            <a:r>
+              <a:rPr lang="en-US" sz="1300" b="1" dirty="0">
+                <a:solidFill>
+                  <a:srgbClr val="F59E0B"/>
+                </a:solidFill>
+              </a:rPr>
+              <a:t>• Histórico Completo: </a:t>
+            </a:r>
+            <a:r>
+              <a:rPr lang="en-US" sz="1200" dirty="0">
+                <a:solidFill>
+                  <a:srgbClr val="CBD5E1"/>
+                </a:solidFill>
+              </a:rPr>
+              <a:t>Registro das faturas pagas informando o valor cobrado, meio de pagamento (Pix, boleto, etc.) e observações.
+</a:t>
+            </a:r>
+            <a:endParaRPr lang="en-US" sz="1300" dirty="0"/>
+          </a:p>
+        </p:txBody>
+      </p:sp>
+      <p:sp>
+        <p:nvSpPr>
+          <p:cNvPr id="6" name="Shape 4"/>
+          <p:cNvSpPr/>
+          <p:nvPr/>
+        </p:nvSpPr>
+        <p:spPr>
+          <a:xfrm>
+            <a:off x="5852160" y="1554480"/>
+            <a:ext cx="5852160" cy="3474720"/>
+          </a:xfrm>
+          <a:prstGeom prst="rect">
+            <a:avLst/>
+          </a:prstGeom>
+          <a:solidFill>
+            <a:srgbClr val="141A28"/>
+          </a:solidFill>
+          <a:ln w="12700">
+            <a:solidFill>
+              <a:srgbClr val="1E293B"/>
+            </a:solidFill>
+            <a:prstDash val="solid"/>
+          </a:ln>
+        </p:spPr>
+      </p:sp>
+      <p:pic>
+        <p:nvPicPr>
+          <p:cNvPr id="7" name="Image 0" descr="C:\Users\Guilherme Gomes\.gemini\antigravity\brain\392f0286-5b76-4ec8-ac1d-7de16ea0eefa\media__1780332277546.png"/>
+          <p:cNvPicPr>
+            <a:picLocks noChangeAspect="1"/>
+          </p:cNvPicPr>
+          <p:nvPr/>
+        </p:nvPicPr>
+        <p:blipFill>
+          <a:blip r:embed="rId3"/>
+          <a:stretch>
+            <a:fillRect/>
+          </a:stretch>
+        </p:blipFill>
+        <p:spPr>
+          <a:xfrm>
+            <a:off x="5943600" y="1645920"/>
+            <a:ext cx="5669280" cy="3291840"/>
+          </a:xfrm>
+          <a:prstGeom prst="rect">
+            <a:avLst/>
+          </a:prstGeom>
+        </p:spPr>
+      </p:pic>
+      <p:sp>
+        <p:nvSpPr>
+          <p:cNvPr id="8" name="Shape 5"/>
+          <p:cNvSpPr/>
+          <p:nvPr/>
+        </p:nvSpPr>
+        <p:spPr>
+          <a:xfrm>
+            <a:off x="457200" y="6126480"/>
             <a:ext cx="11274552" cy="18288"/>
           </a:xfrm>
           <a:prstGeom prst="rect">
@@ -5984,14 +5389,14 @@
       </p:sp>
       <p:sp>
         <p:nvSpPr>
-          <p:cNvPr id="5" name="Text 3"/>
-          <p:cNvSpPr/>
-          <p:nvPr/>
-        </p:nvSpPr>
-        <p:spPr>
-          <a:xfrm>
-            <a:off x="457200" y="1463040"/>
-            <a:ext cx="5029200" cy="4389120"/>
+          <p:cNvPr id="9" name="Text 6"/>
+          <p:cNvSpPr/>
+          <p:nvPr/>
+        </p:nvSpPr>
+        <p:spPr>
+          <a:xfrm>
+            <a:off x="457200" y="6217920"/>
+            <a:ext cx="7315200" cy="274320"/>
           </a:xfrm>
           <a:prstGeom prst="rect">
             <a:avLst/>
@@ -6000,174 +5405,40 @@
           <a:ln/>
         </p:spPr>
         <p:txBody>
-          <a:bodyPr wrap="square" rtlCol="0" anchor="t"/>
-          <a:lstStyle/>
-          <a:p>
-            <a:pPr algn="l" indent="0" marL="0">
+          <a:bodyPr wrap="square" rtlCol="0" anchor="ctr"/>
+          <a:lstStyle/>
+          <a:p>
+            <a:pPr marL="0" indent="0">
               <a:buNone/>
             </a:pPr>
             <a:r>
-              <a:rPr lang="en-US" sz="1300" b="1" dirty="0">
-                <a:solidFill>
-                  <a:srgbClr val="F59E0B"/>
-                </a:solidFill>
-              </a:rPr>
-              <a:t>• </a:t>
-            </a:r>
-            <a:pPr algn="l" indent="0" marL="0">
-              <a:buNone/>
-            </a:pPr>
-            <a:r>
-              <a:rPr lang="en-US" sz="1300" b="1" dirty="0">
-                <a:solidFill>
-                  <a:srgbClr val="F59E0B"/>
-                </a:solidFill>
-              </a:rPr>
-              <a:t>Avanço de Vencimento: </a:t>
-            </a:r>
-            <a:pPr algn="l" indent="0" marL="0">
-              <a:buNone/>
-            </a:pPr>
-            <a:r>
-              <a:rPr lang="en-US" sz="1200" dirty="0">
-                <a:solidFill>
-                  <a:srgbClr val="CBD5E1"/>
-                </a:solidFill>
-              </a:rPr>
-              <a:t>Baixa de faturas com cálculo automático do próximo vencimento (+1, +6 ou +12 meses).
-</a:t>
-            </a:r>
-            <a:pPr algn="l" indent="0" marL="0">
-              <a:buNone/>
-            </a:pPr>
-            <a:r>
-              <a:rPr lang="en-US" sz="1300" b="1" dirty="0">
-                <a:solidFill>
-                  <a:srgbClr val="F59E0B"/>
-                </a:solidFill>
-              </a:rPr>
-              <a:t>• </a:t>
-            </a:r>
-            <a:pPr algn="l" indent="0" marL="0">
-              <a:buNone/>
-            </a:pPr>
-            <a:r>
-              <a:rPr lang="en-US" sz="1300" b="1" dirty="0">
-                <a:solidFill>
-                  <a:srgbClr val="F59E0B"/>
-                </a:solidFill>
-              </a:rPr>
-              <a:t>Cálculo Inteligente: </a:t>
-            </a:r>
-            <a:pPr algn="l" indent="0" marL="0">
-              <a:buNone/>
-            </a:pPr>
-            <a:r>
-              <a:rPr lang="en-US" sz="1200" dirty="0">
-                <a:solidFill>
-                  <a:srgbClr val="CBD5E1"/>
-                </a:solidFill>
-              </a:rPr>
-              <a:t>Se expirado, calcula a partir de hoje; se em dia, soma a partir da data de vencimento futura.
-</a:t>
-            </a:r>
-            <a:pPr algn="l" indent="0" marL="0">
-              <a:buNone/>
-            </a:pPr>
-            <a:r>
-              <a:rPr lang="en-US" sz="1300" b="1" dirty="0">
-                <a:solidFill>
-                  <a:srgbClr val="F59E0B"/>
-                </a:solidFill>
-              </a:rPr>
-              <a:t>• </a:t>
-            </a:r>
-            <a:pPr algn="l" indent="0" marL="0">
-              <a:buNone/>
-            </a:pPr>
-            <a:r>
-              <a:rPr lang="en-US" sz="1300" b="1" dirty="0">
-                <a:solidFill>
-                  <a:srgbClr val="F59E0B"/>
-                </a:solidFill>
-              </a:rPr>
-              <a:t>Histórico Completo: </a:t>
-            </a:r>
-            <a:pPr algn="l" indent="0" marL="0">
-              <a:buNone/>
-            </a:pPr>
-            <a:r>
-              <a:rPr lang="en-US" sz="1200" dirty="0">
-                <a:solidFill>
-                  <a:srgbClr val="CBD5E1"/>
-                </a:solidFill>
-              </a:rPr>
-              <a:t>Registro das faturas pagas informando o valor cobrado, meio de pagamento (Pix, boleto, etc.) e observações.
-</a:t>
-            </a:r>
-            <a:endParaRPr lang="en-US" sz="1300" dirty="0"/>
-          </a:p>
-        </p:txBody>
-      </p:sp>
-      <p:sp>
-        <p:nvSpPr>
-          <p:cNvPr id="6" name="Shape 4"/>
-          <p:cNvSpPr/>
-          <p:nvPr/>
-        </p:nvSpPr>
-        <p:spPr>
-          <a:xfrm>
-            <a:off x="5852160" y="1554480"/>
-            <a:ext cx="5852160" cy="3474720"/>
-          </a:xfrm>
-          <a:prstGeom prst="rect">
-            <a:avLst/>
-          </a:prstGeom>
-          <a:solidFill>
-            <a:srgbClr val="141A28"/>
-          </a:solidFill>
-          <a:ln w="12700">
-            <a:solidFill>
-              <a:srgbClr val="1E293B"/>
-            </a:solidFill>
-            <a:prstDash val="solid"/>
-          </a:ln>
-        </p:spPr>
-      </p:sp>
-      <p:pic>
-        <p:nvPicPr>
-          <p:cNvPr id="7" name="Image 0" descr="C:\Users\Guilherme Gomes\.gemini\antigravity\brain\392f0286-5b76-4ec8-ac1d-7de16ea0eefa\media__1780332277546.png">    </p:cNvPr>
-          <p:cNvPicPr>
-            <a:picLocks noChangeAspect="1"/>
-          </p:cNvPicPr>
-          <p:nvPr/>
-        </p:nvPicPr>
-        <p:blipFill>
-          <a:blip r:embed="rId1"/>
-          <a:stretch>
-            <a:fillRect/>
-          </a:stretch>
-        </p:blipFill>
-        <p:spPr>
-          <a:xfrm>
-            <a:off x="5943600" y="1645920"/>
-            <a:ext cx="5669280" cy="3291840"/>
-          </a:xfrm>
-          <a:prstGeom prst="rect">
-            <a:avLst/>
-          </a:prstGeom>
-        </p:spPr>
-      </p:pic>
-      <p:sp>
-        <p:nvSpPr>
-          <p:cNvPr id="8" name="Shape 5"/>
-          <p:cNvSpPr/>
-          <p:nvPr/>
-        </p:nvSpPr>
-        <p:spPr>
-          <a:xfrm>
-            <a:off x="457200" y="6126480"/>
-            <a:ext cx="11274552" cy="18288"/>
+              <a:rPr lang="en-US" sz="900" dirty="0">
+                <a:solidFill>
+                  <a:srgbClr val="94A3B8"/>
+                </a:solidFill>
+              </a:rPr>
+              <a:t>Portal GCAC — Solução para Atiradores, Colecionadores, Caçadores e Despachantes</a:t>
+            </a:r>
+            <a:endParaRPr lang="en-US" sz="900" dirty="0"/>
+          </a:p>
+        </p:txBody>
+      </p:sp>
+      <p:sp>
+        <p:nvSpPr>
+          <p:cNvPr id="10" name="Shape 2">
+            <a:extLst>
+              <a:ext uri="{FF2B5EF4-FFF2-40B4-BE49-F238E27FC236}">
+                <a16:creationId xmlns:a16="http://schemas.microsoft.com/office/drawing/2014/main" id="{4C0D6419-878A-40E4-B746-40FB809BBCB9}"/>
+              </a:ext>
+            </a:extLst>
+          </p:cNvPr>
+          <p:cNvSpPr/>
+          <p:nvPr/>
+        </p:nvSpPr>
+        <p:spPr>
+          <a:xfrm>
+            <a:off x="457200" y="1097280"/>
+            <a:ext cx="8563356" cy="68580"/>
           </a:xfrm>
           <a:prstGeom prst="rect">
             <a:avLst/>
@@ -6182,42 +5453,6 @@
             <a:prstDash val="solid"/>
           </a:ln>
         </p:spPr>
-      </p:sp>
-      <p:sp>
-        <p:nvSpPr>
-          <p:cNvPr id="9" name="Text 6"/>
-          <p:cNvSpPr/>
-          <p:nvPr/>
-        </p:nvSpPr>
-        <p:spPr>
-          <a:xfrm>
-            <a:off x="457200" y="6217920"/>
-            <a:ext cx="7315200" cy="274320"/>
-          </a:xfrm>
-          <a:prstGeom prst="rect">
-            <a:avLst/>
-          </a:prstGeom>
-          <a:noFill/>
-          <a:ln/>
-        </p:spPr>
-        <p:txBody>
-          <a:bodyPr wrap="square" rtlCol="0" anchor="ctr"/>
-          <a:lstStyle/>
-          <a:p>
-            <a:pPr indent="0" marL="0">
-              <a:buNone/>
-            </a:pPr>
-            <a:r>
-              <a:rPr lang="en-US" sz="900" dirty="0">
-                <a:solidFill>
-                  <a:srgbClr val="94A3B8"/>
-                </a:solidFill>
-              </a:rPr>
-              <a:t>Portal GCAC — Solução para Atiradores, Colecionadores, Caçadores e Despachantes</a:t>
-            </a:r>
-            <a:endParaRPr lang="en-US" sz="900" dirty="0"/>
-          </a:p>
-        </p:txBody>
       </p:sp>
     </p:spTree>
   </p:cSld>
@@ -6235,6 +5470,7 @@
         <a:solidFill>
           <a:srgbClr val="0B0F19"/>
         </a:solidFill>
+        <a:effectLst/>
       </p:bgPr>
     </p:bg>
     <p:spTree>
@@ -6272,7 +5508,7 @@
           <a:bodyPr wrap="square" rtlCol="0" anchor="ctr"/>
           <a:lstStyle/>
           <a:p>
-            <a:pPr indent="0" marL="0">
+            <a:pPr marL="0" indent="0">
               <a:buNone/>
             </a:pPr>
             <a:r>
@@ -6308,7 +5544,7 @@
           <a:bodyPr wrap="square" rtlCol="0" anchor="ctr"/>
           <a:lstStyle/>
           <a:p>
-            <a:pPr indent="0" marL="0">
+            <a:pPr marL="0" indent="0">
               <a:buNone/>
             </a:pPr>
             <a:r>
@@ -6325,13 +5561,141 @@
       </p:sp>
       <p:sp>
         <p:nvSpPr>
-          <p:cNvPr id="4" name="Shape 2"/>
-          <p:cNvSpPr/>
-          <p:nvPr/>
-        </p:nvSpPr>
-        <p:spPr>
-          <a:xfrm>
-            <a:off x="457200" y="1097280"/>
+          <p:cNvPr id="5" name="Text 3"/>
+          <p:cNvSpPr/>
+          <p:nvPr/>
+        </p:nvSpPr>
+        <p:spPr>
+          <a:xfrm>
+            <a:off x="457200" y="1463040"/>
+            <a:ext cx="5029200" cy="4389120"/>
+          </a:xfrm>
+          <a:prstGeom prst="rect">
+            <a:avLst/>
+          </a:prstGeom>
+          <a:noFill/>
+          <a:ln/>
+        </p:spPr>
+        <p:txBody>
+          <a:bodyPr wrap="square" rtlCol="0" anchor="t"/>
+          <a:lstStyle/>
+          <a:p>
+            <a:pPr marL="0" indent="0" algn="l">
+              <a:buNone/>
+            </a:pPr>
+            <a:r>
+              <a:rPr lang="en-US" sz="1300" b="1" dirty="0">
+                <a:solidFill>
+                  <a:srgbClr val="F59E0B"/>
+                </a:solidFill>
+              </a:rPr>
+              <a:t>• Enforcamento Inteligente: </a:t>
+            </a:r>
+            <a:r>
+              <a:rPr lang="en-US" sz="1200" dirty="0">
+                <a:solidFill>
+                  <a:srgbClr val="CBD5E1"/>
+                </a:solidFill>
+              </a:rPr>
+              <a:t>Usuários de empresas suspensas ou vencidas são direcionados automaticamente para a tela de bloqueio.
+</a:t>
+            </a:r>
+            <a:r>
+              <a:rPr lang="en-US" sz="1300" b="1" dirty="0">
+                <a:solidFill>
+                  <a:srgbClr val="F59E0B"/>
+                </a:solidFill>
+              </a:rPr>
+              <a:t>• Aparência Glassmorphism: </a:t>
+            </a:r>
+            <a:r>
+              <a:rPr lang="en-US" sz="1200" dirty="0">
+                <a:solidFill>
+                  <a:srgbClr val="CBD5E1"/>
+                </a:solidFill>
+              </a:rPr>
+              <a:t>Design moderno com fundo desfocado informando o nome da empresa e o status da assinatura.
+</a:t>
+            </a:r>
+            <a:r>
+              <a:rPr lang="en-US" sz="1300" b="1" dirty="0">
+                <a:solidFill>
+                  <a:srgbClr val="F59E0B"/>
+                </a:solidFill>
+              </a:rPr>
+              <a:t>• Canal de Suporte Rápido: </a:t>
+            </a:r>
+            <a:r>
+              <a:rPr lang="en-US" sz="1200" dirty="0">
+                <a:solidFill>
+                  <a:srgbClr val="CBD5E1"/>
+                </a:solidFill>
+              </a:rPr>
+              <a:t>Botão de clique rápido que direciona o usuário para o WhatsApp comercial com mensagem pronta.
+</a:t>
+            </a:r>
+            <a:endParaRPr lang="en-US" sz="1300" dirty="0"/>
+          </a:p>
+        </p:txBody>
+      </p:sp>
+      <p:sp>
+        <p:nvSpPr>
+          <p:cNvPr id="6" name="Shape 4"/>
+          <p:cNvSpPr/>
+          <p:nvPr/>
+        </p:nvSpPr>
+        <p:spPr>
+          <a:xfrm>
+            <a:off x="5852160" y="1554480"/>
+            <a:ext cx="5852160" cy="3474720"/>
+          </a:xfrm>
+          <a:prstGeom prst="rect">
+            <a:avLst/>
+          </a:prstGeom>
+          <a:solidFill>
+            <a:srgbClr val="141A28"/>
+          </a:solidFill>
+          <a:ln w="12700">
+            <a:solidFill>
+              <a:srgbClr val="1E293B"/>
+            </a:solidFill>
+            <a:prstDash val="solid"/>
+          </a:ln>
+        </p:spPr>
+      </p:sp>
+      <p:pic>
+        <p:nvPicPr>
+          <p:cNvPr id="7" name="Image 0" descr="C:\Users\Guilherme Gomes\.gemini\antigravity\brain\392f0286-5b76-4ec8-ac1d-7de16ea0eefa\media__1780333899416.png"/>
+          <p:cNvPicPr>
+            <a:picLocks noChangeAspect="1"/>
+          </p:cNvPicPr>
+          <p:nvPr/>
+        </p:nvPicPr>
+        <p:blipFill>
+          <a:blip r:embed="rId3"/>
+          <a:stretch>
+            <a:fillRect/>
+          </a:stretch>
+        </p:blipFill>
+        <p:spPr>
+          <a:xfrm>
+            <a:off x="5943600" y="1645920"/>
+            <a:ext cx="5669280" cy="3291840"/>
+          </a:xfrm>
+          <a:prstGeom prst="rect">
+            <a:avLst/>
+          </a:prstGeom>
+        </p:spPr>
+      </p:pic>
+      <p:sp>
+        <p:nvSpPr>
+          <p:cNvPr id="8" name="Shape 5"/>
+          <p:cNvSpPr/>
+          <p:nvPr/>
+        </p:nvSpPr>
+        <p:spPr>
+          <a:xfrm>
+            <a:off x="457200" y="6126480"/>
             <a:ext cx="11274552" cy="18288"/>
           </a:xfrm>
           <a:prstGeom prst="rect">
@@ -6350,14 +5714,14 @@
       </p:sp>
       <p:sp>
         <p:nvSpPr>
-          <p:cNvPr id="5" name="Text 3"/>
-          <p:cNvSpPr/>
-          <p:nvPr/>
-        </p:nvSpPr>
-        <p:spPr>
-          <a:xfrm>
-            <a:off x="457200" y="1463040"/>
-            <a:ext cx="5029200" cy="4389120"/>
+          <p:cNvPr id="9" name="Text 6"/>
+          <p:cNvSpPr/>
+          <p:nvPr/>
+        </p:nvSpPr>
+        <p:spPr>
+          <a:xfrm>
+            <a:off x="457200" y="6217920"/>
+            <a:ext cx="7315200" cy="274320"/>
           </a:xfrm>
           <a:prstGeom prst="rect">
             <a:avLst/>
@@ -6366,174 +5730,40 @@
           <a:ln/>
         </p:spPr>
         <p:txBody>
-          <a:bodyPr wrap="square" rtlCol="0" anchor="t"/>
-          <a:lstStyle/>
-          <a:p>
-            <a:pPr algn="l" indent="0" marL="0">
+          <a:bodyPr wrap="square" rtlCol="0" anchor="ctr"/>
+          <a:lstStyle/>
+          <a:p>
+            <a:pPr marL="0" indent="0">
               <a:buNone/>
             </a:pPr>
             <a:r>
-              <a:rPr lang="en-US" sz="1300" b="1" dirty="0">
-                <a:solidFill>
-                  <a:srgbClr val="F59E0B"/>
-                </a:solidFill>
-              </a:rPr>
-              <a:t>• </a:t>
-            </a:r>
-            <a:pPr algn="l" indent="0" marL="0">
-              <a:buNone/>
-            </a:pPr>
-            <a:r>
-              <a:rPr lang="en-US" sz="1300" b="1" dirty="0">
-                <a:solidFill>
-                  <a:srgbClr val="F59E0B"/>
-                </a:solidFill>
-              </a:rPr>
-              <a:t>Enforcamento Inteligente: </a:t>
-            </a:r>
-            <a:pPr algn="l" indent="0" marL="0">
-              <a:buNone/>
-            </a:pPr>
-            <a:r>
-              <a:rPr lang="en-US" sz="1200" dirty="0">
-                <a:solidFill>
-                  <a:srgbClr val="CBD5E1"/>
-                </a:solidFill>
-              </a:rPr>
-              <a:t>Usuários de empresas suspensas ou vencidas são direcionados automaticamente para a tela de bloqueio.
-</a:t>
-            </a:r>
-            <a:pPr algn="l" indent="0" marL="0">
-              <a:buNone/>
-            </a:pPr>
-            <a:r>
-              <a:rPr lang="en-US" sz="1300" b="1" dirty="0">
-                <a:solidFill>
-                  <a:srgbClr val="F59E0B"/>
-                </a:solidFill>
-              </a:rPr>
-              <a:t>• </a:t>
-            </a:r>
-            <a:pPr algn="l" indent="0" marL="0">
-              <a:buNone/>
-            </a:pPr>
-            <a:r>
-              <a:rPr lang="en-US" sz="1300" b="1" dirty="0">
-                <a:solidFill>
-                  <a:srgbClr val="F59E0B"/>
-                </a:solidFill>
-              </a:rPr>
-              <a:t>Aparência Glassmorphism: </a:t>
-            </a:r>
-            <a:pPr algn="l" indent="0" marL="0">
-              <a:buNone/>
-            </a:pPr>
-            <a:r>
-              <a:rPr lang="en-US" sz="1200" dirty="0">
-                <a:solidFill>
-                  <a:srgbClr val="CBD5E1"/>
-                </a:solidFill>
-              </a:rPr>
-              <a:t>Design moderno com fundo desfocado informando o nome da empresa e o status da assinatura.
-</a:t>
-            </a:r>
-            <a:pPr algn="l" indent="0" marL="0">
-              <a:buNone/>
-            </a:pPr>
-            <a:r>
-              <a:rPr lang="en-US" sz="1300" b="1" dirty="0">
-                <a:solidFill>
-                  <a:srgbClr val="F59E0B"/>
-                </a:solidFill>
-              </a:rPr>
-              <a:t>• </a:t>
-            </a:r>
-            <a:pPr algn="l" indent="0" marL="0">
-              <a:buNone/>
-            </a:pPr>
-            <a:r>
-              <a:rPr lang="en-US" sz="1300" b="1" dirty="0">
-                <a:solidFill>
-                  <a:srgbClr val="F59E0B"/>
-                </a:solidFill>
-              </a:rPr>
-              <a:t>Canal de Suporte Rápido: </a:t>
-            </a:r>
-            <a:pPr algn="l" indent="0" marL="0">
-              <a:buNone/>
-            </a:pPr>
-            <a:r>
-              <a:rPr lang="en-US" sz="1200" dirty="0">
-                <a:solidFill>
-                  <a:srgbClr val="CBD5E1"/>
-                </a:solidFill>
-              </a:rPr>
-              <a:t>Botão de clique rápido que direciona o usuário para o WhatsApp comercial com mensagem pronta.
-</a:t>
-            </a:r>
-            <a:endParaRPr lang="en-US" sz="1300" dirty="0"/>
-          </a:p>
-        </p:txBody>
-      </p:sp>
-      <p:sp>
-        <p:nvSpPr>
-          <p:cNvPr id="6" name="Shape 4"/>
-          <p:cNvSpPr/>
-          <p:nvPr/>
-        </p:nvSpPr>
-        <p:spPr>
-          <a:xfrm>
-            <a:off x="5852160" y="1554480"/>
-            <a:ext cx="5852160" cy="3474720"/>
-          </a:xfrm>
-          <a:prstGeom prst="rect">
-            <a:avLst/>
-          </a:prstGeom>
-          <a:solidFill>
-            <a:srgbClr val="141A28"/>
-          </a:solidFill>
-          <a:ln w="12700">
-            <a:solidFill>
-              <a:srgbClr val="1E293B"/>
-            </a:solidFill>
-            <a:prstDash val="solid"/>
-          </a:ln>
-        </p:spPr>
-      </p:sp>
-      <p:pic>
-        <p:nvPicPr>
-          <p:cNvPr id="7" name="Image 0" descr="C:\Users\Guilherme Gomes\.gemini\antigravity\brain\392f0286-5b76-4ec8-ac1d-7de16ea0eefa\media__1780333899416.png">    </p:cNvPr>
-          <p:cNvPicPr>
-            <a:picLocks noChangeAspect="1"/>
-          </p:cNvPicPr>
-          <p:nvPr/>
-        </p:nvPicPr>
-        <p:blipFill>
-          <a:blip r:embed="rId1"/>
-          <a:stretch>
-            <a:fillRect/>
-          </a:stretch>
-        </p:blipFill>
-        <p:spPr>
-          <a:xfrm>
-            <a:off x="5943600" y="1645920"/>
-            <a:ext cx="5669280" cy="3291840"/>
-          </a:xfrm>
-          <a:prstGeom prst="rect">
-            <a:avLst/>
-          </a:prstGeom>
-        </p:spPr>
-      </p:pic>
-      <p:sp>
-        <p:nvSpPr>
-          <p:cNvPr id="8" name="Shape 5"/>
-          <p:cNvSpPr/>
-          <p:nvPr/>
-        </p:nvSpPr>
-        <p:spPr>
-          <a:xfrm>
-            <a:off x="457200" y="6126480"/>
-            <a:ext cx="11274552" cy="18288"/>
+              <a:rPr lang="en-US" sz="900" dirty="0">
+                <a:solidFill>
+                  <a:srgbClr val="94A3B8"/>
+                </a:solidFill>
+              </a:rPr>
+              <a:t>Portal GCAC — Solução para Atiradores, Colecionadores, Caçadores e Despachantes</a:t>
+            </a:r>
+            <a:endParaRPr lang="en-US" sz="900" dirty="0"/>
+          </a:p>
+        </p:txBody>
+      </p:sp>
+      <p:sp>
+        <p:nvSpPr>
+          <p:cNvPr id="11" name="Shape 2">
+            <a:extLst>
+              <a:ext uri="{FF2B5EF4-FFF2-40B4-BE49-F238E27FC236}">
+                <a16:creationId xmlns:a16="http://schemas.microsoft.com/office/drawing/2014/main" id="{B1D08A82-1066-4560-A6C1-52C1FAF213E6}"/>
+              </a:ext>
+            </a:extLst>
+          </p:cNvPr>
+          <p:cNvSpPr/>
+          <p:nvPr/>
+        </p:nvSpPr>
+        <p:spPr>
+          <a:xfrm>
+            <a:off x="457200" y="1097280"/>
+            <a:ext cx="8563356" cy="68580"/>
           </a:xfrm>
           <a:prstGeom prst="rect">
             <a:avLst/>
@@ -6548,42 +5778,6 @@
             <a:prstDash val="solid"/>
           </a:ln>
         </p:spPr>
-      </p:sp>
-      <p:sp>
-        <p:nvSpPr>
-          <p:cNvPr id="9" name="Text 6"/>
-          <p:cNvSpPr/>
-          <p:nvPr/>
-        </p:nvSpPr>
-        <p:spPr>
-          <a:xfrm>
-            <a:off x="457200" y="6217920"/>
-            <a:ext cx="7315200" cy="274320"/>
-          </a:xfrm>
-          <a:prstGeom prst="rect">
-            <a:avLst/>
-          </a:prstGeom>
-          <a:noFill/>
-          <a:ln/>
-        </p:spPr>
-        <p:txBody>
-          <a:bodyPr wrap="square" rtlCol="0" anchor="ctr"/>
-          <a:lstStyle/>
-          <a:p>
-            <a:pPr indent="0" marL="0">
-              <a:buNone/>
-            </a:pPr>
-            <a:r>
-              <a:rPr lang="en-US" sz="900" dirty="0">
-                <a:solidFill>
-                  <a:srgbClr val="94A3B8"/>
-                </a:solidFill>
-              </a:rPr>
-              <a:t>Portal GCAC — Solução para Atiradores, Colecionadores, Caçadores e Despachantes</a:t>
-            </a:r>
-            <a:endParaRPr lang="en-US" sz="900" dirty="0"/>
-          </a:p>
-        </p:txBody>
       </p:sp>
     </p:spTree>
   </p:cSld>
@@ -6601,6 +5795,7 @@
         <a:solidFill>
           <a:srgbClr val="0B0F19"/>
         </a:solidFill>
+        <a:effectLst/>
       </p:bgPr>
     </p:bg>
     <p:spTree>
@@ -6638,7 +5833,7 @@
           <a:bodyPr wrap="square" rtlCol="0" anchor="ctr"/>
           <a:lstStyle/>
           <a:p>
-            <a:pPr indent="0" marL="0">
+            <a:pPr marL="0" indent="0">
               <a:buNone/>
             </a:pPr>
             <a:r>
@@ -6674,7 +5869,7 @@
           <a:bodyPr wrap="square" rtlCol="0" anchor="ctr"/>
           <a:lstStyle/>
           <a:p>
-            <a:pPr indent="0" marL="0">
+            <a:pPr marL="0" indent="0">
               <a:buNone/>
             </a:pPr>
             <a:r>
@@ -6691,13 +5886,141 @@
       </p:sp>
       <p:sp>
         <p:nvSpPr>
-          <p:cNvPr id="4" name="Shape 2"/>
-          <p:cNvSpPr/>
-          <p:nvPr/>
-        </p:nvSpPr>
-        <p:spPr>
-          <a:xfrm>
-            <a:off x="457200" y="1097280"/>
+          <p:cNvPr id="5" name="Text 3"/>
+          <p:cNvSpPr/>
+          <p:nvPr/>
+        </p:nvSpPr>
+        <p:spPr>
+          <a:xfrm>
+            <a:off x="457200" y="1463040"/>
+            <a:ext cx="5029200" cy="4389120"/>
+          </a:xfrm>
+          <a:prstGeom prst="rect">
+            <a:avLst/>
+          </a:prstGeom>
+          <a:noFill/>
+          <a:ln/>
+        </p:spPr>
+        <p:txBody>
+          <a:bodyPr wrap="square" rtlCol="0" anchor="t"/>
+          <a:lstStyle/>
+          <a:p>
+            <a:pPr marL="0" indent="0" algn="l">
+              <a:buNone/>
+            </a:pPr>
+            <a:r>
+              <a:rPr lang="en-US" sz="1300" b="1" dirty="0">
+                <a:solidFill>
+                  <a:srgbClr val="F59E0B"/>
+                </a:solidFill>
+              </a:rPr>
+              <a:t>• Banner Informativo: </a:t>
+            </a:r>
+            <a:r>
+              <a:rPr lang="en-US" sz="1200" dirty="0">
+                <a:solidFill>
+                  <a:srgbClr val="CBD5E1"/>
+                </a:solidFill>
+              </a:rPr>
+              <a:t>Aviso visual no topo do cabeçalho da plataforma exibido automaticamente a partir de 5 dias antes do vencimento.
+</a:t>
+            </a:r>
+            <a:r>
+              <a:rPr lang="en-US" sz="1300" b="1" dirty="0">
+                <a:solidFill>
+                  <a:srgbClr val="F59E0B"/>
+                </a:solidFill>
+              </a:rPr>
+              <a:t>• Luz de Alerta Pulsante: </a:t>
+            </a:r>
+            <a:r>
+              <a:rPr lang="en-US" sz="1200" dirty="0">
+                <a:solidFill>
+                  <a:srgbClr val="CBD5E1"/>
+                </a:solidFill>
+              </a:rPr>
+              <a:t>Ícone animado (pinging beacon) para chamar a atenção sobre a proximidade do prazo de renovação.
+</a:t>
+            </a:r>
+            <a:r>
+              <a:rPr lang="en-US" sz="1300" b="1" dirty="0">
+                <a:solidFill>
+                  <a:srgbClr val="F59E0B"/>
+                </a:solidFill>
+              </a:rPr>
+              <a:t>• Sem Interrupções: </a:t>
+            </a:r>
+            <a:r>
+              <a:rPr lang="en-US" sz="1200" dirty="0">
+                <a:solidFill>
+                  <a:srgbClr val="CBD5E1"/>
+                </a:solidFill>
+              </a:rPr>
+              <a:t>O alerta avisa sem impedir o uso operacional do portal, permitindo o pagamento tranquilo.
+</a:t>
+            </a:r>
+            <a:endParaRPr lang="en-US" sz="1300" dirty="0"/>
+          </a:p>
+        </p:txBody>
+      </p:sp>
+      <p:sp>
+        <p:nvSpPr>
+          <p:cNvPr id="6" name="Shape 4"/>
+          <p:cNvSpPr/>
+          <p:nvPr/>
+        </p:nvSpPr>
+        <p:spPr>
+          <a:xfrm>
+            <a:off x="5852160" y="1554480"/>
+            <a:ext cx="5852160" cy="3474720"/>
+          </a:xfrm>
+          <a:prstGeom prst="rect">
+            <a:avLst/>
+          </a:prstGeom>
+          <a:solidFill>
+            <a:srgbClr val="141A28"/>
+          </a:solidFill>
+          <a:ln w="12700">
+            <a:solidFill>
+              <a:srgbClr val="1E293B"/>
+            </a:solidFill>
+            <a:prstDash val="solid"/>
+          </a:ln>
+        </p:spPr>
+      </p:sp>
+      <p:pic>
+        <p:nvPicPr>
+          <p:cNvPr id="7" name="Image 0" descr="C:\Users\Guilherme Gomes\.gemini\antigravity\brain\392f0286-5b76-4ec8-ac1d-7de16ea0eefa\media__1780335349624.png"/>
+          <p:cNvPicPr>
+            <a:picLocks noChangeAspect="1"/>
+          </p:cNvPicPr>
+          <p:nvPr/>
+        </p:nvPicPr>
+        <p:blipFill>
+          <a:blip r:embed="rId3"/>
+          <a:stretch>
+            <a:fillRect/>
+          </a:stretch>
+        </p:blipFill>
+        <p:spPr>
+          <a:xfrm>
+            <a:off x="5943600" y="1645920"/>
+            <a:ext cx="5669280" cy="3291840"/>
+          </a:xfrm>
+          <a:prstGeom prst="rect">
+            <a:avLst/>
+          </a:prstGeom>
+        </p:spPr>
+      </p:pic>
+      <p:sp>
+        <p:nvSpPr>
+          <p:cNvPr id="8" name="Shape 5"/>
+          <p:cNvSpPr/>
+          <p:nvPr/>
+        </p:nvSpPr>
+        <p:spPr>
+          <a:xfrm>
+            <a:off x="457200" y="6126480"/>
             <a:ext cx="11274552" cy="18288"/>
           </a:xfrm>
           <a:prstGeom prst="rect">
@@ -6716,14 +6039,14 @@
       </p:sp>
       <p:sp>
         <p:nvSpPr>
-          <p:cNvPr id="5" name="Text 3"/>
-          <p:cNvSpPr/>
-          <p:nvPr/>
-        </p:nvSpPr>
-        <p:spPr>
-          <a:xfrm>
-            <a:off x="457200" y="1463040"/>
-            <a:ext cx="5029200" cy="4389120"/>
+          <p:cNvPr id="9" name="Text 6"/>
+          <p:cNvSpPr/>
+          <p:nvPr/>
+        </p:nvSpPr>
+        <p:spPr>
+          <a:xfrm>
+            <a:off x="457200" y="6217920"/>
+            <a:ext cx="7315200" cy="274320"/>
           </a:xfrm>
           <a:prstGeom prst="rect">
             <a:avLst/>
@@ -6732,174 +6055,40 @@
           <a:ln/>
         </p:spPr>
         <p:txBody>
-          <a:bodyPr wrap="square" rtlCol="0" anchor="t"/>
-          <a:lstStyle/>
-          <a:p>
-            <a:pPr algn="l" indent="0" marL="0">
+          <a:bodyPr wrap="square" rtlCol="0" anchor="ctr"/>
+          <a:lstStyle/>
+          <a:p>
+            <a:pPr marL="0" indent="0">
               <a:buNone/>
             </a:pPr>
             <a:r>
-              <a:rPr lang="en-US" sz="1300" b="1" dirty="0">
-                <a:solidFill>
-                  <a:srgbClr val="F59E0B"/>
-                </a:solidFill>
-              </a:rPr>
-              <a:t>• </a:t>
-            </a:r>
-            <a:pPr algn="l" indent="0" marL="0">
-              <a:buNone/>
-            </a:pPr>
-            <a:r>
-              <a:rPr lang="en-US" sz="1300" b="1" dirty="0">
-                <a:solidFill>
-                  <a:srgbClr val="F59E0B"/>
-                </a:solidFill>
-              </a:rPr>
-              <a:t>Banner Informativo: </a:t>
-            </a:r>
-            <a:pPr algn="l" indent="0" marL="0">
-              <a:buNone/>
-            </a:pPr>
-            <a:r>
-              <a:rPr lang="en-US" sz="1200" dirty="0">
-                <a:solidFill>
-                  <a:srgbClr val="CBD5E1"/>
-                </a:solidFill>
-              </a:rPr>
-              <a:t>Aviso visual no topo do cabeçalho da plataforma exibido automaticamente a partir de 5 dias antes do vencimento.
-</a:t>
-            </a:r>
-            <a:pPr algn="l" indent="0" marL="0">
-              <a:buNone/>
-            </a:pPr>
-            <a:r>
-              <a:rPr lang="en-US" sz="1300" b="1" dirty="0">
-                <a:solidFill>
-                  <a:srgbClr val="F59E0B"/>
-                </a:solidFill>
-              </a:rPr>
-              <a:t>• </a:t>
-            </a:r>
-            <a:pPr algn="l" indent="0" marL="0">
-              <a:buNone/>
-            </a:pPr>
-            <a:r>
-              <a:rPr lang="en-US" sz="1300" b="1" dirty="0">
-                <a:solidFill>
-                  <a:srgbClr val="F59E0B"/>
-                </a:solidFill>
-              </a:rPr>
-              <a:t>Luz de Alerta Pulsante: </a:t>
-            </a:r>
-            <a:pPr algn="l" indent="0" marL="0">
-              <a:buNone/>
-            </a:pPr>
-            <a:r>
-              <a:rPr lang="en-US" sz="1200" dirty="0">
-                <a:solidFill>
-                  <a:srgbClr val="CBD5E1"/>
-                </a:solidFill>
-              </a:rPr>
-              <a:t>Ícone animado (pinging beacon) para chamar a atenção sobre a proximidade do prazo de renovação.
-</a:t>
-            </a:r>
-            <a:pPr algn="l" indent="0" marL="0">
-              <a:buNone/>
-            </a:pPr>
-            <a:r>
-              <a:rPr lang="en-US" sz="1300" b="1" dirty="0">
-                <a:solidFill>
-                  <a:srgbClr val="F59E0B"/>
-                </a:solidFill>
-              </a:rPr>
-              <a:t>• </a:t>
-            </a:r>
-            <a:pPr algn="l" indent="0" marL="0">
-              <a:buNone/>
-            </a:pPr>
-            <a:r>
-              <a:rPr lang="en-US" sz="1300" b="1" dirty="0">
-                <a:solidFill>
-                  <a:srgbClr val="F59E0B"/>
-                </a:solidFill>
-              </a:rPr>
-              <a:t>Sem Interrupções: </a:t>
-            </a:r>
-            <a:pPr algn="l" indent="0" marL="0">
-              <a:buNone/>
-            </a:pPr>
-            <a:r>
-              <a:rPr lang="en-US" sz="1200" dirty="0">
-                <a:solidFill>
-                  <a:srgbClr val="CBD5E1"/>
-                </a:solidFill>
-              </a:rPr>
-              <a:t>O alerta avisa sem impedir o uso operacional do portal, permitindo o pagamento tranquilo.
-</a:t>
-            </a:r>
-            <a:endParaRPr lang="en-US" sz="1300" dirty="0"/>
-          </a:p>
-        </p:txBody>
-      </p:sp>
-      <p:sp>
-        <p:nvSpPr>
-          <p:cNvPr id="6" name="Shape 4"/>
-          <p:cNvSpPr/>
-          <p:nvPr/>
-        </p:nvSpPr>
-        <p:spPr>
-          <a:xfrm>
-            <a:off x="5852160" y="1554480"/>
-            <a:ext cx="5852160" cy="3474720"/>
-          </a:xfrm>
-          <a:prstGeom prst="rect">
-            <a:avLst/>
-          </a:prstGeom>
-          <a:solidFill>
-            <a:srgbClr val="141A28"/>
-          </a:solidFill>
-          <a:ln w="12700">
-            <a:solidFill>
-              <a:srgbClr val="1E293B"/>
-            </a:solidFill>
-            <a:prstDash val="solid"/>
-          </a:ln>
-        </p:spPr>
-      </p:sp>
-      <p:pic>
-        <p:nvPicPr>
-          <p:cNvPr id="7" name="Image 0" descr="C:\Users\Guilherme Gomes\.gemini\antigravity\brain\392f0286-5b76-4ec8-ac1d-7de16ea0eefa\media__1780335349624.png">    </p:cNvPr>
-          <p:cNvPicPr>
-            <a:picLocks noChangeAspect="1"/>
-          </p:cNvPicPr>
-          <p:nvPr/>
-        </p:nvPicPr>
-        <p:blipFill>
-          <a:blip r:embed="rId1"/>
-          <a:stretch>
-            <a:fillRect/>
-          </a:stretch>
-        </p:blipFill>
-        <p:spPr>
-          <a:xfrm>
-            <a:off x="5943600" y="1645920"/>
-            <a:ext cx="5669280" cy="3291840"/>
-          </a:xfrm>
-          <a:prstGeom prst="rect">
-            <a:avLst/>
-          </a:prstGeom>
-        </p:spPr>
-      </p:pic>
-      <p:sp>
-        <p:nvSpPr>
-          <p:cNvPr id="8" name="Shape 5"/>
-          <p:cNvSpPr/>
-          <p:nvPr/>
-        </p:nvSpPr>
-        <p:spPr>
-          <a:xfrm>
-            <a:off x="457200" y="6126480"/>
-            <a:ext cx="11274552" cy="18288"/>
+              <a:rPr lang="en-US" sz="900" dirty="0">
+                <a:solidFill>
+                  <a:srgbClr val="94A3B8"/>
+                </a:solidFill>
+              </a:rPr>
+              <a:t>Portal GCAC — Solução para Atiradores, Colecionadores, Caçadores e Despachantes</a:t>
+            </a:r>
+            <a:endParaRPr lang="en-US" sz="900" dirty="0"/>
+          </a:p>
+        </p:txBody>
+      </p:sp>
+      <p:sp>
+        <p:nvSpPr>
+          <p:cNvPr id="10" name="Shape 2">
+            <a:extLst>
+              <a:ext uri="{FF2B5EF4-FFF2-40B4-BE49-F238E27FC236}">
+                <a16:creationId xmlns:a16="http://schemas.microsoft.com/office/drawing/2014/main" id="{A5D5F808-D77C-4505-A335-8B7A9564AF08}"/>
+              </a:ext>
+            </a:extLst>
+          </p:cNvPr>
+          <p:cNvSpPr/>
+          <p:nvPr/>
+        </p:nvSpPr>
+        <p:spPr>
+          <a:xfrm>
+            <a:off x="457200" y="1097280"/>
+            <a:ext cx="8563356" cy="68580"/>
           </a:xfrm>
           <a:prstGeom prst="rect">
             <a:avLst/>
@@ -6914,42 +6103,6 @@
             <a:prstDash val="solid"/>
           </a:ln>
         </p:spPr>
-      </p:sp>
-      <p:sp>
-        <p:nvSpPr>
-          <p:cNvPr id="9" name="Text 6"/>
-          <p:cNvSpPr/>
-          <p:nvPr/>
-        </p:nvSpPr>
-        <p:spPr>
-          <a:xfrm>
-            <a:off x="457200" y="6217920"/>
-            <a:ext cx="7315200" cy="274320"/>
-          </a:xfrm>
-          <a:prstGeom prst="rect">
-            <a:avLst/>
-          </a:prstGeom>
-          <a:noFill/>
-          <a:ln/>
-        </p:spPr>
-        <p:txBody>
-          <a:bodyPr wrap="square" rtlCol="0" anchor="ctr"/>
-          <a:lstStyle/>
-          <a:p>
-            <a:pPr indent="0" marL="0">
-              <a:buNone/>
-            </a:pPr>
-            <a:r>
-              <a:rPr lang="en-US" sz="900" dirty="0">
-                <a:solidFill>
-                  <a:srgbClr val="94A3B8"/>
-                </a:solidFill>
-              </a:rPr>
-              <a:t>Portal GCAC — Solução para Atiradores, Colecionadores, Caçadores e Despachantes</a:t>
-            </a:r>
-            <a:endParaRPr lang="en-US" sz="900" dirty="0"/>
-          </a:p>
-        </p:txBody>
       </p:sp>
     </p:spTree>
   </p:cSld>
@@ -6967,6 +6120,7 @@
         <a:solidFill>
           <a:srgbClr val="0B0F19"/>
         </a:solidFill>
+        <a:effectLst/>
       </p:bgPr>
     </p:bg>
     <p:spTree>
@@ -7004,7 +6158,7 @@
           <a:bodyPr wrap="square" rtlCol="0" anchor="ctr"/>
           <a:lstStyle/>
           <a:p>
-            <a:pPr indent="0" marL="0">
+            <a:pPr marL="0" indent="0">
               <a:buNone/>
             </a:pPr>
             <a:r>
@@ -7040,7 +6194,7 @@
           <a:bodyPr wrap="square" rtlCol="0" anchor="ctr"/>
           <a:lstStyle/>
           <a:p>
-            <a:pPr indent="0" marL="0">
+            <a:pPr marL="0" indent="0">
               <a:buNone/>
             </a:pPr>
             <a:r>
@@ -7057,13 +6211,141 @@
       </p:sp>
       <p:sp>
         <p:nvSpPr>
-          <p:cNvPr id="4" name="Shape 2"/>
-          <p:cNvSpPr/>
-          <p:nvPr/>
-        </p:nvSpPr>
-        <p:spPr>
-          <a:xfrm>
-            <a:off x="457200" y="1097280"/>
+          <p:cNvPr id="5" name="Text 3"/>
+          <p:cNvSpPr/>
+          <p:nvPr/>
+        </p:nvSpPr>
+        <p:spPr>
+          <a:xfrm>
+            <a:off x="457200" y="1463040"/>
+            <a:ext cx="5029200" cy="4389120"/>
+          </a:xfrm>
+          <a:prstGeom prst="rect">
+            <a:avLst/>
+          </a:prstGeom>
+          <a:noFill/>
+          <a:ln/>
+        </p:spPr>
+        <p:txBody>
+          <a:bodyPr wrap="square" rtlCol="0" anchor="t"/>
+          <a:lstStyle/>
+          <a:p>
+            <a:pPr marL="0" indent="0" algn="l">
+              <a:buNone/>
+            </a:pPr>
+            <a:r>
+              <a:rPr lang="en-US" sz="1300" b="1" dirty="0">
+                <a:solidFill>
+                  <a:srgbClr val="F59E0B"/>
+                </a:solidFill>
+              </a:rPr>
+              <a:t>• Limitação por Calibre: </a:t>
+            </a:r>
+            <a:r>
+              <a:rPr lang="en-US" sz="1200" dirty="0">
+                <a:solidFill>
+                  <a:srgbClr val="CBD5E1"/>
+                </a:solidFill>
+              </a:rPr>
+              <a:t>O sistema valida a quantidade de colaboradores ativos cadastrados contra o limite do plano.
+</a:t>
+            </a:r>
+            <a:r>
+              <a:rPr lang="en-US" sz="1300" b="1" dirty="0">
+                <a:solidFill>
+                  <a:srgbClr val="F59E0B"/>
+                </a:solidFill>
+              </a:rPr>
+              <a:t>• Aviso de Bloqueio: </a:t>
+            </a:r>
+            <a:r>
+              <a:rPr lang="en-US" sz="1200" dirty="0">
+                <a:solidFill>
+                  <a:srgbClr val="CBD5E1"/>
+                </a:solidFill>
+              </a:rPr>
+              <a:t>Ao tentar exceder o limite, um pop-up elegante impede o cadastro e avisa que o limite de staff foi atingido.
+</a:t>
+            </a:r>
+            <a:r>
+              <a:rPr lang="en-US" sz="1300" b="1" dirty="0">
+                <a:solidFill>
+                  <a:srgbClr val="F59E0B"/>
+                </a:solidFill>
+              </a:rPr>
+              <a:t>• Incentivo ao Upgrade: </a:t>
+            </a:r>
+            <a:r>
+              <a:rPr lang="en-US" sz="1200" dirty="0">
+                <a:solidFill>
+                  <a:srgbClr val="CBD5E1"/>
+                </a:solidFill>
+              </a:rPr>
+              <a:t>Orienta o usuário a fazer upgrade do plano para obter mais acessos (ex: de .22LR para .357mag).
+</a:t>
+            </a:r>
+            <a:endParaRPr lang="en-US" sz="1300" dirty="0"/>
+          </a:p>
+        </p:txBody>
+      </p:sp>
+      <p:sp>
+        <p:nvSpPr>
+          <p:cNvPr id="6" name="Shape 4"/>
+          <p:cNvSpPr/>
+          <p:nvPr/>
+        </p:nvSpPr>
+        <p:spPr>
+          <a:xfrm>
+            <a:off x="5852160" y="1554480"/>
+            <a:ext cx="5852160" cy="3474720"/>
+          </a:xfrm>
+          <a:prstGeom prst="rect">
+            <a:avLst/>
+          </a:prstGeom>
+          <a:solidFill>
+            <a:srgbClr val="141A28"/>
+          </a:solidFill>
+          <a:ln w="12700">
+            <a:solidFill>
+              <a:srgbClr val="1E293B"/>
+            </a:solidFill>
+            <a:prstDash val="solid"/>
+          </a:ln>
+        </p:spPr>
+      </p:sp>
+      <p:pic>
+        <p:nvPicPr>
+          <p:cNvPr id="7" name="Image 0" descr="C:\Users\Guilherme Gomes\.gemini\antigravity\brain\392f0286-5b76-4ec8-ac1d-7de16ea0eefa\media__1780335415290.png"/>
+          <p:cNvPicPr>
+            <a:picLocks noChangeAspect="1"/>
+          </p:cNvPicPr>
+          <p:nvPr/>
+        </p:nvPicPr>
+        <p:blipFill>
+          <a:blip r:embed="rId3"/>
+          <a:stretch>
+            <a:fillRect/>
+          </a:stretch>
+        </p:blipFill>
+        <p:spPr>
+          <a:xfrm>
+            <a:off x="5943600" y="1645920"/>
+            <a:ext cx="5669280" cy="3291840"/>
+          </a:xfrm>
+          <a:prstGeom prst="rect">
+            <a:avLst/>
+          </a:prstGeom>
+        </p:spPr>
+      </p:pic>
+      <p:sp>
+        <p:nvSpPr>
+          <p:cNvPr id="8" name="Shape 5"/>
+          <p:cNvSpPr/>
+          <p:nvPr/>
+        </p:nvSpPr>
+        <p:spPr>
+          <a:xfrm>
+            <a:off x="457200" y="6126480"/>
             <a:ext cx="11274552" cy="18288"/>
           </a:xfrm>
           <a:prstGeom prst="rect">
@@ -7082,14 +6364,14 @@
       </p:sp>
       <p:sp>
         <p:nvSpPr>
-          <p:cNvPr id="5" name="Text 3"/>
-          <p:cNvSpPr/>
-          <p:nvPr/>
-        </p:nvSpPr>
-        <p:spPr>
-          <a:xfrm>
-            <a:off x="457200" y="1463040"/>
-            <a:ext cx="5029200" cy="4389120"/>
+          <p:cNvPr id="9" name="Text 6"/>
+          <p:cNvSpPr/>
+          <p:nvPr/>
+        </p:nvSpPr>
+        <p:spPr>
+          <a:xfrm>
+            <a:off x="457200" y="6217920"/>
+            <a:ext cx="7315200" cy="274320"/>
           </a:xfrm>
           <a:prstGeom prst="rect">
             <a:avLst/>
@@ -7098,174 +6380,40 @@
           <a:ln/>
         </p:spPr>
         <p:txBody>
-          <a:bodyPr wrap="square" rtlCol="0" anchor="t"/>
-          <a:lstStyle/>
-          <a:p>
-            <a:pPr algn="l" indent="0" marL="0">
+          <a:bodyPr wrap="square" rtlCol="0" anchor="ctr"/>
+          <a:lstStyle/>
+          <a:p>
+            <a:pPr marL="0" indent="0">
               <a:buNone/>
             </a:pPr>
             <a:r>
-              <a:rPr lang="en-US" sz="1300" b="1" dirty="0">
-                <a:solidFill>
-                  <a:srgbClr val="F59E0B"/>
-                </a:solidFill>
-              </a:rPr>
-              <a:t>• </a:t>
-            </a:r>
-            <a:pPr algn="l" indent="0" marL="0">
-              <a:buNone/>
-            </a:pPr>
-            <a:r>
-              <a:rPr lang="en-US" sz="1300" b="1" dirty="0">
-                <a:solidFill>
-                  <a:srgbClr val="F59E0B"/>
-                </a:solidFill>
-              </a:rPr>
-              <a:t>Limitação por Calibre: </a:t>
-            </a:r>
-            <a:pPr algn="l" indent="0" marL="0">
-              <a:buNone/>
-            </a:pPr>
-            <a:r>
-              <a:rPr lang="en-US" sz="1200" dirty="0">
-                <a:solidFill>
-                  <a:srgbClr val="CBD5E1"/>
-                </a:solidFill>
-              </a:rPr>
-              <a:t>O sistema valida a quantidade de colaboradores ativos cadastrados contra o limite do plano.
-</a:t>
-            </a:r>
-            <a:pPr algn="l" indent="0" marL="0">
-              <a:buNone/>
-            </a:pPr>
-            <a:r>
-              <a:rPr lang="en-US" sz="1300" b="1" dirty="0">
-                <a:solidFill>
-                  <a:srgbClr val="F59E0B"/>
-                </a:solidFill>
-              </a:rPr>
-              <a:t>• </a:t>
-            </a:r>
-            <a:pPr algn="l" indent="0" marL="0">
-              <a:buNone/>
-            </a:pPr>
-            <a:r>
-              <a:rPr lang="en-US" sz="1300" b="1" dirty="0">
-                <a:solidFill>
-                  <a:srgbClr val="F59E0B"/>
-                </a:solidFill>
-              </a:rPr>
-              <a:t>Aviso de Bloqueio: </a:t>
-            </a:r>
-            <a:pPr algn="l" indent="0" marL="0">
-              <a:buNone/>
-            </a:pPr>
-            <a:r>
-              <a:rPr lang="en-US" sz="1200" dirty="0">
-                <a:solidFill>
-                  <a:srgbClr val="CBD5E1"/>
-                </a:solidFill>
-              </a:rPr>
-              <a:t>Ao tentar exceder o limite, um pop-up elegante impede o cadastro e avisa que o limite de staff foi atingido.
-</a:t>
-            </a:r>
-            <a:pPr algn="l" indent="0" marL="0">
-              <a:buNone/>
-            </a:pPr>
-            <a:r>
-              <a:rPr lang="en-US" sz="1300" b="1" dirty="0">
-                <a:solidFill>
-                  <a:srgbClr val="F59E0B"/>
-                </a:solidFill>
-              </a:rPr>
-              <a:t>• </a:t>
-            </a:r>
-            <a:pPr algn="l" indent="0" marL="0">
-              <a:buNone/>
-            </a:pPr>
-            <a:r>
-              <a:rPr lang="en-US" sz="1300" b="1" dirty="0">
-                <a:solidFill>
-                  <a:srgbClr val="F59E0B"/>
-                </a:solidFill>
-              </a:rPr>
-              <a:t>Incentivo ao Upgrade: </a:t>
-            </a:r>
-            <a:pPr algn="l" indent="0" marL="0">
-              <a:buNone/>
-            </a:pPr>
-            <a:r>
-              <a:rPr lang="en-US" sz="1200" dirty="0">
-                <a:solidFill>
-                  <a:srgbClr val="CBD5E1"/>
-                </a:solidFill>
-              </a:rPr>
-              <a:t>Orienta o usuário a fazer upgrade do plano para obter mais acessos (ex: de .22LR para .357mag).
-</a:t>
-            </a:r>
-            <a:endParaRPr lang="en-US" sz="1300" dirty="0"/>
-          </a:p>
-        </p:txBody>
-      </p:sp>
-      <p:sp>
-        <p:nvSpPr>
-          <p:cNvPr id="6" name="Shape 4"/>
-          <p:cNvSpPr/>
-          <p:nvPr/>
-        </p:nvSpPr>
-        <p:spPr>
-          <a:xfrm>
-            <a:off x="5852160" y="1554480"/>
-            <a:ext cx="5852160" cy="3474720"/>
-          </a:xfrm>
-          <a:prstGeom prst="rect">
-            <a:avLst/>
-          </a:prstGeom>
-          <a:solidFill>
-            <a:srgbClr val="141A28"/>
-          </a:solidFill>
-          <a:ln w="12700">
-            <a:solidFill>
-              <a:srgbClr val="1E293B"/>
-            </a:solidFill>
-            <a:prstDash val="solid"/>
-          </a:ln>
-        </p:spPr>
-      </p:sp>
-      <p:pic>
-        <p:nvPicPr>
-          <p:cNvPr id="7" name="Image 0" descr="C:\Users\Guilherme Gomes\.gemini\antigravity\brain\392f0286-5b76-4ec8-ac1d-7de16ea0eefa\media__1780335415290.png">    </p:cNvPr>
-          <p:cNvPicPr>
-            <a:picLocks noChangeAspect="1"/>
-          </p:cNvPicPr>
-          <p:nvPr/>
-        </p:nvPicPr>
-        <p:blipFill>
-          <a:blip r:embed="rId1"/>
-          <a:stretch>
-            <a:fillRect/>
-          </a:stretch>
-        </p:blipFill>
-        <p:spPr>
-          <a:xfrm>
-            <a:off x="5943600" y="1645920"/>
-            <a:ext cx="5669280" cy="3291840"/>
-          </a:xfrm>
-          <a:prstGeom prst="rect">
-            <a:avLst/>
-          </a:prstGeom>
-        </p:spPr>
-      </p:pic>
-      <p:sp>
-        <p:nvSpPr>
-          <p:cNvPr id="8" name="Shape 5"/>
-          <p:cNvSpPr/>
-          <p:nvPr/>
-        </p:nvSpPr>
-        <p:spPr>
-          <a:xfrm>
-            <a:off x="457200" y="6126480"/>
-            <a:ext cx="11274552" cy="18288"/>
+              <a:rPr lang="en-US" sz="900" dirty="0">
+                <a:solidFill>
+                  <a:srgbClr val="94A3B8"/>
+                </a:solidFill>
+              </a:rPr>
+              <a:t>Portal GCAC — Solução para Atiradores, Colecionadores, Caçadores e Despachantes</a:t>
+            </a:r>
+            <a:endParaRPr lang="en-US" sz="900" dirty="0"/>
+          </a:p>
+        </p:txBody>
+      </p:sp>
+      <p:sp>
+        <p:nvSpPr>
+          <p:cNvPr id="10" name="Shape 2">
+            <a:extLst>
+              <a:ext uri="{FF2B5EF4-FFF2-40B4-BE49-F238E27FC236}">
+                <a16:creationId xmlns:a16="http://schemas.microsoft.com/office/drawing/2014/main" id="{6DE236F2-B3AE-42FE-9AAA-8462E1B693DA}"/>
+              </a:ext>
+            </a:extLst>
+          </p:cNvPr>
+          <p:cNvSpPr/>
+          <p:nvPr/>
+        </p:nvSpPr>
+        <p:spPr>
+          <a:xfrm>
+            <a:off x="457200" y="1097280"/>
+            <a:ext cx="8563356" cy="68580"/>
           </a:xfrm>
           <a:prstGeom prst="rect">
             <a:avLst/>
@@ -7280,42 +6428,6 @@
             <a:prstDash val="solid"/>
           </a:ln>
         </p:spPr>
-      </p:sp>
-      <p:sp>
-        <p:nvSpPr>
-          <p:cNvPr id="9" name="Text 6"/>
-          <p:cNvSpPr/>
-          <p:nvPr/>
-        </p:nvSpPr>
-        <p:spPr>
-          <a:xfrm>
-            <a:off x="457200" y="6217920"/>
-            <a:ext cx="7315200" cy="274320"/>
-          </a:xfrm>
-          <a:prstGeom prst="rect">
-            <a:avLst/>
-          </a:prstGeom>
-          <a:noFill/>
-          <a:ln/>
-        </p:spPr>
-        <p:txBody>
-          <a:bodyPr wrap="square" rtlCol="0" anchor="ctr"/>
-          <a:lstStyle/>
-          <a:p>
-            <a:pPr indent="0" marL="0">
-              <a:buNone/>
-            </a:pPr>
-            <a:r>
-              <a:rPr lang="en-US" sz="900" dirty="0">
-                <a:solidFill>
-                  <a:srgbClr val="94A3B8"/>
-                </a:solidFill>
-              </a:rPr>
-              <a:t>Portal GCAC — Solução para Atiradores, Colecionadores, Caçadores e Despachantes</a:t>
-            </a:r>
-            <a:endParaRPr lang="en-US" sz="900" dirty="0"/>
-          </a:p>
-        </p:txBody>
       </p:sp>
     </p:spTree>
   </p:cSld>
@@ -7618,4 +6730,299 @@
     </a:ext>
   </a:extLst>
 </a:theme>
+</file>
+
+<file path=ppt/theme/theme2.xml><?xml version="1.0" encoding="utf-8"?>
+<a:theme xmlns:a="http://schemas.openxmlformats.org/drawingml/2006/main" name="Tema do Office">
+  <a:themeElements>
+    <a:clrScheme name="Office">
+      <a:dk1>
+        <a:sysClr val="windowText" lastClr="000000"/>
+      </a:dk1>
+      <a:lt1>
+        <a:sysClr val="window" lastClr="FFFFFF"/>
+      </a:lt1>
+      <a:dk2>
+        <a:srgbClr val="44546A"/>
+      </a:dk2>
+      <a:lt2>
+        <a:srgbClr val="E7E6E6"/>
+      </a:lt2>
+      <a:accent1>
+        <a:srgbClr val="4472C4"/>
+      </a:accent1>
+      <a:accent2>
+        <a:srgbClr val="ED7D31"/>
+      </a:accent2>
+      <a:accent3>
+        <a:srgbClr val="A5A5A5"/>
+      </a:accent3>
+      <a:accent4>
+        <a:srgbClr val="FFC000"/>
+      </a:accent4>
+      <a:accent5>
+        <a:srgbClr val="5B9BD5"/>
+      </a:accent5>
+      <a:accent6>
+        <a:srgbClr val="70AD47"/>
+      </a:accent6>
+      <a:hlink>
+        <a:srgbClr val="0563C1"/>
+      </a:hlink>
+      <a:folHlink>
+        <a:srgbClr val="954F72"/>
+      </a:folHlink>
+    </a:clrScheme>
+    <a:fontScheme name="Office">
+      <a:majorFont>
+        <a:latin typeface="Calibri Light" panose="020F0302020204030204"/>
+        <a:ea typeface=""/>
+        <a:cs typeface=""/>
+        <a:font script="Jpan" typeface="游ゴシック Light"/>
+        <a:font script="Hang" typeface="맑은 고딕"/>
+        <a:font script="Hans" typeface="等线 Light"/>
+        <a:font script="Hant" typeface="新細明體"/>
+        <a:font script="Arab" typeface="Times New Roman"/>
+        <a:font script="Hebr" typeface="Times New Roman"/>
+        <a:font script="Thai" typeface="Angsana New"/>
+        <a:font script="Ethi" typeface="Nyala"/>
+        <a:font script="Beng" typeface="Vrinda"/>
+        <a:font script="Gujr" typeface="Shruti"/>
+        <a:font script="Khmr" typeface="MoolBoran"/>
+        <a:font script="Knda" typeface="Tunga"/>
+        <a:font script="Guru" typeface="Raavi"/>
+        <a:font script="Cans" typeface="Euphemia"/>
+        <a:font script="Cher" typeface="Plantagenet Cherokee"/>
+        <a:font script="Yiii" typeface="Microsoft Yi Baiti"/>
+        <a:font script="Tibt" typeface="Microsoft Himalaya"/>
+        <a:font script="Thaa" typeface="MV Boli"/>
+        <a:font script="Deva" typeface="Mangal"/>
+        <a:font script="Telu" typeface="Gautami"/>
+        <a:font script="Taml" typeface="Latha"/>
+        <a:font script="Syrc" typeface="Estrangelo Edessa"/>
+        <a:font script="Orya" typeface="Kalinga"/>
+        <a:font script="Mlym" typeface="Kartika"/>
+        <a:font script="Laoo" typeface="DokChampa"/>
+        <a:font script="Sinh" typeface="Iskoola Pota"/>
+        <a:font script="Mong" typeface="Mongolian Baiti"/>
+        <a:font script="Viet" typeface="Times New Roman"/>
+        <a:font script="Uigh" typeface="Microsoft Uighur"/>
+        <a:font script="Geor" typeface="Sylfaen"/>
+        <a:font script="Armn" typeface="Arial"/>
+        <a:font script="Bugi" typeface="Leelawadee UI"/>
+        <a:font script="Bopo" typeface="Microsoft JhengHei"/>
+        <a:font script="Java" typeface="Javanese Text"/>
+        <a:font script="Lisu" typeface="Segoe UI"/>
+        <a:font script="Mymr" typeface="Myanmar Text"/>
+        <a:font script="Nkoo" typeface="Ebrima"/>
+        <a:font script="Olck" typeface="Nirmala UI"/>
+        <a:font script="Osma" typeface="Ebrima"/>
+        <a:font script="Phag" typeface="Phagspa"/>
+        <a:font script="Syrn" typeface="Estrangelo Edessa"/>
+        <a:font script="Syrj" typeface="Estrangelo Edessa"/>
+        <a:font script="Syre" typeface="Estrangelo Edessa"/>
+        <a:font script="Sora" typeface="Nirmala UI"/>
+        <a:font script="Tale" typeface="Microsoft Tai Le"/>
+        <a:font script="Talu" typeface="Microsoft New Tai Lue"/>
+        <a:font script="Tfng" typeface="Ebrima"/>
+      </a:majorFont>
+      <a:minorFont>
+        <a:latin typeface="Calibri" panose="020F0502020204030204"/>
+        <a:ea typeface=""/>
+        <a:cs typeface=""/>
+        <a:font script="Jpan" typeface="游ゴシック"/>
+        <a:font script="Hang" typeface="맑은 고딕"/>
+        <a:font script="Hans" typeface="等线"/>
+        <a:font script="Hant" typeface="新細明體"/>
+        <a:font script="Arab" typeface="Arial"/>
+        <a:font script="Hebr" typeface="Arial"/>
+        <a:font script="Thai" typeface="Cordia New"/>
+        <a:font script="Ethi" typeface="Nyala"/>
+        <a:font script="Beng" typeface="Vrinda"/>
+        <a:font script="Gujr" typeface="Shruti"/>
+        <a:font script="Khmr" typeface="DaunPenh"/>
+        <a:font script="Knda" typeface="Tunga"/>
+        <a:font script="Guru" typeface="Raavi"/>
+        <a:font script="Cans" typeface="Euphemia"/>
+        <a:font script="Cher" typeface="Plantagenet Cherokee"/>
+        <a:font script="Yiii" typeface="Microsoft Yi Baiti"/>
+        <a:font script="Tibt" typeface="Microsoft Himalaya"/>
+        <a:font script="Thaa" typeface="MV Boli"/>
+        <a:font script="Deva" typeface="Mangal"/>
+        <a:font script="Telu" typeface="Gautami"/>
+        <a:font script="Taml" typeface="Latha"/>
+        <a:font script="Syrc" typeface="Estrangelo Edessa"/>
+        <a:font script="Orya" typeface="Kalinga"/>
+        <a:font script="Mlym" typeface="Kartika"/>
+        <a:font script="Laoo" typeface="DokChampa"/>
+        <a:font script="Sinh" typeface="Iskoola Pota"/>
+        <a:font script="Mong" typeface="Mongolian Baiti"/>
+        <a:font script="Viet" typeface="Arial"/>
+        <a:font script="Uigh" typeface="Microsoft Uighur"/>
+        <a:font script="Geor" typeface="Sylfaen"/>
+        <a:font script="Armn" typeface="Arial"/>
+        <a:font script="Bugi" typeface="Leelawadee UI"/>
+        <a:font script="Bopo" typeface="Microsoft JhengHei"/>
+        <a:font script="Java" typeface="Javanese Text"/>
+        <a:font script="Lisu" typeface="Segoe UI"/>
+        <a:font script="Mymr" typeface="Myanmar Text"/>
+        <a:font script="Nkoo" typeface="Ebrima"/>
+        <a:font script="Olck" typeface="Nirmala UI"/>
+        <a:font script="Osma" typeface="Ebrima"/>
+        <a:font script="Phag" typeface="Phagspa"/>
+        <a:font script="Syrn" typeface="Estrangelo Edessa"/>
+        <a:font script="Syrj" typeface="Estrangelo Edessa"/>
+        <a:font script="Syre" typeface="Estrangelo Edessa"/>
+        <a:font script="Sora" typeface="Nirmala UI"/>
+        <a:font script="Tale" typeface="Microsoft Tai Le"/>
+        <a:font script="Talu" typeface="Microsoft New Tai Lue"/>
+        <a:font script="Tfng" typeface="Ebrima"/>
+      </a:minorFont>
+    </a:fontScheme>
+    <a:fmtScheme name="Office">
+      <a:fillStyleLst>
+        <a:solidFill>
+          <a:schemeClr val="phClr"/>
+        </a:solidFill>
+        <a:gradFill rotWithShape="1">
+          <a:gsLst>
+            <a:gs pos="0">
+              <a:schemeClr val="phClr">
+                <a:lumMod val="110000"/>
+                <a:satMod val="105000"/>
+                <a:tint val="67000"/>
+              </a:schemeClr>
+            </a:gs>
+            <a:gs pos="50000">
+              <a:schemeClr val="phClr">
+                <a:lumMod val="105000"/>
+                <a:satMod val="103000"/>
+                <a:tint val="73000"/>
+              </a:schemeClr>
+            </a:gs>
+            <a:gs pos="100000">
+              <a:schemeClr val="phClr">
+                <a:lumMod val="105000"/>
+                <a:satMod val="109000"/>
+                <a:tint val="81000"/>
+              </a:schemeClr>
+            </a:gs>
+          </a:gsLst>
+          <a:lin ang="5400000" scaled="0"/>
+        </a:gradFill>
+        <a:gradFill rotWithShape="1">
+          <a:gsLst>
+            <a:gs pos="0">
+              <a:schemeClr val="phClr">
+                <a:satMod val="103000"/>
+                <a:lumMod val="102000"/>
+                <a:tint val="94000"/>
+              </a:schemeClr>
+            </a:gs>
+            <a:gs pos="50000">
+              <a:schemeClr val="phClr">
+                <a:satMod val="110000"/>
+                <a:lumMod val="100000"/>
+                <a:shade val="100000"/>
+              </a:schemeClr>
+            </a:gs>
+            <a:gs pos="100000">
+              <a:schemeClr val="phClr">
+                <a:lumMod val="99000"/>
+                <a:satMod val="120000"/>
+                <a:shade val="78000"/>
+              </a:schemeClr>
+            </a:gs>
+          </a:gsLst>
+          <a:lin ang="5400000" scaled="0"/>
+        </a:gradFill>
+      </a:fillStyleLst>
+      <a:lnStyleLst>
+        <a:ln w="6350" cap="flat" cmpd="sng" algn="ctr">
+          <a:solidFill>
+            <a:schemeClr val="phClr"/>
+          </a:solidFill>
+          <a:prstDash val="solid"/>
+          <a:miter lim="800000"/>
+        </a:ln>
+        <a:ln w="12700" cap="flat" cmpd="sng" algn="ctr">
+          <a:solidFill>
+            <a:schemeClr val="phClr"/>
+          </a:solidFill>
+          <a:prstDash val="solid"/>
+          <a:miter lim="800000"/>
+        </a:ln>
+        <a:ln w="19050" cap="flat" cmpd="sng" algn="ctr">
+          <a:solidFill>
+            <a:schemeClr val="phClr"/>
+          </a:solidFill>
+          <a:prstDash val="solid"/>
+          <a:miter lim="800000"/>
+        </a:ln>
+      </a:lnStyleLst>
+      <a:effectStyleLst>
+        <a:effectStyle>
+          <a:effectLst/>
+        </a:effectStyle>
+        <a:effectStyle>
+          <a:effectLst/>
+        </a:effectStyle>
+        <a:effectStyle>
+          <a:effectLst>
+            <a:outerShdw blurRad="57150" dist="19050" dir="5400000" algn="ctr" rotWithShape="0">
+              <a:srgbClr val="000000">
+                <a:alpha val="63000"/>
+              </a:srgbClr>
+            </a:outerShdw>
+          </a:effectLst>
+        </a:effectStyle>
+      </a:effectStyleLst>
+      <a:bgFillStyleLst>
+        <a:solidFill>
+          <a:schemeClr val="phClr"/>
+        </a:solidFill>
+        <a:solidFill>
+          <a:schemeClr val="phClr">
+            <a:tint val="95000"/>
+            <a:satMod val="170000"/>
+          </a:schemeClr>
+        </a:solidFill>
+        <a:gradFill rotWithShape="1">
+          <a:gsLst>
+            <a:gs pos="0">
+              <a:schemeClr val="phClr">
+                <a:tint val="93000"/>
+                <a:satMod val="150000"/>
+                <a:shade val="98000"/>
+                <a:lumMod val="102000"/>
+              </a:schemeClr>
+            </a:gs>
+            <a:gs pos="50000">
+              <a:schemeClr val="phClr">
+                <a:tint val="98000"/>
+                <a:satMod val="130000"/>
+                <a:shade val="90000"/>
+                <a:lumMod val="103000"/>
+              </a:schemeClr>
+            </a:gs>
+            <a:gs pos="100000">
+              <a:schemeClr val="phClr">
+                <a:shade val="63000"/>
+                <a:satMod val="120000"/>
+              </a:schemeClr>
+            </a:gs>
+          </a:gsLst>
+          <a:lin ang="5400000" scaled="0"/>
+        </a:gradFill>
+      </a:bgFillStyleLst>
+    </a:fmtScheme>
+  </a:themeElements>
+  <a:objectDefaults/>
+  <a:extraClrSchemeLst/>
+  <a:extLst>
+    <a:ext uri="{05A4C25C-085E-4340-85A3-A5531E510DB2}">
+      <thm15:themeFamily xmlns:thm15="http://schemas.microsoft.com/office/thememl/2012/main" name="Office Theme" id="{62F939B6-93AF-4DB8-9C6B-D6C7DFDC589F}" vid="{4A3C46E8-61CC-4603-A589-7422A47A8E4A}"/>
+    </a:ext>
+  </a:extLst>
+</a:theme>
 </file>